--- a/reports/GroupMeeting_2026-04-09.pptx
+++ b/reports/GroupMeeting_2026-04-09.pptx
@@ -3090,6 +3090,14 @@
 <file path=ppt/slides/slide1.xml><?xml version="1.0" encoding="utf-8"?>
 <p:sld xmlns:a="http://schemas.openxmlformats.org/drawingml/2006/main" xmlns:p="http://schemas.openxmlformats.org/presentationml/2006/main" xmlns:r="http://schemas.openxmlformats.org/officeDocument/2006/relationships">
   <p:cSld>
+    <p:bg>
+      <p:bgPr>
+        <a:solidFill>
+          <a:srgbClr val="FDFDFD"/>
+        </a:solidFill>
+        <a:effectLst/>
+      </p:bgPr>
+    </p:bg>
     <p:spTree>
       <p:nvGrpSpPr>
         <p:cNvPr id="1" name=""/>
@@ -3099,301 +3107,23 @@
       <p:grpSpPr/>
       <p:sp>
         <p:nvSpPr>
-          <p:cNvPr id="2" name="TextBox 1"/>
-          <p:cNvSpPr txBox="1"/>
-          <p:nvPr/>
-        </p:nvSpPr>
-        <p:spPr>
-          <a:xfrm>
-            <a:off x="457200" y="2377440"/>
-            <a:ext cx="11277295" cy="1280160"/>
-          </a:xfrm>
-          <a:prstGeom prst="rect">
-            <a:avLst/>
-          </a:prstGeom>
-          <a:noFill/>
-        </p:spPr>
-        <p:txBody>
-          <a:bodyPr wrap="square">
-            <a:spAutoFit/>
-          </a:bodyPr>
-          <a:lstStyle/>
-          <a:p>
-            <a:pPr algn="ctr"/>
-            <a:r>
-              <a:rPr sz="3200" b="1" i="0">
-                <a:solidFill>
-                  <a:srgbClr val="1A2744"/>
-                </a:solidFill>
-                <a:latin typeface="Arial"/>
-              </a:rPr>
-              <a:t>TrpB MetaDynamics Benchmark — Weekly Progress Report</a:t>
-            </a:r>
-          </a:p>
-        </p:txBody>
-      </p:sp>
-      <p:sp>
-        <p:nvSpPr>
-          <p:cNvPr id="3" name="TextBox 2"/>
-          <p:cNvSpPr txBox="1"/>
-          <p:nvPr/>
-        </p:nvSpPr>
-        <p:spPr>
-          <a:xfrm>
-            <a:off x="457200" y="3749039"/>
-            <a:ext cx="11277295" cy="548640"/>
-          </a:xfrm>
-          <a:prstGeom prst="rect">
-            <a:avLst/>
-          </a:prstGeom>
-          <a:noFill/>
-        </p:spPr>
-        <p:txBody>
-          <a:bodyPr wrap="none">
-            <a:spAutoFit/>
-          </a:bodyPr>
-          <a:lstStyle/>
-          <a:p>
-            <a:pPr algn="ctr"/>
-            <a:r>
-              <a:rPr sz="1800" b="0" i="0">
-                <a:solidFill>
-                  <a:srgbClr val="000000"/>
-                </a:solidFill>
-                <a:latin typeface="Arial"/>
-              </a:rPr>
-              <a:t>Zhenpeng Liu  |  Anima Lab  |  2026-04-09</a:t>
-            </a:r>
-          </a:p>
-        </p:txBody>
-      </p:sp>
-      <p:sp>
-        <p:nvSpPr>
-          <p:cNvPr id="4" name="TextBox 3"/>
-          <p:cNvSpPr txBox="1"/>
-          <p:nvPr/>
-        </p:nvSpPr>
-        <p:spPr>
-          <a:xfrm>
-            <a:off x="457200" y="6446520"/>
-            <a:ext cx="11277295" cy="320040"/>
-          </a:xfrm>
-          <a:prstGeom prst="rect">
-            <a:avLst/>
-          </a:prstGeom>
-          <a:noFill/>
-        </p:spPr>
-        <p:txBody>
-          <a:bodyPr wrap="square" lIns="0" rIns="0" tIns="0" bIns="0">
-            <a:spAutoFit/>
-          </a:bodyPr>
-          <a:lstStyle/>
-          <a:p>
-            <a:pPr algn="l"/>
-            <a:r>
-              <a:rPr sz="800" b="0" i="1">
-                <a:solidFill>
-                  <a:srgbClr val="666666"/>
-                </a:solidFill>
-                <a:latin typeface="Arial"/>
-              </a:rPr>
-              <a:t>Replicating Maria-Solano et al., JACS 2019, 141, 13049–13056</a:t>
-            </a:r>
-          </a:p>
-        </p:txBody>
-      </p:sp>
-    </p:spTree>
-  </p:cSld>
-  <p:clrMapOvr>
-    <a:masterClrMapping/>
-  </p:clrMapOvr>
-</p:sld>
-</file>
-
-<file path=ppt/slides/slide10.xml><?xml version="1.0" encoding="utf-8"?>
-<p:sld xmlns:a="http://schemas.openxmlformats.org/drawingml/2006/main" xmlns:p="http://schemas.openxmlformats.org/presentationml/2006/main" xmlns:r="http://schemas.openxmlformats.org/officeDocument/2006/relationships">
-  <p:cSld>
-    <p:spTree>
-      <p:nvGrpSpPr>
-        <p:cNvPr id="1" name=""/>
-        <p:cNvGrpSpPr/>
-        <p:nvPr/>
-      </p:nvGrpSpPr>
-      <p:grpSpPr/>
-      <p:sp>
-        <p:nvSpPr>
-          <p:cNvPr id="2" name="TextBox 1"/>
-          <p:cNvSpPr txBox="1"/>
-          <p:nvPr/>
-        </p:nvSpPr>
-        <p:spPr>
-          <a:xfrm>
-            <a:off x="457200" y="320040"/>
-            <a:ext cx="11274552" cy="822960"/>
-          </a:xfrm>
-          <a:prstGeom prst="rect">
-            <a:avLst/>
-          </a:prstGeom>
-          <a:noFill/>
-        </p:spPr>
-        <p:txBody>
-          <a:bodyPr wrap="square">
-            <a:spAutoFit/>
-          </a:bodyPr>
-          <a:lstStyle/>
-          <a:p>
-            <a:r>
-              <a:rPr sz="2200" b="1">
-                <a:solidFill>
-                  <a:srgbClr val="1A2744"/>
-                </a:solidFill>
-                <a:latin typeface="Arial"/>
-              </a:rPr>
-              <a:t>Plan: replace plumed.dat with PATHMSD, resubmit initial run, extract 10 snapshots</a:t>
-            </a:r>
-          </a:p>
-        </p:txBody>
-      </p:sp>
-      <p:sp>
-        <p:nvSpPr>
-          <p:cNvPr id="3" name="TextBox 2"/>
-          <p:cNvSpPr txBox="1"/>
-          <p:nvPr/>
-        </p:nvSpPr>
-        <p:spPr>
-          <a:xfrm>
-            <a:off x="457200" y="1280160"/>
-            <a:ext cx="11274552" cy="3200400"/>
-          </a:xfrm>
-          <a:prstGeom prst="rect">
-            <a:avLst/>
-          </a:prstGeom>
-          <a:noFill/>
-        </p:spPr>
-        <p:txBody>
-          <a:bodyPr wrap="square">
-            <a:spAutoFit/>
-          </a:bodyPr>
-          <a:lstStyle/>
-          <a:p>
-            <a:pPr>
-              <a:spcAft>
-                <a:spcPts val="600"/>
-              </a:spcAft>
-            </a:pPr>
-            <a:r>
-              <a:rPr sz="1300" b="1">
-                <a:solidFill>
-                  <a:srgbClr val="16A34A"/>
-                </a:solidFill>
-                <a:latin typeface="Arial"/>
-              </a:rPr>
-              <a:t>•  Today: PATHMSD verified on existing 46 ns trajectory with plumed driver (offline, 1.3 s) ✓</a:t>
-            </a:r>
-          </a:p>
-          <a:p>
-            <a:pPr>
-              <a:spcAft>
-                <a:spcPts val="600"/>
-              </a:spcAft>
-            </a:pPr>
-            <a:r>
-              <a:rPr sz="1300" b="0">
-                <a:solidFill>
-                  <a:srgbClr val="000000"/>
-                </a:solidFill>
-                <a:latin typeface="Arial"/>
-              </a:rPr>
-              <a:t>•  Today: update 6-stage pipeline state to reflect re-diagnosis of FP-020 + new plumed.dat</a:t>
-            </a:r>
-          </a:p>
-          <a:p>
-            <a:pPr>
-              <a:spcAft>
-                <a:spcPts val="600"/>
-              </a:spcAft>
-            </a:pPr>
-            <a:r>
-              <a:rPr sz="1300" b="0">
-                <a:solidFill>
-                  <a:srgbClr val="000000"/>
-                </a:solidFill>
-                <a:latin typeface="Arial"/>
-              </a:rPr>
-              <a:t>•  This week: backup broken Job 41514529 data and resubmit 50 ns initial run with PATHMSD version</a:t>
-            </a:r>
-          </a:p>
-          <a:p>
-            <a:pPr>
-              <a:spcAft>
-                <a:spcPts val="600"/>
-              </a:spcAft>
-            </a:pPr>
-            <a:r>
-              <a:rPr sz="1300" b="0">
-                <a:solidFill>
-                  <a:srgbClr val="000000"/>
-                </a:solidFill>
-                <a:latin typeface="Arial"/>
-              </a:rPr>
-              <a:t>•  Next week: extract 10 snapshots covering O / PC / C regions from initial run trajectory</a:t>
-            </a:r>
-          </a:p>
-          <a:p>
-            <a:pPr>
-              <a:spcAft>
-                <a:spcPts val="600"/>
-              </a:spcAft>
-            </a:pPr>
-            <a:r>
-              <a:rPr sz="1300" b="0">
-                <a:solidFill>
-                  <a:srgbClr val="000000"/>
-                </a:solidFill>
-                <a:latin typeface="Arial"/>
-              </a:rPr>
-              <a:t>•  Week after: launch 10-walker WT-MetaD production (SI protocol: 50–100 ns each, ~500 ns total)</a:t>
-            </a:r>
-          </a:p>
-          <a:p>
-            <a:pPr>
-              <a:spcAft>
-                <a:spcPts val="600"/>
-              </a:spcAft>
-            </a:pPr>
-            <a:r>
-              <a:rPr sz="1300" b="0">
-                <a:solidFill>
-                  <a:srgbClr val="000000"/>
-                </a:solidFill>
-                <a:latin typeface="Arial"/>
-              </a:rPr>
-              <a:t>•  Target: FES comparison with JACS 2019 Figure 2a within 2 weeks</a:t>
-            </a:r>
-          </a:p>
-        </p:txBody>
-      </p:sp>
-      <p:sp>
-        <p:nvSpPr>
-          <p:cNvPr id="4" name="Rectangle 3"/>
+          <p:cNvPr id="6" name="Rectangle 5"/>
           <p:cNvSpPr/>
           <p:nvPr/>
         </p:nvSpPr>
         <p:spPr>
           <a:xfrm>
-            <a:off x="457200" y="4663440"/>
-            <a:ext cx="11274552" cy="1554480"/>
+            <a:off x="109728" y="0"/>
+            <a:ext cx="12079224" cy="1005840"/>
           </a:xfrm>
           <a:prstGeom prst="rect">
             <a:avLst/>
           </a:prstGeom>
           <a:solidFill>
-            <a:srgbClr val="F0F0F0"/>
+            <a:srgbClr val="F4F6FB"/>
           </a:solidFill>
-          <a:ln w="6350">
-            <a:solidFill>
-              <a:srgbClr val="CCCCCC"/>
-            </a:solidFill>
+          <a:ln>
+            <a:noFill/>
           </a:ln>
         </p:spPr>
         <p:style>
@@ -3411,465 +3141,32 @@
           </a:fontRef>
         </p:style>
         <p:txBody>
-          <a:bodyPr rtlCol="0" anchor="ctr" wrap="none" tIns="73152" bIns="73152"/>
-          <a:lstStyle/>
-          <a:p>
-            <a:pPr algn="ctr">
-              <a:spcAft>
-                <a:spcPts val="0"/>
-              </a:spcAft>
-            </a:pPr>
-            <a:r>
-              <a:rPr sz="1100">
-                <a:solidFill>
-                  <a:srgbClr val="000000"/>
-                </a:solidFill>
-                <a:latin typeface="Courier New"/>
-              </a:rPr>
-              <a:t># Final plumed.dat (matches SI protocol, 2 lines for the path CV):</a:t>
-            </a:r>
-          </a:p>
-          <a:p>
-            <a:pPr>
-              <a:spcAft>
-                <a:spcPts val="0"/>
-              </a:spcAft>
-            </a:pPr>
-            <a:r>
-              <a:rPr sz="1100">
-                <a:solidFill>
-                  <a:srgbClr val="000000"/>
-                </a:solidFill>
-                <a:latin typeface="Courier New"/>
-              </a:rPr>
-              <a:t>path: PATHMSD REFERENCE=path_gromacs.pdb LAMBDA=379.77</a:t>
-            </a:r>
-          </a:p>
-          <a:p>
-            <a:pPr>
-              <a:spcAft>
-                <a:spcPts val="0"/>
-              </a:spcAft>
-            </a:pPr>
-            <a:r>
-              <a:rPr sz="1100">
-                <a:solidFill>
-                  <a:srgbClr val="000000"/>
-                </a:solidFill>
-                <a:latin typeface="Courier New"/>
-              </a:rPr>
-              <a:t>metad: METAD ARG=path.sss,path.zzz SIGMA=0.05 ADAPTIVE=GEOM HEIGHT=0.628 \</a:t>
-            </a:r>
-          </a:p>
-          <a:p>
-            <a:pPr>
-              <a:spcAft>
-                <a:spcPts val="0"/>
-              </a:spcAft>
-            </a:pPr>
-            <a:r>
-              <a:rPr sz="1100">
-                <a:solidFill>
-                  <a:srgbClr val="000000"/>
-                </a:solidFill>
-                <a:latin typeface="Courier New"/>
-              </a:rPr>
-              <a:t>       PACE=1000 BIASFACTOR=10 TEMP=350 FILE=HILLS</a:t>
-            </a:r>
-          </a:p>
-          <a:p>
-            <a:pPr>
-              <a:spcAft>
-                <a:spcPts val="0"/>
-              </a:spcAft>
-            </a:pPr>
-            <a:r>
-              <a:rPr sz="1100">
-                <a:solidFill>
-                  <a:srgbClr val="000000"/>
-                </a:solidFill>
-                <a:latin typeface="Courier New"/>
-              </a:rPr>
-              <a:t>PRINT ARG=path.sss,path.zzz,metad.bias FILE=COLVAR STRIDE=500</a:t>
-            </a:r>
-          </a:p>
-        </p:txBody>
-      </p:sp>
-      <p:sp>
-        <p:nvSpPr>
-          <p:cNvPr id="5" name="TextBox 4"/>
-          <p:cNvSpPr txBox="1"/>
-          <p:nvPr/>
-        </p:nvSpPr>
-        <p:spPr>
-          <a:xfrm>
-            <a:off x="457200" y="6400800"/>
-            <a:ext cx="11274552" cy="365760"/>
-          </a:xfrm>
-          <a:prstGeom prst="rect">
-            <a:avLst/>
-          </a:prstGeom>
-          <a:noFill/>
-        </p:spPr>
-        <p:txBody>
-          <a:bodyPr wrap="square">
-            <a:spAutoFit/>
-          </a:bodyPr>
-          <a:lstStyle/>
-          <a:p>
-            <a:r>
-              <a:rPr sz="800" i="1">
-                <a:solidFill>
-                  <a:srgbClr val="666666"/>
-                </a:solidFill>
-                <a:latin typeface="Arial"/>
-              </a:rPr>
-              <a:t>Target: replication/metadynamics/single_walker/plumed.dat (master branch)  |  SI S4: 'After an initial metadynamics run, we extracted ten snapshots... multiple-walkers with 10 replicas, 50–100 ns each'  |  LAMBDA source: 2.3/&lt;rmsd&gt;² × 100 (GROMACS nm), Google Groups plumed-users</a:t>
-            </a:r>
-          </a:p>
-        </p:txBody>
-      </p:sp>
-    </p:spTree>
-  </p:cSld>
-  <p:clrMapOvr>
-    <a:masterClrMapping/>
-  </p:clrMapOvr>
-</p:sld>
-</file>
-
-<file path=ppt/slides/slide2.xml><?xml version="1.0" encoding="utf-8"?>
-<p:sld xmlns:a="http://schemas.openxmlformats.org/drawingml/2006/main" xmlns:p="http://schemas.openxmlformats.org/presentationml/2006/main" xmlns:r="http://schemas.openxmlformats.org/officeDocument/2006/relationships">
-  <p:cSld>
-    <p:spTree>
-      <p:nvGrpSpPr>
-        <p:cNvPr id="1" name=""/>
-        <p:cNvGrpSpPr/>
-        <p:nvPr/>
-      </p:nvGrpSpPr>
-      <p:grpSpPr/>
-      <p:sp>
-        <p:nvSpPr>
-          <p:cNvPr id="2" name="TextBox 1"/>
-          <p:cNvSpPr txBox="1"/>
-          <p:nvPr/>
-        </p:nvSpPr>
-        <p:spPr>
-          <a:xfrm>
-            <a:off x="457200" y="320040"/>
-            <a:ext cx="11277295" cy="777240"/>
-          </a:xfrm>
-          <a:prstGeom prst="rect">
-            <a:avLst/>
-          </a:prstGeom>
-          <a:noFill/>
-        </p:spPr>
-        <p:txBody>
-          <a:bodyPr wrap="square" lIns="0" rIns="0" tIns="0" bIns="0">
-            <a:spAutoFit/>
-          </a:bodyPr>
-          <a:lstStyle/>
-          <a:p>
-            <a:pPr algn="l"/>
-            <a:r>
-              <a:rPr sz="2400" b="1" i="0">
-                <a:solidFill>
-                  <a:srgbClr val="1A2744"/>
-                </a:solidFill>
-                <a:latin typeface="Arial"/>
-              </a:rPr>
-              <a:t>Replicating JACS 2019 MetaDynamics on TrpB COMM domain as F1 conformational baseline</a:t>
-            </a:r>
-          </a:p>
-        </p:txBody>
-      </p:sp>
-      <p:sp>
-        <p:nvSpPr>
-          <p:cNvPr id="3" name="TextBox 2"/>
-          <p:cNvSpPr txBox="1"/>
-          <p:nvPr/>
-        </p:nvSpPr>
-        <p:spPr>
-          <a:xfrm>
-            <a:off x="457200" y="1143000"/>
-            <a:ext cx="11277295" cy="5257800"/>
-          </a:xfrm>
-          <a:prstGeom prst="rect">
-            <a:avLst/>
-          </a:prstGeom>
-          <a:noFill/>
-        </p:spPr>
-        <p:txBody>
-          <a:bodyPr wrap="square" lIns="0" rIns="0" tIns="0" bIns="0">
-            <a:spAutoFit/>
-          </a:bodyPr>
-          <a:lstStyle/>
-          <a:p>
-            <a:pPr algn="l">
-              <a:lnSpc>
-                <a:spcPct val="130000"/>
-              </a:lnSpc>
-              <a:spcAft>
-                <a:spcPts val="600"/>
-              </a:spcAft>
-            </a:pPr>
-            <a:r>
-              <a:rPr sz="1800" b="0" i="0">
-                <a:solidFill>
-                  <a:srgbClr val="000000"/>
-                </a:solidFill>
-                <a:latin typeface="Arial"/>
-              </a:rPr>
-              <a:t>•  Goal: benchmark FES for PfTrpS(Ain) O→PC→C transition</a:t>
-            </a:r>
-          </a:p>
-          <a:p>
-            <a:pPr algn="l">
-              <a:lnSpc>
-                <a:spcPct val="130000"/>
-              </a:lnSpc>
-              <a:spcAft>
-                <a:spcPts val="600"/>
-              </a:spcAft>
-            </a:pPr>
-            <a:r>
-              <a:rPr sz="1800" b="0" i="0">
-                <a:solidFill>
-                  <a:srgbClr val="000000"/>
-                </a:solidFill>
-                <a:latin typeface="Arial"/>
-              </a:rPr>
-              <a:t>•  Downstream: conformational reward for GenSLM + GRPO, ground truth for STAR-MD benchmark</a:t>
-            </a:r>
-          </a:p>
-          <a:p>
-            <a:pPr algn="l">
-              <a:lnSpc>
-                <a:spcPct val="130000"/>
-              </a:lnSpc>
-              <a:spcAft>
-                <a:spcPts val="600"/>
-              </a:spcAft>
-            </a:pPr>
-            <a:r>
-              <a:rPr sz="1800" b="0" i="0">
-                <a:solidFill>
-                  <a:srgbClr val="000000"/>
-                </a:solidFill>
-                <a:latin typeface="Arial"/>
-              </a:rPr>
-              <a:t>•  Stage: initial single-walker MetaD run</a:t>
-            </a:r>
-          </a:p>
-        </p:txBody>
-      </p:sp>
-      <p:sp>
-        <p:nvSpPr>
-          <p:cNvPr id="4" name="TextBox 3"/>
-          <p:cNvSpPr txBox="1"/>
-          <p:nvPr/>
-        </p:nvSpPr>
-        <p:spPr>
-          <a:xfrm>
-            <a:off x="457200" y="6446520"/>
-            <a:ext cx="11277295" cy="320040"/>
-          </a:xfrm>
-          <a:prstGeom prst="rect">
-            <a:avLst/>
-          </a:prstGeom>
-          <a:noFill/>
-        </p:spPr>
-        <p:txBody>
-          <a:bodyPr wrap="square" lIns="0" rIns="0" tIns="0" bIns="0">
-            <a:spAutoFit/>
-          </a:bodyPr>
-          <a:lstStyle/>
-          <a:p>
-            <a:pPr algn="l"/>
-            <a:r>
-              <a:rPr sz="800" b="0" i="1">
-                <a:solidFill>
-                  <a:srgbClr val="666666"/>
-                </a:solidFill>
-                <a:latin typeface="Arial"/>
-              </a:rPr>
-              <a:t>Maria-Solano et al., JACS 2019  |  SI protocol: 10 walkers × 50–100 ns after initial run</a:t>
-            </a:r>
-          </a:p>
-        </p:txBody>
-      </p:sp>
-    </p:spTree>
-  </p:cSld>
-  <p:clrMapOvr>
-    <a:masterClrMapping/>
-  </p:clrMapOvr>
-</p:sld>
-</file>
-
-<file path=ppt/slides/slide3.xml><?xml version="1.0" encoding="utf-8"?>
-<p:sld xmlns:a="http://schemas.openxmlformats.org/drawingml/2006/main" xmlns:p="http://schemas.openxmlformats.org/presentationml/2006/main" xmlns:r="http://schemas.openxmlformats.org/officeDocument/2006/relationships">
-  <p:cSld>
-    <p:spTree>
-      <p:nvGrpSpPr>
-        <p:cNvPr id="1" name=""/>
-        <p:cNvGrpSpPr/>
-        <p:nvPr/>
-      </p:nvGrpSpPr>
-      <p:grpSpPr/>
-      <p:sp>
-        <p:nvSpPr>
-          <p:cNvPr id="2" name="TextBox 1"/>
-          <p:cNvSpPr txBox="1"/>
-          <p:nvPr/>
-        </p:nvSpPr>
-        <p:spPr>
-          <a:xfrm>
-            <a:off x="457200" y="320040"/>
-            <a:ext cx="11277295" cy="777240"/>
-          </a:xfrm>
-          <a:prstGeom prst="rect">
-            <a:avLst/>
-          </a:prstGeom>
-          <a:noFill/>
-        </p:spPr>
-        <p:txBody>
-          <a:bodyPr wrap="square" lIns="0" rIns="0" tIns="0" bIns="0">
-            <a:spAutoFit/>
-          </a:bodyPr>
-          <a:lstStyle/>
-          <a:p>
-            <a:pPr algn="l"/>
-            <a:r>
-              <a:rPr sz="2400" b="1" i="0">
-                <a:solidFill>
-                  <a:srgbClr val="1A2744"/>
-                </a:solidFill>
-                <a:latin typeface="Arial"/>
-              </a:rPr>
-              <a:t>Last week: system preparation and MetaDynamics submission completed</a:t>
-            </a:r>
-          </a:p>
-        </p:txBody>
-      </p:sp>
-      <p:sp>
-        <p:nvSpPr>
-          <p:cNvPr id="3" name="TextBox 2"/>
-          <p:cNvSpPr txBox="1"/>
-          <p:nvPr/>
-        </p:nvSpPr>
-        <p:spPr>
-          <a:xfrm>
-            <a:off x="457200" y="1143000"/>
-            <a:ext cx="11277295" cy="3017520"/>
-          </a:xfrm>
-          <a:prstGeom prst="rect">
-            <a:avLst/>
-          </a:prstGeom>
-          <a:noFill/>
-        </p:spPr>
-        <p:txBody>
-          <a:bodyPr wrap="square" lIns="0" rIns="0" tIns="0" bIns="0">
-            <a:spAutoFit/>
-          </a:bodyPr>
-          <a:lstStyle/>
-          <a:p>
-            <a:pPr algn="l">
-              <a:lnSpc>
-                <a:spcPct val="125000"/>
-              </a:lnSpc>
-              <a:spcAft>
-                <a:spcPts val="600"/>
-              </a:spcAft>
-            </a:pPr>
-            <a:r>
-              <a:rPr sz="1700" b="0" i="0">
-                <a:solidFill>
-                  <a:srgbClr val="000000"/>
-                </a:solidFill>
-                <a:latin typeface="Arial"/>
-              </a:rPr>
-              <a:t>•  500 ns conventional MD completed (Job 40806029, 71.5 hrs)</a:t>
-            </a:r>
-          </a:p>
-          <a:p>
-            <a:pPr algn="l">
-              <a:lnSpc>
-                <a:spcPct val="125000"/>
-              </a:lnSpc>
-              <a:spcAft>
-                <a:spcPts val="600"/>
-              </a:spcAft>
-            </a:pPr>
-            <a:r>
-              <a:rPr sz="1700" b="0" i="0">
-                <a:solidFill>
-                  <a:srgbClr val="000000"/>
-                </a:solidFill>
-                <a:latin typeface="Arial"/>
-              </a:rPr>
-              <a:t>•  AMBER → GROMACS format conversion (ParmEd, 39268 atoms)</a:t>
-            </a:r>
-          </a:p>
-          <a:p>
-            <a:pPr algn="l">
-              <a:lnSpc>
-                <a:spcPct val="125000"/>
-              </a:lnSpc>
-              <a:spcAft>
-                <a:spcPts val="600"/>
-              </a:spcAft>
-            </a:pPr>
-            <a:r>
-              <a:rPr sz="1700" b="0" i="0">
-                <a:solidFill>
-                  <a:srgbClr val="000000"/>
-                </a:solidFill>
-                <a:latin typeface="Arial"/>
-              </a:rPr>
-              <a:t>•  PLUMED 2.9.2 compiled from source (conda version had broken libplumedKernel.so)</a:t>
-            </a:r>
-          </a:p>
-          <a:p>
-            <a:pPr algn="l">
-              <a:lnSpc>
-                <a:spcPct val="125000"/>
-              </a:lnSpc>
-              <a:spcAft>
-                <a:spcPts val="600"/>
-              </a:spcAft>
-            </a:pPr>
-            <a:r>
-              <a:rPr sz="1700" b="0" i="0">
-                <a:solidFill>
-                  <a:srgbClr val="000000"/>
-                </a:solidFill>
-                <a:latin typeface="Arial"/>
-              </a:rPr>
-              <a:t>•  Single-walker MetaD submitted (Job 41514529, FUNCPATHMSD + ADAPTIVE=GEOM)</a:t>
-            </a:r>
-          </a:p>
-        </p:txBody>
-      </p:sp>
-      <p:sp>
-        <p:nvSpPr>
-          <p:cNvPr id="4" name="Rectangle 3"/>
+          <a:bodyPr rtlCol="0" anchor="ctr"/>
+          <a:lstStyle/>
+          <a:p>
+            <a:pPr algn="ctr"/>
+          </a:p>
+        </p:txBody>
+      </p:sp>
+      <p:sp>
+        <p:nvSpPr>
+          <p:cNvPr id="5" name="Rectangle 4"/>
           <p:cNvSpPr/>
           <p:nvPr/>
         </p:nvSpPr>
         <p:spPr>
           <a:xfrm>
-            <a:off x="457200" y="5074920"/>
-            <a:ext cx="11277295" cy="1234440"/>
+            <a:off x="0" y="0"/>
+            <a:ext cx="109728" cy="6858000"/>
           </a:xfrm>
           <a:prstGeom prst="rect">
             <a:avLst/>
           </a:prstGeom>
           <a:solidFill>
-            <a:srgbClr val="F0F0F0"/>
+            <a:srgbClr val="2E5CA7"/>
           </a:solidFill>
-          <a:ln w="6350">
-            <a:solidFill>
-              <a:srgbClr val="CCCCCC"/>
-            </a:solidFill>
+          <a:ln>
+            <a:noFill/>
           </a:ln>
         </p:spPr>
         <p:style>
@@ -3889,19 +3186,21 @@
         <p:txBody>
           <a:bodyPr rtlCol="0" anchor="ctr"/>
           <a:lstStyle/>
-          <a:p/>
-        </p:txBody>
-      </p:sp>
-      <p:sp>
-        <p:nvSpPr>
-          <p:cNvPr id="5" name="TextBox 4"/>
+          <a:p>
+            <a:pPr algn="ctr"/>
+          </a:p>
+        </p:txBody>
+      </p:sp>
+      <p:sp>
+        <p:nvSpPr>
+          <p:cNvPr id="2" name="TextBox 1"/>
           <p:cNvSpPr txBox="1"/>
           <p:nvPr/>
         </p:nvSpPr>
         <p:spPr>
           <a:xfrm>
-            <a:off x="566928" y="5184648"/>
-            <a:ext cx="11057839" cy="1014984"/>
+            <a:off x="457200" y="2377440"/>
+            <a:ext cx="11277295" cy="1280160"/>
           </a:xfrm>
           <a:prstGeom prst="rect">
             <a:avLst/>
@@ -3909,41 +3208,34 @@
           <a:noFill/>
         </p:spPr>
         <p:txBody>
-          <a:bodyPr wrap="square" lIns="0" rIns="0" tIns="0" bIns="0">
+          <a:bodyPr wrap="square">
             <a:spAutoFit/>
           </a:bodyPr>
           <a:lstStyle/>
           <a:p>
-            <a:pPr algn="l">
-              <a:lnSpc>
-                <a:spcPct val="110000"/>
-              </a:lnSpc>
-              <a:spcAft>
-                <a:spcPts val="0"/>
-              </a:spcAft>
-            </a:pPr>
-            <a:r>
-              <a:rPr sz="1100" b="0" i="0">
-                <a:solidFill>
-                  <a:srgbClr val="1F1F1F"/>
-                </a:solidFill>
-                <a:latin typeface="Courier New"/>
-              </a:rPr>
-              <a:t>gmx mdrun -deffnm metad -plumed plumed.dat -ntmpi 1 -ntomp 8</a:t>
-            </a:r>
-          </a:p>
-        </p:txBody>
-      </p:sp>
-      <p:sp>
-        <p:nvSpPr>
-          <p:cNvPr id="6" name="TextBox 5"/>
+            <a:pPr algn="ctr"/>
+            <a:r>
+              <a:rPr sz="3200" b="1" i="0">
+                <a:solidFill>
+                  <a:srgbClr val="1A2744"/>
+                </a:solidFill>
+                <a:latin typeface="Arial"/>
+              </a:rPr>
+              <a:t>TrpB MetaDynamics Benchmark — Weekly Progress Report</a:t>
+            </a:r>
+          </a:p>
+        </p:txBody>
+      </p:sp>
+      <p:sp>
+        <p:nvSpPr>
+          <p:cNvPr id="3" name="TextBox 2"/>
           <p:cNvSpPr txBox="1"/>
           <p:nvPr/>
         </p:nvSpPr>
         <p:spPr>
           <a:xfrm>
-            <a:off x="457200" y="6446520"/>
-            <a:ext cx="11277295" cy="320040"/>
+            <a:off x="457200" y="3749039"/>
+            <a:ext cx="11277295" cy="548640"/>
           </a:xfrm>
           <a:prstGeom prst="rect">
             <a:avLst/>
@@ -3951,6 +3243,41 @@
           <a:noFill/>
         </p:spPr>
         <p:txBody>
+          <a:bodyPr wrap="none">
+            <a:spAutoFit/>
+          </a:bodyPr>
+          <a:lstStyle/>
+          <a:p>
+            <a:pPr algn="ctr"/>
+            <a:r>
+              <a:rPr sz="1800" b="0" i="0">
+                <a:solidFill>
+                  <a:srgbClr val="000000"/>
+                </a:solidFill>
+                <a:latin typeface="Arial"/>
+              </a:rPr>
+              <a:t>Zhenpeng Liu  |  Anima Lab  |  2026-04-09</a:t>
+            </a:r>
+          </a:p>
+        </p:txBody>
+      </p:sp>
+      <p:sp>
+        <p:nvSpPr>
+          <p:cNvPr id="4" name="TextBox 3"/>
+          <p:cNvSpPr txBox="1"/>
+          <p:nvPr/>
+        </p:nvSpPr>
+        <p:spPr>
+          <a:xfrm>
+            <a:off x="457200" y="6446520"/>
+            <a:ext cx="11277295" cy="320040"/>
+          </a:xfrm>
+          <a:prstGeom prst="rect">
+            <a:avLst/>
+          </a:prstGeom>
+          <a:noFill/>
+        </p:spPr>
+        <p:txBody>
           <a:bodyPr wrap="square" lIns="0" rIns="0" tIns="0" bIns="0">
             <a:spAutoFit/>
           </a:bodyPr>
@@ -3964,7 +3291,42 @@
                 </a:solidFill>
                 <a:latin typeface="Arial"/>
               </a:rPr>
-              <a:t>replication/metadynamics/single_walker/submit.sh</a:t>
+              <a:t>Replicating Maria-Solano et al., JACS 2019, 141, 13049–13056</a:t>
+            </a:r>
+          </a:p>
+        </p:txBody>
+      </p:sp>
+      <p:sp>
+        <p:nvSpPr>
+          <p:cNvPr id="7" name="TextBox 6"/>
+          <p:cNvSpPr txBox="1"/>
+          <p:nvPr/>
+        </p:nvSpPr>
+        <p:spPr>
+          <a:xfrm>
+            <a:off x="10058400" y="6400800"/>
+            <a:ext cx="2011680" cy="365760"/>
+          </a:xfrm>
+          <a:prstGeom prst="rect">
+            <a:avLst/>
+          </a:prstGeom>
+          <a:noFill/>
+        </p:spPr>
+        <p:txBody>
+          <a:bodyPr wrap="none" lIns="0" rIns="0">
+            <a:spAutoFit/>
+          </a:bodyPr>
+          <a:lstStyle/>
+          <a:p>
+            <a:pPr algn="r"/>
+            <a:r>
+              <a:rPr sz="800" b="0" i="0">
+                <a:solidFill>
+                  <a:srgbClr val="6B7280"/>
+                </a:solidFill>
+                <a:latin typeface="Arial"/>
+              </a:rPr>
+              <a:t>TrpB MetaD Benchmark  ·  1 / 10</a:t>
             </a:r>
           </a:p>
         </p:txBody>
@@ -3977,9 +3339,17 @@
 </p:sld>
 </file>
 
-<file path=ppt/slides/slide4.xml><?xml version="1.0" encoding="utf-8"?>
+<file path=ppt/slides/slide10.xml><?xml version="1.0" encoding="utf-8"?>
 <p:sld xmlns:a="http://schemas.openxmlformats.org/drawingml/2006/main" xmlns:p="http://schemas.openxmlformats.org/presentationml/2006/main" xmlns:r="http://schemas.openxmlformats.org/officeDocument/2006/relationships">
   <p:cSld>
+    <p:bg>
+      <p:bgPr>
+        <a:solidFill>
+          <a:srgbClr val="FDFDFD"/>
+        </a:solidFill>
+        <a:effectLst/>
+      </p:bgPr>
+    </p:bg>
     <p:spTree>
       <p:nvGrpSpPr>
         <p:cNvPr id="1" name=""/>
@@ -3989,159 +3359,23 @@
       <p:grpSpPr/>
       <p:sp>
         <p:nvSpPr>
-          <p:cNvPr id="2" name="TextBox 1"/>
-          <p:cNvSpPr txBox="1"/>
-          <p:nvPr/>
-        </p:nvSpPr>
-        <p:spPr>
-          <a:xfrm>
-            <a:off x="457200" y="320040"/>
-            <a:ext cx="11277295" cy="777240"/>
-          </a:xfrm>
-          <a:prstGeom prst="rect">
-            <a:avLst/>
-          </a:prstGeom>
-          <a:noFill/>
-        </p:spPr>
-        <p:txBody>
-          <a:bodyPr wrap="square" lIns="0" rIns="0" tIns="0" bIns="0">
-            <a:spAutoFit/>
-          </a:bodyPr>
-          <a:lstStyle/>
-          <a:p>
-            <a:pPr algn="l"/>
-            <a:r>
-              <a:rPr sz="2400" b="1" i="0">
-                <a:solidFill>
-                  <a:srgbClr val="1A2744"/>
-                </a:solidFill>
-                <a:latin typeface="Arial"/>
-              </a:rPr>
-              <a:t>Job 41514529 ran 46.3 ns but s(R) was confined to [7.77, 7.83] — no exploration</a:t>
-            </a:r>
-          </a:p>
-        </p:txBody>
-      </p:sp>
-      <p:sp>
-        <p:nvSpPr>
-          <p:cNvPr id="3" name="TextBox 2"/>
-          <p:cNvSpPr txBox="1"/>
-          <p:nvPr/>
-        </p:nvSpPr>
-        <p:spPr>
-          <a:xfrm>
-            <a:off x="457200" y="1143000"/>
-            <a:ext cx="11277295" cy="2194560"/>
-          </a:xfrm>
-          <a:prstGeom prst="rect">
-            <a:avLst/>
-          </a:prstGeom>
-          <a:noFill/>
-        </p:spPr>
-        <p:txBody>
-          <a:bodyPr wrap="square" lIns="0" tIns="0">
-            <a:spAutoFit/>
-          </a:bodyPr>
-          <a:lstStyle/>
-          <a:p>
-            <a:pPr>
-              <a:lnSpc>
-                <a:spcPct val="120000"/>
-              </a:lnSpc>
-              <a:spcAft>
-                <a:spcPts val="600"/>
-              </a:spcAft>
-            </a:pPr>
-            <a:r>
-              <a:rPr sz="1500" b="0" i="0">
-                <a:solidFill>
-                  <a:srgbClr val="000000"/>
-                </a:solidFill>
-                <a:latin typeface="Arial"/>
-              </a:rPr>
-              <a:t>•  Walltime kill at 72h, reached 46.3 of 50 ns</a:t>
-            </a:r>
-          </a:p>
-          <a:p>
-            <a:pPr>
-              <a:lnSpc>
-                <a:spcPct val="120000"/>
-              </a:lnSpc>
-              <a:spcAft>
-                <a:spcPts val="600"/>
-              </a:spcAft>
-            </a:pPr>
-            <a:r>
-              <a:rPr sz="1500" b="0" i="0">
-                <a:solidFill>
-                  <a:srgbClr val="000000"/>
-                </a:solidFill>
-                <a:latin typeface="Arial"/>
-              </a:rPr>
-              <a:t>•  COLVAR: 100% of frames in PC region (s=5–10), 0% in O or C</a:t>
-            </a:r>
-          </a:p>
-          <a:p>
-            <a:pPr>
-              <a:lnSpc>
-                <a:spcPct val="120000"/>
-              </a:lnSpc>
-              <a:spcAft>
-                <a:spcPts val="600"/>
-              </a:spcAft>
-            </a:pPr>
-            <a:r>
-              <a:rPr sz="1500" b="0" i="0">
-                <a:solidFill>
-                  <a:srgbClr val="000000"/>
-                </a:solidFill>
-                <a:latin typeface="Arial"/>
-              </a:rPr>
-              <a:t>•  Bias accumulated to 61.7 kJ/mol but system never moved</a:t>
-            </a:r>
-          </a:p>
-          <a:p>
-            <a:pPr>
-              <a:lnSpc>
-                <a:spcPct val="120000"/>
-              </a:lnSpc>
-              <a:spcAft>
-                <a:spcPts val="600"/>
-              </a:spcAft>
-            </a:pPr>
-            <a:r>
-              <a:rPr sz="1500" b="1" i="0">
-                <a:solidFill>
-                  <a:srgbClr val="DC2626"/>
-                </a:solidFill>
-                <a:latin typeface="Arial"/>
-              </a:rPr>
-              <a:t>•  Initial diagnosis: “system stuck in PC basin” — THIS WAS WRONG</a:t>
-            </a:r>
-          </a:p>
-        </p:txBody>
-      </p:sp>
-      <p:sp>
-        <p:nvSpPr>
-          <p:cNvPr id="4" name="Rectangle 3"/>
+          <p:cNvPr id="7" name="Rectangle 6"/>
           <p:cNvSpPr/>
           <p:nvPr/>
         </p:nvSpPr>
         <p:spPr>
           <a:xfrm>
-            <a:off x="457200" y="3886200"/>
-            <a:ext cx="11277295" cy="2514600"/>
+            <a:off x="109728" y="0"/>
+            <a:ext cx="12079224" cy="1005840"/>
           </a:xfrm>
           <a:prstGeom prst="rect">
             <a:avLst/>
           </a:prstGeom>
           <a:solidFill>
-            <a:srgbClr val="F0F0F0"/>
+            <a:srgbClr val="F4F6FB"/>
           </a:solidFill>
-          <a:ln w="6350">
-            <a:solidFill>
-              <a:srgbClr val="CCCCCC"/>
-            </a:solidFill>
+          <a:ln>
+            <a:noFill/>
           </a:ln>
         </p:spPr>
         <p:style>
@@ -4161,430 +3395,30 @@
         <p:txBody>
           <a:bodyPr rtlCol="0" anchor="ctr"/>
           <a:lstStyle/>
-          <a:p/>
-        </p:txBody>
-      </p:sp>
-      <p:sp>
-        <p:nvSpPr>
-          <p:cNvPr id="5" name="TextBox 4"/>
-          <p:cNvSpPr txBox="1"/>
-          <p:nvPr/>
-        </p:nvSpPr>
-        <p:spPr>
-          <a:xfrm>
-            <a:off x="566928" y="3995928"/>
-            <a:ext cx="11057839" cy="2295144"/>
-          </a:xfrm>
-          <a:prstGeom prst="rect">
-            <a:avLst/>
-          </a:prstGeom>
-          <a:noFill/>
-        </p:spPr>
-        <p:txBody>
-          <a:bodyPr wrap="square" lIns="0" rIns="0" tIns="0" bIns="0">
-            <a:spAutoFit/>
-          </a:bodyPr>
-          <a:lstStyle/>
-          <a:p>
-            <a:pPr algn="l">
-              <a:lnSpc>
-                <a:spcPct val="110000"/>
-              </a:lnSpc>
-              <a:spcAft>
-                <a:spcPts val="0"/>
-              </a:spcAft>
-            </a:pPr>
-            <a:r>
-              <a:rPr sz="900" b="0" i="0">
-                <a:solidFill>
-                  <a:srgbClr val="1F1F1F"/>
-                </a:solidFill>
-                <a:latin typeface="Courier New"/>
-              </a:rPr>
-              <a:t># COLVAR analysis</a:t>
-            </a:r>
-          </a:p>
-          <a:p>
-            <a:pPr algn="l">
-              <a:lnSpc>
-                <a:spcPct val="110000"/>
-              </a:lnSpc>
-              <a:spcAft>
-                <a:spcPts val="0"/>
-              </a:spcAft>
-            </a:pPr>
-            <a:r>
-              <a:rPr sz="900" b="0" i="0">
-                <a:solidFill>
-                  <a:srgbClr val="1F1F1F"/>
-                </a:solidFill>
-                <a:latin typeface="Courier New"/>
-              </a:rPr>
-              <a:t>python3 -c "</a:t>
-            </a:r>
-          </a:p>
-          <a:p>
-            <a:pPr algn="l">
-              <a:lnSpc>
-                <a:spcPct val="110000"/>
-              </a:lnSpc>
-              <a:spcAft>
-                <a:spcPts val="0"/>
-              </a:spcAft>
-            </a:pPr>
-            <a:r>
-              <a:rPr sz="900" b="0" i="0">
-                <a:solidFill>
-                  <a:srgbClr val="1F1F1F"/>
-                </a:solidFill>
-                <a:latin typeface="Courier New"/>
-              </a:rPr>
-              <a:t>import numpy as np</a:t>
-            </a:r>
-          </a:p>
-          <a:p>
-            <a:pPr algn="l">
-              <a:lnSpc>
-                <a:spcPct val="110000"/>
-              </a:lnSpc>
-              <a:spcAft>
-                <a:spcPts val="0"/>
-              </a:spcAft>
-            </a:pPr>
-            <a:r>
-              <a:rPr sz="900" b="0" i="0">
-                <a:solidFill>
-                  <a:srgbClr val="1F1F1F"/>
-                </a:solidFill>
-                <a:latin typeface="Courier New"/>
-              </a:rPr>
-              <a:t>d = np.loadtxt('COLVAR', comments='#')</a:t>
-            </a:r>
-          </a:p>
-          <a:p>
-            <a:pPr algn="l">
-              <a:lnSpc>
-                <a:spcPct val="110000"/>
-              </a:lnSpc>
-              <a:spcAft>
-                <a:spcPts val="0"/>
-              </a:spcAft>
-            </a:pPr>
-            <a:r>
-              <a:rPr sz="900" b="0" i="0">
-                <a:solidFill>
-                  <a:srgbClr val="1F1F1F"/>
-                </a:solidFill>
-                <a:latin typeface="Courier New"/>
-              </a:rPr>
-              <a:t>s = d[:,1]</a:t>
-            </a:r>
-          </a:p>
-          <a:p>
-            <a:pPr algn="l">
-              <a:lnSpc>
-                <a:spcPct val="110000"/>
-              </a:lnSpc>
-              <a:spcAft>
-                <a:spcPts val="0"/>
-              </a:spcAft>
-            </a:pPr>
-            <a:r>
-              <a:rPr sz="900" b="0" i="0">
-                <a:solidFill>
-                  <a:srgbClr val="1F1F1F"/>
-                </a:solidFill>
-                <a:latin typeface="Courier New"/>
-              </a:rPr>
-              <a:t>print(f'O(s&lt;5): {(s&lt;5).sum()}'</a:t>
-            </a:r>
-          </a:p>
-          <a:p>
-            <a:pPr algn="l">
-              <a:lnSpc>
-                <a:spcPct val="110000"/>
-              </a:lnSpc>
-              <a:spcAft>
-                <a:spcPts val="0"/>
-              </a:spcAft>
-            </a:pPr>
-            <a:r>
-              <a:rPr sz="900" b="0" i="0">
-                <a:solidFill>
-                  <a:srgbClr val="1F1F1F"/>
-                </a:solidFill>
-                <a:latin typeface="Courier New"/>
-              </a:rPr>
-              <a:t>      f' PC(5-10): {((s&gt;5)&amp;(s&lt;10)).sum()}'</a:t>
-            </a:r>
-          </a:p>
-          <a:p>
-            <a:pPr algn="l">
-              <a:lnSpc>
-                <a:spcPct val="110000"/>
-              </a:lnSpc>
-              <a:spcAft>
-                <a:spcPts val="0"/>
-              </a:spcAft>
-            </a:pPr>
-            <a:r>
-              <a:rPr sz="900" b="0" i="0">
-                <a:solidFill>
-                  <a:srgbClr val="1F1F1F"/>
-                </a:solidFill>
-                <a:latin typeface="Courier New"/>
-              </a:rPr>
-              <a:t>      f' C(s&gt;10): {(s&gt;10).sum()}')</a:t>
-            </a:r>
-          </a:p>
-          <a:p>
-            <a:pPr algn="l">
-              <a:lnSpc>
-                <a:spcPct val="110000"/>
-              </a:lnSpc>
-              <a:spcAft>
-                <a:spcPts val="0"/>
-              </a:spcAft>
-            </a:pPr>
-            <a:r>
-              <a:rPr sz="900" b="0" i="0">
-                <a:solidFill>
-                  <a:srgbClr val="1F1F1F"/>
-                </a:solidFill>
-                <a:latin typeface="Courier New"/>
-              </a:rPr>
-              <a:t>"</a:t>
-            </a:r>
-          </a:p>
-          <a:p>
-            <a:pPr algn="l">
-              <a:lnSpc>
-                <a:spcPct val="110000"/>
-              </a:lnSpc>
-              <a:spcAft>
-                <a:spcPts val="0"/>
-              </a:spcAft>
-            </a:pPr>
-            <a:r>
-              <a:rPr sz="900" b="0" i="0">
-                <a:solidFill>
-                  <a:srgbClr val="1F1F1F"/>
-                </a:solidFill>
-                <a:latin typeface="Courier New"/>
-              </a:rPr>
-              <a:t># Output: O: 0  PC: 46304  C: 0</a:t>
-            </a:r>
-          </a:p>
-        </p:txBody>
-      </p:sp>
-      <p:sp>
-        <p:nvSpPr>
-          <p:cNvPr id="6" name="TextBox 5"/>
-          <p:cNvSpPr txBox="1"/>
-          <p:nvPr/>
-        </p:nvSpPr>
-        <p:spPr>
-          <a:xfrm>
-            <a:off x="457200" y="6446520"/>
-            <a:ext cx="11277295" cy="320040"/>
-          </a:xfrm>
-          <a:prstGeom prst="rect">
-            <a:avLst/>
-          </a:prstGeom>
-          <a:noFill/>
-        </p:spPr>
-        <p:txBody>
-          <a:bodyPr wrap="square" lIns="0" rIns="0" tIns="0" bIns="0">
-            <a:spAutoFit/>
-          </a:bodyPr>
-          <a:lstStyle/>
-          <a:p>
-            <a:pPr algn="l"/>
-            <a:r>
-              <a:rPr sz="800" b="0" i="1">
-                <a:solidFill>
-                  <a:srgbClr val="666666"/>
-                </a:solidFill>
-                <a:latin typeface="Arial"/>
-              </a:rPr>
-              <a:t>Job 41514529 on Longleaf c130604  |  single_walker/COLVAR</a:t>
-            </a:r>
-          </a:p>
-        </p:txBody>
-      </p:sp>
-    </p:spTree>
-  </p:cSld>
-  <p:clrMapOvr>
-    <a:masterClrMapping/>
-  </p:clrMapOvr>
-</p:sld>
-</file>
-
-<file path=ppt/slides/slide5.xml><?xml version="1.0" encoding="utf-8"?>
-<p:sld xmlns:a="http://schemas.openxmlformats.org/drawingml/2006/main" xmlns:p="http://schemas.openxmlformats.org/presentationml/2006/main" xmlns:r="http://schemas.openxmlformats.org/officeDocument/2006/relationships">
-  <p:cSld>
-    <p:spTree>
-      <p:nvGrpSpPr>
-        <p:cNvPr id="1" name=""/>
-        <p:cNvGrpSpPr/>
-        <p:nvPr/>
-      </p:nvGrpSpPr>
-      <p:grpSpPr/>
-      <p:sp>
-        <p:nvSpPr>
-          <p:cNvPr id="2" name="TextBox 1"/>
-          <p:cNvSpPr txBox="1"/>
-          <p:nvPr/>
-        </p:nvSpPr>
-        <p:spPr>
-          <a:xfrm>
-            <a:off x="457200" y="320040"/>
-            <a:ext cx="11277295" cy="777240"/>
-          </a:xfrm>
-          <a:prstGeom prst="rect">
-            <a:avLst/>
-          </a:prstGeom>
-          <a:noFill/>
-        </p:spPr>
-        <p:txBody>
-          <a:bodyPr wrap="square" lIns="0" rIns="0" tIns="0" bIns="0">
-            <a:spAutoFit/>
-          </a:bodyPr>
-          <a:lstStyle/>
-          <a:p>
-            <a:pPr algn="l"/>
-            <a:r>
-              <a:rPr sz="2400" b="1" i="0">
-                <a:solidFill>
-                  <a:srgbClr val="1A2744"/>
-                </a:solidFill>
-                <a:latin typeface="Arial"/>
-              </a:rPr>
-              <a:t>We switched from PATHMSD to FUNCPATHMSD due to an atom serial issue — but kept the old LAMBDA</a:t>
-            </a:r>
-          </a:p>
-        </p:txBody>
-      </p:sp>
-      <p:sp>
-        <p:nvSpPr>
-          <p:cNvPr id="3" name="TextBox 2"/>
-          <p:cNvSpPr txBox="1"/>
-          <p:nvPr/>
-        </p:nvSpPr>
-        <p:spPr>
-          <a:xfrm>
-            <a:off x="457200" y="1143000"/>
-            <a:ext cx="11277295" cy="2286000"/>
-          </a:xfrm>
-          <a:prstGeom prst="rect">
-            <a:avLst/>
-          </a:prstGeom>
-          <a:noFill/>
-        </p:spPr>
-        <p:txBody>
-          <a:bodyPr wrap="square" lIns="0" rIns="0" tIns="0" bIns="0">
-            <a:spAutoFit/>
-          </a:bodyPr>
-          <a:lstStyle/>
-          <a:p>
-            <a:pPr algn="l">
-              <a:lnSpc>
-                <a:spcPct val="120000"/>
-              </a:lnSpc>
-              <a:spcAft>
-                <a:spcPts val="600"/>
-              </a:spcAft>
-            </a:pPr>
-            <a:r>
-              <a:rPr sz="1400" b="0" i="0">
-                <a:solidFill>
-                  <a:srgbClr val="000000"/>
-                </a:solidFill>
-                <a:latin typeface="Arial"/>
-              </a:rPr>
-              <a:t>•  SI used “path collective variables” + GROMACS 5.1.2 + PLUMED2 (no input file provided)</a:t>
-            </a:r>
-          </a:p>
-          <a:p>
-            <a:pPr algn="l">
-              <a:lnSpc>
-                <a:spcPct val="120000"/>
-              </a:lnSpc>
-              <a:spcAft>
-                <a:spcPts val="600"/>
-              </a:spcAft>
-            </a:pPr>
-            <a:r>
-              <a:rPr sz="1400" b="0" i="0">
-                <a:solidFill>
-                  <a:srgbClr val="000000"/>
-                </a:solidFill>
-                <a:latin typeface="Arial"/>
-              </a:rPr>
-              <a:t>•  We first tried PATHMSD, but conda PLUMED had missing modules + atom serial errors</a:t>
-            </a:r>
-          </a:p>
-          <a:p>
-            <a:pPr algn="l">
-              <a:lnSpc>
-                <a:spcPct val="120000"/>
-              </a:lnSpc>
-              <a:spcAft>
-                <a:spcPts val="600"/>
-              </a:spcAft>
-            </a:pPr>
-            <a:r>
-              <a:rPr sz="1400" b="0" i="0">
-                <a:solidFill>
-                  <a:srgbClr val="000000"/>
-                </a:solidFill>
-                <a:latin typeface="Arial"/>
-              </a:rPr>
-              <a:t>•  Switched to FUNCPATHMSD (equivalent math, but takes explicit RMSD inputs)</a:t>
-            </a:r>
-          </a:p>
-          <a:p>
-            <a:pPr algn="l">
-              <a:lnSpc>
-                <a:spcPct val="120000"/>
-              </a:lnSpc>
-              <a:spcAft>
-                <a:spcPts val="600"/>
-              </a:spcAft>
-            </a:pPr>
-            <a:r>
-              <a:rPr sz="1400" b="0" i="0">
-                <a:solidFill>
-                  <a:srgbClr val="000000"/>
-                </a:solidFill>
-                <a:latin typeface="Arial"/>
-              </a:rPr>
-              <a:t>•  KEPT the same LAMBDA=3.391 nm⁻² — did not realize the convention differs</a:t>
-            </a:r>
-          </a:p>
-        </p:txBody>
-      </p:sp>
-      <p:sp>
-        <p:nvSpPr>
-          <p:cNvPr id="4" name="Rectangle 3"/>
+          <a:p>
+            <a:pPr algn="ctr"/>
+          </a:p>
+        </p:txBody>
+      </p:sp>
+      <p:sp>
+        <p:nvSpPr>
+          <p:cNvPr id="6" name="Rectangle 5"/>
           <p:cNvSpPr/>
           <p:nvPr/>
         </p:nvSpPr>
         <p:spPr>
           <a:xfrm>
-            <a:off x="457200" y="3931920"/>
-            <a:ext cx="11277295" cy="1737360"/>
+            <a:off x="0" y="0"/>
+            <a:ext cx="109728" cy="6858000"/>
           </a:xfrm>
           <a:prstGeom prst="rect">
             <a:avLst/>
           </a:prstGeom>
           <a:solidFill>
-            <a:srgbClr val="F0F0F0"/>
+            <a:srgbClr val="2E5CA7"/>
           </a:solidFill>
-          <a:ln w="6350">
-            <a:solidFill>
-              <a:srgbClr val="CCCCCC"/>
-            </a:solidFill>
+          <a:ln>
+            <a:noFill/>
           </a:ln>
         </p:spPr>
         <p:style>
@@ -4604,7 +3438,284 @@
         <p:txBody>
           <a:bodyPr rtlCol="0" anchor="ctr"/>
           <a:lstStyle/>
-          <a:p/>
+          <a:p>
+            <a:pPr algn="ctr"/>
+          </a:p>
+        </p:txBody>
+      </p:sp>
+      <p:sp>
+        <p:nvSpPr>
+          <p:cNvPr id="2" name="TextBox 1"/>
+          <p:cNvSpPr txBox="1"/>
+          <p:nvPr/>
+        </p:nvSpPr>
+        <p:spPr>
+          <a:xfrm>
+            <a:off x="457200" y="320040"/>
+            <a:ext cx="11274552" cy="822960"/>
+          </a:xfrm>
+          <a:prstGeom prst="rect">
+            <a:avLst/>
+          </a:prstGeom>
+          <a:noFill/>
+        </p:spPr>
+        <p:txBody>
+          <a:bodyPr wrap="square">
+            <a:spAutoFit/>
+          </a:bodyPr>
+          <a:lstStyle/>
+          <a:p>
+            <a:r>
+              <a:rPr sz="2200" b="1">
+                <a:solidFill>
+                  <a:srgbClr val="1A2744"/>
+                </a:solidFill>
+                <a:latin typeface="Arial"/>
+              </a:rPr>
+              <a:t>Plan: replace plumed.dat with PATHMSD, resubmit initial run, extract 10 snapshots</a:t>
+            </a:r>
+          </a:p>
+        </p:txBody>
+      </p:sp>
+      <p:sp>
+        <p:nvSpPr>
+          <p:cNvPr id="3" name="TextBox 2"/>
+          <p:cNvSpPr txBox="1"/>
+          <p:nvPr/>
+        </p:nvSpPr>
+        <p:spPr>
+          <a:xfrm>
+            <a:off x="457200" y="1280160"/>
+            <a:ext cx="11274552" cy="3200400"/>
+          </a:xfrm>
+          <a:prstGeom prst="rect">
+            <a:avLst/>
+          </a:prstGeom>
+          <a:noFill/>
+        </p:spPr>
+        <p:txBody>
+          <a:bodyPr wrap="square">
+            <a:spAutoFit/>
+          </a:bodyPr>
+          <a:lstStyle/>
+          <a:p>
+            <a:pPr>
+              <a:spcAft>
+                <a:spcPts val="600"/>
+              </a:spcAft>
+            </a:pPr>
+            <a:r>
+              <a:rPr sz="1300" b="1">
+                <a:solidFill>
+                  <a:srgbClr val="16A34A"/>
+                </a:solidFill>
+                <a:latin typeface="Arial"/>
+              </a:rPr>
+              <a:t>•  Today: PATHMSD verified on existing 46 ns trajectory with plumed driver (offline, 1.3 s) ✓</a:t>
+            </a:r>
+          </a:p>
+          <a:p>
+            <a:pPr>
+              <a:spcAft>
+                <a:spcPts val="600"/>
+              </a:spcAft>
+            </a:pPr>
+            <a:r>
+              <a:rPr sz="1300" b="0">
+                <a:solidFill>
+                  <a:srgbClr val="000000"/>
+                </a:solidFill>
+                <a:latin typeface="Arial"/>
+              </a:rPr>
+              <a:t>•  Today: update 6-stage pipeline state to reflect re-diagnosis of FP-020 + new plumed.dat</a:t>
+            </a:r>
+          </a:p>
+          <a:p>
+            <a:pPr>
+              <a:spcAft>
+                <a:spcPts val="600"/>
+              </a:spcAft>
+            </a:pPr>
+            <a:r>
+              <a:rPr sz="1300" b="0">
+                <a:solidFill>
+                  <a:srgbClr val="000000"/>
+                </a:solidFill>
+                <a:latin typeface="Arial"/>
+              </a:rPr>
+              <a:t>•  This week: backup broken Job 41514529 data and resubmit 50 ns initial run with PATHMSD version</a:t>
+            </a:r>
+          </a:p>
+          <a:p>
+            <a:pPr>
+              <a:spcAft>
+                <a:spcPts val="600"/>
+              </a:spcAft>
+            </a:pPr>
+            <a:r>
+              <a:rPr sz="1300" b="0">
+                <a:solidFill>
+                  <a:srgbClr val="000000"/>
+                </a:solidFill>
+                <a:latin typeface="Arial"/>
+              </a:rPr>
+              <a:t>•  Next week: extract 10 snapshots covering O / PC / C regions from initial run trajectory</a:t>
+            </a:r>
+          </a:p>
+          <a:p>
+            <a:pPr>
+              <a:spcAft>
+                <a:spcPts val="600"/>
+              </a:spcAft>
+            </a:pPr>
+            <a:r>
+              <a:rPr sz="1300" b="0">
+                <a:solidFill>
+                  <a:srgbClr val="000000"/>
+                </a:solidFill>
+                <a:latin typeface="Arial"/>
+              </a:rPr>
+              <a:t>•  Week after: launch 10-walker WT-MetaD production (SI protocol: 50–100 ns each, ~500 ns total)</a:t>
+            </a:r>
+          </a:p>
+          <a:p>
+            <a:pPr>
+              <a:spcAft>
+                <a:spcPts val="600"/>
+              </a:spcAft>
+            </a:pPr>
+            <a:r>
+              <a:rPr sz="1300" b="0">
+                <a:solidFill>
+                  <a:srgbClr val="000000"/>
+                </a:solidFill>
+                <a:latin typeface="Arial"/>
+              </a:rPr>
+              <a:t>•  Target: FES comparison with JACS 2019 Figure 2a within 2 weeks</a:t>
+            </a:r>
+          </a:p>
+        </p:txBody>
+      </p:sp>
+      <p:sp>
+        <p:nvSpPr>
+          <p:cNvPr id="4" name="Rectangle 3"/>
+          <p:cNvSpPr/>
+          <p:nvPr/>
+        </p:nvSpPr>
+        <p:spPr>
+          <a:xfrm>
+            <a:off x="457200" y="4663440"/>
+            <a:ext cx="11274552" cy="1554480"/>
+          </a:xfrm>
+          <a:prstGeom prst="rect">
+            <a:avLst/>
+          </a:prstGeom>
+          <a:solidFill>
+            <a:srgbClr val="F0F0F0"/>
+          </a:solidFill>
+          <a:ln w="6350">
+            <a:solidFill>
+              <a:srgbClr val="CCCCCC"/>
+            </a:solidFill>
+          </a:ln>
+        </p:spPr>
+        <p:style>
+          <a:lnRef idx="1">
+            <a:schemeClr val="accent1"/>
+          </a:lnRef>
+          <a:fillRef idx="3">
+            <a:schemeClr val="accent1"/>
+          </a:fillRef>
+          <a:effectRef idx="2">
+            <a:schemeClr val="accent1"/>
+          </a:effectRef>
+          <a:fontRef idx="minor">
+            <a:schemeClr val="lt1"/>
+          </a:fontRef>
+        </p:style>
+        <p:txBody>
+          <a:bodyPr rtlCol="0" anchor="ctr" wrap="none" tIns="73152" bIns="73152"/>
+          <a:lstStyle/>
+          <a:p>
+            <a:pPr algn="ctr">
+              <a:spcAft>
+                <a:spcPts val="0"/>
+              </a:spcAft>
+            </a:pPr>
+            <a:r>
+              <a:rPr sz="1100">
+                <a:solidFill>
+                  <a:srgbClr val="000000"/>
+                </a:solidFill>
+                <a:latin typeface="Courier New"/>
+              </a:rPr>
+              <a:t># Final plumed.dat (matches SI protocol, 2 lines for the path CV):</a:t>
+            </a:r>
+          </a:p>
+          <a:p>
+            <a:pPr>
+              <a:spcAft>
+                <a:spcPts val="0"/>
+              </a:spcAft>
+            </a:pPr>
+            <a:r>
+              <a:rPr sz="1100">
+                <a:solidFill>
+                  <a:srgbClr val="000000"/>
+                </a:solidFill>
+                <a:latin typeface="Courier New"/>
+              </a:rPr>
+              <a:t>path: PATHMSD REFERENCE=path_gromacs.pdb LAMBDA=379.77</a:t>
+            </a:r>
+          </a:p>
+          <a:p>
+            <a:pPr>
+              <a:spcAft>
+                <a:spcPts val="0"/>
+              </a:spcAft>
+            </a:pPr>
+            <a:r>
+              <a:rPr sz="1100">
+                <a:solidFill>
+                  <a:srgbClr val="000000"/>
+                </a:solidFill>
+                <a:latin typeface="Courier New"/>
+              </a:rPr>
+              <a:t>metad: METAD ARG=path.sss,path.zzz SIGMA=0.05 ADAPTIVE=GEOM HEIGHT=0.628 \</a:t>
+            </a:r>
+          </a:p>
+          <a:p>
+            <a:pPr>
+              <a:spcAft>
+                <a:spcPts val="0"/>
+              </a:spcAft>
+            </a:pPr>
+            <a:r>
+              <a:rPr sz="1100">
+                <a:solidFill>
+                  <a:srgbClr val="000000"/>
+                </a:solidFill>
+                <a:latin typeface="Courier New"/>
+              </a:rPr>
+              <a:t>       PACE=1000 BIASFACTOR=10 TEMP=350 FILE=HILLS</a:t>
+            </a:r>
+          </a:p>
+          <a:p>
+            <a:pPr>
+              <a:spcAft>
+                <a:spcPts val="0"/>
+              </a:spcAft>
+            </a:pPr>
+            <a:r>
+              <a:rPr sz="1100">
+                <a:solidFill>
+                  <a:srgbClr val="000000"/>
+                </a:solidFill>
+                <a:latin typeface="Courier New"/>
+              </a:rPr>
+              <a:t>PRINT ARG=path.sss,path.zzz,metad.bias FILE=COLVAR STRIDE=500</a:t>
+            </a:r>
+          </a:p>
         </p:txBody>
       </p:sp>
       <p:sp>
@@ -4615,8 +3726,663 @@
         </p:nvSpPr>
         <p:spPr>
           <a:xfrm>
-            <a:off x="566928" y="4041648"/>
-            <a:ext cx="11057839" cy="1517904"/>
+            <a:off x="457200" y="6400800"/>
+            <a:ext cx="11274552" cy="365760"/>
+          </a:xfrm>
+          <a:prstGeom prst="rect">
+            <a:avLst/>
+          </a:prstGeom>
+          <a:noFill/>
+        </p:spPr>
+        <p:txBody>
+          <a:bodyPr wrap="square">
+            <a:spAutoFit/>
+          </a:bodyPr>
+          <a:lstStyle/>
+          <a:p>
+            <a:r>
+              <a:rPr sz="800" i="1">
+                <a:solidFill>
+                  <a:srgbClr val="666666"/>
+                </a:solidFill>
+                <a:latin typeface="Arial"/>
+              </a:rPr>
+              <a:t>Target: replication/metadynamics/single_walker/plumed.dat (master branch)  |  SI S4: 'After an initial metadynamics run, we extracted ten snapshots... multiple-walkers with 10 replicas, 50–100 ns each'  |  LAMBDA source: 2.3/&lt;rmsd&gt;² × 100 (GROMACS nm), Google Groups plumed-users</a:t>
+            </a:r>
+          </a:p>
+        </p:txBody>
+      </p:sp>
+      <p:sp>
+        <p:nvSpPr>
+          <p:cNvPr id="8" name="TextBox 7"/>
+          <p:cNvSpPr txBox="1"/>
+          <p:nvPr/>
+        </p:nvSpPr>
+        <p:spPr>
+          <a:xfrm>
+            <a:off x="10058400" y="6400800"/>
+            <a:ext cx="2011680" cy="365760"/>
+          </a:xfrm>
+          <a:prstGeom prst="rect">
+            <a:avLst/>
+          </a:prstGeom>
+          <a:noFill/>
+        </p:spPr>
+        <p:txBody>
+          <a:bodyPr wrap="none" lIns="0" rIns="0">
+            <a:spAutoFit/>
+          </a:bodyPr>
+          <a:lstStyle/>
+          <a:p>
+            <a:pPr algn="r"/>
+            <a:r>
+              <a:rPr sz="800" b="0" i="0">
+                <a:solidFill>
+                  <a:srgbClr val="6B7280"/>
+                </a:solidFill>
+                <a:latin typeface="Arial"/>
+              </a:rPr>
+              <a:t>TrpB MetaD Benchmark  ·  10 / 10</a:t>
+            </a:r>
+          </a:p>
+        </p:txBody>
+      </p:sp>
+    </p:spTree>
+  </p:cSld>
+  <p:clrMapOvr>
+    <a:masterClrMapping/>
+  </p:clrMapOvr>
+</p:sld>
+</file>
+
+<file path=ppt/slides/slide2.xml><?xml version="1.0" encoding="utf-8"?>
+<p:sld xmlns:a="http://schemas.openxmlformats.org/drawingml/2006/main" xmlns:p="http://schemas.openxmlformats.org/presentationml/2006/main" xmlns:r="http://schemas.openxmlformats.org/officeDocument/2006/relationships">
+  <p:cSld>
+    <p:bg>
+      <p:bgPr>
+        <a:solidFill>
+          <a:srgbClr val="FDFDFD"/>
+        </a:solidFill>
+        <a:effectLst/>
+      </p:bgPr>
+    </p:bg>
+    <p:spTree>
+      <p:nvGrpSpPr>
+        <p:cNvPr id="1" name=""/>
+        <p:cNvGrpSpPr/>
+        <p:nvPr/>
+      </p:nvGrpSpPr>
+      <p:grpSpPr/>
+      <p:sp>
+        <p:nvSpPr>
+          <p:cNvPr id="6" name="Rectangle 5"/>
+          <p:cNvSpPr/>
+          <p:nvPr/>
+        </p:nvSpPr>
+        <p:spPr>
+          <a:xfrm>
+            <a:off x="109728" y="0"/>
+            <a:ext cx="12079224" cy="1005840"/>
+          </a:xfrm>
+          <a:prstGeom prst="rect">
+            <a:avLst/>
+          </a:prstGeom>
+          <a:solidFill>
+            <a:srgbClr val="F4F6FB"/>
+          </a:solidFill>
+          <a:ln>
+            <a:noFill/>
+          </a:ln>
+        </p:spPr>
+        <p:style>
+          <a:lnRef idx="1">
+            <a:schemeClr val="accent1"/>
+          </a:lnRef>
+          <a:fillRef idx="3">
+            <a:schemeClr val="accent1"/>
+          </a:fillRef>
+          <a:effectRef idx="2">
+            <a:schemeClr val="accent1"/>
+          </a:effectRef>
+          <a:fontRef idx="minor">
+            <a:schemeClr val="lt1"/>
+          </a:fontRef>
+        </p:style>
+        <p:txBody>
+          <a:bodyPr rtlCol="0" anchor="ctr"/>
+          <a:lstStyle/>
+          <a:p>
+            <a:pPr algn="ctr"/>
+          </a:p>
+        </p:txBody>
+      </p:sp>
+      <p:sp>
+        <p:nvSpPr>
+          <p:cNvPr id="5" name="Rectangle 4"/>
+          <p:cNvSpPr/>
+          <p:nvPr/>
+        </p:nvSpPr>
+        <p:spPr>
+          <a:xfrm>
+            <a:off x="0" y="0"/>
+            <a:ext cx="109728" cy="6858000"/>
+          </a:xfrm>
+          <a:prstGeom prst="rect">
+            <a:avLst/>
+          </a:prstGeom>
+          <a:solidFill>
+            <a:srgbClr val="2E5CA7"/>
+          </a:solidFill>
+          <a:ln>
+            <a:noFill/>
+          </a:ln>
+        </p:spPr>
+        <p:style>
+          <a:lnRef idx="1">
+            <a:schemeClr val="accent1"/>
+          </a:lnRef>
+          <a:fillRef idx="3">
+            <a:schemeClr val="accent1"/>
+          </a:fillRef>
+          <a:effectRef idx="2">
+            <a:schemeClr val="accent1"/>
+          </a:effectRef>
+          <a:fontRef idx="minor">
+            <a:schemeClr val="lt1"/>
+          </a:fontRef>
+        </p:style>
+        <p:txBody>
+          <a:bodyPr rtlCol="0" anchor="ctr"/>
+          <a:lstStyle/>
+          <a:p>
+            <a:pPr algn="ctr"/>
+          </a:p>
+        </p:txBody>
+      </p:sp>
+      <p:sp>
+        <p:nvSpPr>
+          <p:cNvPr id="2" name="TextBox 1"/>
+          <p:cNvSpPr txBox="1"/>
+          <p:nvPr/>
+        </p:nvSpPr>
+        <p:spPr>
+          <a:xfrm>
+            <a:off x="457200" y="320040"/>
+            <a:ext cx="11277295" cy="777240"/>
+          </a:xfrm>
+          <a:prstGeom prst="rect">
+            <a:avLst/>
+          </a:prstGeom>
+          <a:noFill/>
+        </p:spPr>
+        <p:txBody>
+          <a:bodyPr wrap="square" lIns="0" rIns="0" tIns="0" bIns="0">
+            <a:spAutoFit/>
+          </a:bodyPr>
+          <a:lstStyle/>
+          <a:p>
+            <a:pPr algn="l"/>
+            <a:r>
+              <a:rPr sz="2400" b="1" i="0">
+                <a:solidFill>
+                  <a:srgbClr val="1A2744"/>
+                </a:solidFill>
+                <a:latin typeface="Arial"/>
+              </a:rPr>
+              <a:t>Replicating JACS 2019 MetaDynamics on TrpB COMM domain as F1 conformational baseline</a:t>
+            </a:r>
+          </a:p>
+        </p:txBody>
+      </p:sp>
+      <p:sp>
+        <p:nvSpPr>
+          <p:cNvPr id="3" name="TextBox 2"/>
+          <p:cNvSpPr txBox="1"/>
+          <p:nvPr/>
+        </p:nvSpPr>
+        <p:spPr>
+          <a:xfrm>
+            <a:off x="457200" y="1143000"/>
+            <a:ext cx="11277295" cy="5257800"/>
+          </a:xfrm>
+          <a:prstGeom prst="rect">
+            <a:avLst/>
+          </a:prstGeom>
+          <a:noFill/>
+        </p:spPr>
+        <p:txBody>
+          <a:bodyPr wrap="square" lIns="0" rIns="0" tIns="0" bIns="0">
+            <a:spAutoFit/>
+          </a:bodyPr>
+          <a:lstStyle/>
+          <a:p>
+            <a:pPr algn="l">
+              <a:lnSpc>
+                <a:spcPct val="130000"/>
+              </a:lnSpc>
+              <a:spcAft>
+                <a:spcPts val="600"/>
+              </a:spcAft>
+            </a:pPr>
+            <a:r>
+              <a:rPr sz="1800" b="0" i="0">
+                <a:solidFill>
+                  <a:srgbClr val="000000"/>
+                </a:solidFill>
+                <a:latin typeface="Arial"/>
+              </a:rPr>
+              <a:t>•  Goal: benchmark FES for PfTrpS(Ain) O→PC→C transition</a:t>
+            </a:r>
+          </a:p>
+          <a:p>
+            <a:pPr algn="l">
+              <a:lnSpc>
+                <a:spcPct val="130000"/>
+              </a:lnSpc>
+              <a:spcAft>
+                <a:spcPts val="600"/>
+              </a:spcAft>
+            </a:pPr>
+            <a:r>
+              <a:rPr sz="1800" b="0" i="0">
+                <a:solidFill>
+                  <a:srgbClr val="000000"/>
+                </a:solidFill>
+                <a:latin typeface="Arial"/>
+              </a:rPr>
+              <a:t>•  Downstream: conformational reward for GenSLM + GRPO, ground truth for STAR-MD benchmark</a:t>
+            </a:r>
+          </a:p>
+          <a:p>
+            <a:pPr algn="l">
+              <a:lnSpc>
+                <a:spcPct val="130000"/>
+              </a:lnSpc>
+              <a:spcAft>
+                <a:spcPts val="600"/>
+              </a:spcAft>
+            </a:pPr>
+            <a:r>
+              <a:rPr sz="1800" b="0" i="0">
+                <a:solidFill>
+                  <a:srgbClr val="000000"/>
+                </a:solidFill>
+                <a:latin typeface="Arial"/>
+              </a:rPr>
+              <a:t>•  Stage: initial single-walker MetaD run</a:t>
+            </a:r>
+          </a:p>
+        </p:txBody>
+      </p:sp>
+      <p:sp>
+        <p:nvSpPr>
+          <p:cNvPr id="4" name="TextBox 3"/>
+          <p:cNvSpPr txBox="1"/>
+          <p:nvPr/>
+        </p:nvSpPr>
+        <p:spPr>
+          <a:xfrm>
+            <a:off x="457200" y="6446520"/>
+            <a:ext cx="11277295" cy="320040"/>
+          </a:xfrm>
+          <a:prstGeom prst="rect">
+            <a:avLst/>
+          </a:prstGeom>
+          <a:noFill/>
+        </p:spPr>
+        <p:txBody>
+          <a:bodyPr wrap="square" lIns="0" rIns="0" tIns="0" bIns="0">
+            <a:spAutoFit/>
+          </a:bodyPr>
+          <a:lstStyle/>
+          <a:p>
+            <a:pPr algn="l"/>
+            <a:r>
+              <a:rPr sz="800" b="0" i="1">
+                <a:solidFill>
+                  <a:srgbClr val="666666"/>
+                </a:solidFill>
+                <a:latin typeface="Arial"/>
+              </a:rPr>
+              <a:t>Maria-Solano et al., JACS 2019  |  SI protocol: 10 walkers × 50–100 ns after initial run</a:t>
+            </a:r>
+          </a:p>
+        </p:txBody>
+      </p:sp>
+      <p:sp>
+        <p:nvSpPr>
+          <p:cNvPr id="7" name="TextBox 6"/>
+          <p:cNvSpPr txBox="1"/>
+          <p:nvPr/>
+        </p:nvSpPr>
+        <p:spPr>
+          <a:xfrm>
+            <a:off x="10058400" y="6400800"/>
+            <a:ext cx="2011680" cy="365760"/>
+          </a:xfrm>
+          <a:prstGeom prst="rect">
+            <a:avLst/>
+          </a:prstGeom>
+          <a:noFill/>
+        </p:spPr>
+        <p:txBody>
+          <a:bodyPr wrap="none" lIns="0" rIns="0">
+            <a:spAutoFit/>
+          </a:bodyPr>
+          <a:lstStyle/>
+          <a:p>
+            <a:pPr algn="r"/>
+            <a:r>
+              <a:rPr sz="800" b="0" i="0">
+                <a:solidFill>
+                  <a:srgbClr val="6B7280"/>
+                </a:solidFill>
+                <a:latin typeface="Arial"/>
+              </a:rPr>
+              <a:t>TrpB MetaD Benchmark  ·  2 / 10</a:t>
+            </a:r>
+          </a:p>
+        </p:txBody>
+      </p:sp>
+    </p:spTree>
+  </p:cSld>
+  <p:clrMapOvr>
+    <a:masterClrMapping/>
+  </p:clrMapOvr>
+</p:sld>
+</file>
+
+<file path=ppt/slides/slide3.xml><?xml version="1.0" encoding="utf-8"?>
+<p:sld xmlns:a="http://schemas.openxmlformats.org/drawingml/2006/main" xmlns:p="http://schemas.openxmlformats.org/presentationml/2006/main" xmlns:r="http://schemas.openxmlformats.org/officeDocument/2006/relationships">
+  <p:cSld>
+    <p:bg>
+      <p:bgPr>
+        <a:solidFill>
+          <a:srgbClr val="FDFDFD"/>
+        </a:solidFill>
+        <a:effectLst/>
+      </p:bgPr>
+    </p:bg>
+    <p:spTree>
+      <p:nvGrpSpPr>
+        <p:cNvPr id="1" name=""/>
+        <p:cNvGrpSpPr/>
+        <p:nvPr/>
+      </p:nvGrpSpPr>
+      <p:grpSpPr/>
+      <p:sp>
+        <p:nvSpPr>
+          <p:cNvPr id="8" name="Rectangle 7"/>
+          <p:cNvSpPr/>
+          <p:nvPr/>
+        </p:nvSpPr>
+        <p:spPr>
+          <a:xfrm>
+            <a:off x="109728" y="0"/>
+            <a:ext cx="12079224" cy="1005840"/>
+          </a:xfrm>
+          <a:prstGeom prst="rect">
+            <a:avLst/>
+          </a:prstGeom>
+          <a:solidFill>
+            <a:srgbClr val="F4F6FB"/>
+          </a:solidFill>
+          <a:ln>
+            <a:noFill/>
+          </a:ln>
+        </p:spPr>
+        <p:style>
+          <a:lnRef idx="1">
+            <a:schemeClr val="accent1"/>
+          </a:lnRef>
+          <a:fillRef idx="3">
+            <a:schemeClr val="accent1"/>
+          </a:fillRef>
+          <a:effectRef idx="2">
+            <a:schemeClr val="accent1"/>
+          </a:effectRef>
+          <a:fontRef idx="minor">
+            <a:schemeClr val="lt1"/>
+          </a:fontRef>
+        </p:style>
+        <p:txBody>
+          <a:bodyPr rtlCol="0" anchor="ctr"/>
+          <a:lstStyle/>
+          <a:p>
+            <a:pPr algn="ctr"/>
+          </a:p>
+        </p:txBody>
+      </p:sp>
+      <p:sp>
+        <p:nvSpPr>
+          <p:cNvPr id="7" name="Rectangle 6"/>
+          <p:cNvSpPr/>
+          <p:nvPr/>
+        </p:nvSpPr>
+        <p:spPr>
+          <a:xfrm>
+            <a:off x="0" y="0"/>
+            <a:ext cx="109728" cy="6858000"/>
+          </a:xfrm>
+          <a:prstGeom prst="rect">
+            <a:avLst/>
+          </a:prstGeom>
+          <a:solidFill>
+            <a:srgbClr val="2E5CA7"/>
+          </a:solidFill>
+          <a:ln>
+            <a:noFill/>
+          </a:ln>
+        </p:spPr>
+        <p:style>
+          <a:lnRef idx="1">
+            <a:schemeClr val="accent1"/>
+          </a:lnRef>
+          <a:fillRef idx="3">
+            <a:schemeClr val="accent1"/>
+          </a:fillRef>
+          <a:effectRef idx="2">
+            <a:schemeClr val="accent1"/>
+          </a:effectRef>
+          <a:fontRef idx="minor">
+            <a:schemeClr val="lt1"/>
+          </a:fontRef>
+        </p:style>
+        <p:txBody>
+          <a:bodyPr rtlCol="0" anchor="ctr"/>
+          <a:lstStyle/>
+          <a:p>
+            <a:pPr algn="ctr"/>
+          </a:p>
+        </p:txBody>
+      </p:sp>
+      <p:sp>
+        <p:nvSpPr>
+          <p:cNvPr id="2" name="TextBox 1"/>
+          <p:cNvSpPr txBox="1"/>
+          <p:nvPr/>
+        </p:nvSpPr>
+        <p:spPr>
+          <a:xfrm>
+            <a:off x="457200" y="320040"/>
+            <a:ext cx="11277295" cy="777240"/>
+          </a:xfrm>
+          <a:prstGeom prst="rect">
+            <a:avLst/>
+          </a:prstGeom>
+          <a:noFill/>
+        </p:spPr>
+        <p:txBody>
+          <a:bodyPr wrap="square" lIns="0" rIns="0" tIns="0" bIns="0">
+            <a:spAutoFit/>
+          </a:bodyPr>
+          <a:lstStyle/>
+          <a:p>
+            <a:pPr algn="l"/>
+            <a:r>
+              <a:rPr sz="2400" b="1" i="0">
+                <a:solidFill>
+                  <a:srgbClr val="1A2744"/>
+                </a:solidFill>
+                <a:latin typeface="Arial"/>
+              </a:rPr>
+              <a:t>Last week: system preparation and MetaDynamics submission completed</a:t>
+            </a:r>
+          </a:p>
+        </p:txBody>
+      </p:sp>
+      <p:sp>
+        <p:nvSpPr>
+          <p:cNvPr id="3" name="TextBox 2"/>
+          <p:cNvSpPr txBox="1"/>
+          <p:nvPr/>
+        </p:nvSpPr>
+        <p:spPr>
+          <a:xfrm>
+            <a:off x="457200" y="1143000"/>
+            <a:ext cx="11277295" cy="3017520"/>
+          </a:xfrm>
+          <a:prstGeom prst="rect">
+            <a:avLst/>
+          </a:prstGeom>
+          <a:noFill/>
+        </p:spPr>
+        <p:txBody>
+          <a:bodyPr wrap="square" lIns="0" rIns="0" tIns="0" bIns="0">
+            <a:spAutoFit/>
+          </a:bodyPr>
+          <a:lstStyle/>
+          <a:p>
+            <a:pPr algn="l">
+              <a:lnSpc>
+                <a:spcPct val="125000"/>
+              </a:lnSpc>
+              <a:spcAft>
+                <a:spcPts val="600"/>
+              </a:spcAft>
+            </a:pPr>
+            <a:r>
+              <a:rPr sz="1700" b="0" i="0">
+                <a:solidFill>
+                  <a:srgbClr val="000000"/>
+                </a:solidFill>
+                <a:latin typeface="Arial"/>
+              </a:rPr>
+              <a:t>•  500 ns conventional MD completed (Job 40806029, 71.5 hrs)</a:t>
+            </a:r>
+          </a:p>
+          <a:p>
+            <a:pPr algn="l">
+              <a:lnSpc>
+                <a:spcPct val="125000"/>
+              </a:lnSpc>
+              <a:spcAft>
+                <a:spcPts val="600"/>
+              </a:spcAft>
+            </a:pPr>
+            <a:r>
+              <a:rPr sz="1700" b="0" i="0">
+                <a:solidFill>
+                  <a:srgbClr val="000000"/>
+                </a:solidFill>
+                <a:latin typeface="Arial"/>
+              </a:rPr>
+              <a:t>•  AMBER → GROMACS format conversion (ParmEd, 39268 atoms)</a:t>
+            </a:r>
+          </a:p>
+          <a:p>
+            <a:pPr algn="l">
+              <a:lnSpc>
+                <a:spcPct val="125000"/>
+              </a:lnSpc>
+              <a:spcAft>
+                <a:spcPts val="600"/>
+              </a:spcAft>
+            </a:pPr>
+            <a:r>
+              <a:rPr sz="1700" b="0" i="0">
+                <a:solidFill>
+                  <a:srgbClr val="000000"/>
+                </a:solidFill>
+                <a:latin typeface="Arial"/>
+              </a:rPr>
+              <a:t>•  PLUMED 2.9.2 compiled from source (conda version had broken libplumedKernel.so)</a:t>
+            </a:r>
+          </a:p>
+          <a:p>
+            <a:pPr algn="l">
+              <a:lnSpc>
+                <a:spcPct val="125000"/>
+              </a:lnSpc>
+              <a:spcAft>
+                <a:spcPts val="600"/>
+              </a:spcAft>
+            </a:pPr>
+            <a:r>
+              <a:rPr sz="1700" b="0" i="0">
+                <a:solidFill>
+                  <a:srgbClr val="000000"/>
+                </a:solidFill>
+                <a:latin typeface="Arial"/>
+              </a:rPr>
+              <a:t>•  Single-walker MetaD submitted (Job 41514529, FUNCPATHMSD + ADAPTIVE=GEOM)</a:t>
+            </a:r>
+          </a:p>
+        </p:txBody>
+      </p:sp>
+      <p:sp>
+        <p:nvSpPr>
+          <p:cNvPr id="4" name="Rectangle 3"/>
+          <p:cNvSpPr/>
+          <p:nvPr/>
+        </p:nvSpPr>
+        <p:spPr>
+          <a:xfrm>
+            <a:off x="457200" y="5074920"/>
+            <a:ext cx="11277295" cy="1234440"/>
+          </a:xfrm>
+          <a:prstGeom prst="rect">
+            <a:avLst/>
+          </a:prstGeom>
+          <a:solidFill>
+            <a:srgbClr val="F0F0F0"/>
+          </a:solidFill>
+          <a:ln w="6350">
+            <a:solidFill>
+              <a:srgbClr val="CCCCCC"/>
+            </a:solidFill>
+          </a:ln>
+        </p:spPr>
+        <p:style>
+          <a:lnRef idx="1">
+            <a:schemeClr val="accent1"/>
+          </a:lnRef>
+          <a:fillRef idx="3">
+            <a:schemeClr val="accent1"/>
+          </a:fillRef>
+          <a:effectRef idx="2">
+            <a:schemeClr val="accent1"/>
+          </a:effectRef>
+          <a:fontRef idx="minor">
+            <a:schemeClr val="lt1"/>
+          </a:fontRef>
+        </p:style>
+        <p:txBody>
+          <a:bodyPr rtlCol="0" anchor="ctr"/>
+          <a:lstStyle/>
+          <a:p/>
+        </p:txBody>
+      </p:sp>
+      <p:sp>
+        <p:nvSpPr>
+          <p:cNvPr id="5" name="TextBox 4"/>
+          <p:cNvSpPr txBox="1"/>
+          <p:nvPr/>
+        </p:nvSpPr>
+        <p:spPr>
+          <a:xfrm>
+            <a:off x="566928" y="5184648"/>
+            <a:ext cx="11057839" cy="1014984"/>
           </a:xfrm>
           <a:prstGeom prst="rect">
             <a:avLst/>
@@ -4638,15 +4404,397 @@
               </a:spcAft>
             </a:pPr>
             <a:r>
-              <a:rPr sz="1000" b="0" i="0">
+              <a:rPr sz="1100" b="0" i="0">
                 <a:solidFill>
                   <a:srgbClr val="1F1F1F"/>
                 </a:solidFill>
                 <a:latin typeface="Courier New"/>
               </a:rPr>
-              <a:t>r1: RMSD REFERENCE=frames/frame_01.pdb TYPE=OPTIMAL  # &lt;- missing SQUARED</a:t>
-            </a:r>
-          </a:p>
+              <a:t>gmx mdrun -deffnm metad -plumed plumed.dat -ntmpi 1 -ntomp 8</a:t>
+            </a:r>
+          </a:p>
+        </p:txBody>
+      </p:sp>
+      <p:sp>
+        <p:nvSpPr>
+          <p:cNvPr id="6" name="TextBox 5"/>
+          <p:cNvSpPr txBox="1"/>
+          <p:nvPr/>
+        </p:nvSpPr>
+        <p:spPr>
+          <a:xfrm>
+            <a:off x="457200" y="6446520"/>
+            <a:ext cx="11277295" cy="320040"/>
+          </a:xfrm>
+          <a:prstGeom prst="rect">
+            <a:avLst/>
+          </a:prstGeom>
+          <a:noFill/>
+        </p:spPr>
+        <p:txBody>
+          <a:bodyPr wrap="square" lIns="0" rIns="0" tIns="0" bIns="0">
+            <a:spAutoFit/>
+          </a:bodyPr>
+          <a:lstStyle/>
+          <a:p>
+            <a:pPr algn="l"/>
+            <a:r>
+              <a:rPr sz="800" b="0" i="1">
+                <a:solidFill>
+                  <a:srgbClr val="666666"/>
+                </a:solidFill>
+                <a:latin typeface="Arial"/>
+              </a:rPr>
+              <a:t>replication/metadynamics/single_walker/submit.sh</a:t>
+            </a:r>
+          </a:p>
+        </p:txBody>
+      </p:sp>
+      <p:sp>
+        <p:nvSpPr>
+          <p:cNvPr id="9" name="TextBox 8"/>
+          <p:cNvSpPr txBox="1"/>
+          <p:nvPr/>
+        </p:nvSpPr>
+        <p:spPr>
+          <a:xfrm>
+            <a:off x="10058400" y="6400800"/>
+            <a:ext cx="2011680" cy="365760"/>
+          </a:xfrm>
+          <a:prstGeom prst="rect">
+            <a:avLst/>
+          </a:prstGeom>
+          <a:noFill/>
+        </p:spPr>
+        <p:txBody>
+          <a:bodyPr wrap="none" lIns="0" rIns="0">
+            <a:spAutoFit/>
+          </a:bodyPr>
+          <a:lstStyle/>
+          <a:p>
+            <a:pPr algn="r"/>
+            <a:r>
+              <a:rPr sz="800" b="0" i="0">
+                <a:solidFill>
+                  <a:srgbClr val="6B7280"/>
+                </a:solidFill>
+                <a:latin typeface="Arial"/>
+              </a:rPr>
+              <a:t>TrpB MetaD Benchmark  ·  3 / 10</a:t>
+            </a:r>
+          </a:p>
+        </p:txBody>
+      </p:sp>
+    </p:spTree>
+  </p:cSld>
+  <p:clrMapOvr>
+    <a:masterClrMapping/>
+  </p:clrMapOvr>
+</p:sld>
+</file>
+
+<file path=ppt/slides/slide4.xml><?xml version="1.0" encoding="utf-8"?>
+<p:sld xmlns:a="http://schemas.openxmlformats.org/drawingml/2006/main" xmlns:p="http://schemas.openxmlformats.org/presentationml/2006/main" xmlns:r="http://schemas.openxmlformats.org/officeDocument/2006/relationships">
+  <p:cSld>
+    <p:bg>
+      <p:bgPr>
+        <a:solidFill>
+          <a:srgbClr val="FDFDFD"/>
+        </a:solidFill>
+        <a:effectLst/>
+      </p:bgPr>
+    </p:bg>
+    <p:spTree>
+      <p:nvGrpSpPr>
+        <p:cNvPr id="1" name=""/>
+        <p:cNvGrpSpPr/>
+        <p:nvPr/>
+      </p:nvGrpSpPr>
+      <p:grpSpPr/>
+      <p:sp>
+        <p:nvSpPr>
+          <p:cNvPr id="8" name="Rectangle 7"/>
+          <p:cNvSpPr/>
+          <p:nvPr/>
+        </p:nvSpPr>
+        <p:spPr>
+          <a:xfrm>
+            <a:off x="109728" y="0"/>
+            <a:ext cx="12079224" cy="1005840"/>
+          </a:xfrm>
+          <a:prstGeom prst="rect">
+            <a:avLst/>
+          </a:prstGeom>
+          <a:solidFill>
+            <a:srgbClr val="F4F6FB"/>
+          </a:solidFill>
+          <a:ln>
+            <a:noFill/>
+          </a:ln>
+        </p:spPr>
+        <p:style>
+          <a:lnRef idx="1">
+            <a:schemeClr val="accent1"/>
+          </a:lnRef>
+          <a:fillRef idx="3">
+            <a:schemeClr val="accent1"/>
+          </a:fillRef>
+          <a:effectRef idx="2">
+            <a:schemeClr val="accent1"/>
+          </a:effectRef>
+          <a:fontRef idx="minor">
+            <a:schemeClr val="lt1"/>
+          </a:fontRef>
+        </p:style>
+        <p:txBody>
+          <a:bodyPr rtlCol="0" anchor="ctr"/>
+          <a:lstStyle/>
+          <a:p>
+            <a:pPr algn="ctr"/>
+          </a:p>
+        </p:txBody>
+      </p:sp>
+      <p:sp>
+        <p:nvSpPr>
+          <p:cNvPr id="7" name="Rectangle 6"/>
+          <p:cNvSpPr/>
+          <p:nvPr/>
+        </p:nvSpPr>
+        <p:spPr>
+          <a:xfrm>
+            <a:off x="0" y="0"/>
+            <a:ext cx="109728" cy="6858000"/>
+          </a:xfrm>
+          <a:prstGeom prst="rect">
+            <a:avLst/>
+          </a:prstGeom>
+          <a:solidFill>
+            <a:srgbClr val="2E5CA7"/>
+          </a:solidFill>
+          <a:ln>
+            <a:noFill/>
+          </a:ln>
+        </p:spPr>
+        <p:style>
+          <a:lnRef idx="1">
+            <a:schemeClr val="accent1"/>
+          </a:lnRef>
+          <a:fillRef idx="3">
+            <a:schemeClr val="accent1"/>
+          </a:fillRef>
+          <a:effectRef idx="2">
+            <a:schemeClr val="accent1"/>
+          </a:effectRef>
+          <a:fontRef idx="minor">
+            <a:schemeClr val="lt1"/>
+          </a:fontRef>
+        </p:style>
+        <p:txBody>
+          <a:bodyPr rtlCol="0" anchor="ctr"/>
+          <a:lstStyle/>
+          <a:p>
+            <a:pPr algn="ctr"/>
+          </a:p>
+        </p:txBody>
+      </p:sp>
+      <p:sp>
+        <p:nvSpPr>
+          <p:cNvPr id="2" name="TextBox 1"/>
+          <p:cNvSpPr txBox="1"/>
+          <p:nvPr/>
+        </p:nvSpPr>
+        <p:spPr>
+          <a:xfrm>
+            <a:off x="457200" y="320040"/>
+            <a:ext cx="11277295" cy="777240"/>
+          </a:xfrm>
+          <a:prstGeom prst="rect">
+            <a:avLst/>
+          </a:prstGeom>
+          <a:noFill/>
+        </p:spPr>
+        <p:txBody>
+          <a:bodyPr wrap="square" lIns="0" rIns="0" tIns="0" bIns="0">
+            <a:spAutoFit/>
+          </a:bodyPr>
+          <a:lstStyle/>
+          <a:p>
+            <a:pPr algn="l"/>
+            <a:r>
+              <a:rPr sz="2400" b="1" i="0">
+                <a:solidFill>
+                  <a:srgbClr val="1A2744"/>
+                </a:solidFill>
+                <a:latin typeface="Arial"/>
+              </a:rPr>
+              <a:t>Job 41514529 ran 46.3 ns but s(R) was confined to [7.77, 7.83] — no exploration</a:t>
+            </a:r>
+          </a:p>
+        </p:txBody>
+      </p:sp>
+      <p:sp>
+        <p:nvSpPr>
+          <p:cNvPr id="3" name="TextBox 2"/>
+          <p:cNvSpPr txBox="1"/>
+          <p:nvPr/>
+        </p:nvSpPr>
+        <p:spPr>
+          <a:xfrm>
+            <a:off x="457200" y="1143000"/>
+            <a:ext cx="11277295" cy="2194560"/>
+          </a:xfrm>
+          <a:prstGeom prst="rect">
+            <a:avLst/>
+          </a:prstGeom>
+          <a:noFill/>
+        </p:spPr>
+        <p:txBody>
+          <a:bodyPr wrap="square" lIns="0" tIns="0">
+            <a:spAutoFit/>
+          </a:bodyPr>
+          <a:lstStyle/>
+          <a:p>
+            <a:pPr>
+              <a:lnSpc>
+                <a:spcPct val="120000"/>
+              </a:lnSpc>
+              <a:spcAft>
+                <a:spcPts val="600"/>
+              </a:spcAft>
+            </a:pPr>
+            <a:r>
+              <a:rPr sz="1500" b="0" i="0">
+                <a:solidFill>
+                  <a:srgbClr val="000000"/>
+                </a:solidFill>
+                <a:latin typeface="Arial"/>
+              </a:rPr>
+              <a:t>•  Walltime kill at 72h, reached 46.3 of 50 ns</a:t>
+            </a:r>
+          </a:p>
+          <a:p>
+            <a:pPr>
+              <a:lnSpc>
+                <a:spcPct val="120000"/>
+              </a:lnSpc>
+              <a:spcAft>
+                <a:spcPts val="600"/>
+              </a:spcAft>
+            </a:pPr>
+            <a:r>
+              <a:rPr sz="1500" b="0" i="0">
+                <a:solidFill>
+                  <a:srgbClr val="000000"/>
+                </a:solidFill>
+                <a:latin typeface="Arial"/>
+              </a:rPr>
+              <a:t>•  COLVAR: 100% of frames in PC region (s=5–10), 0% in O or C</a:t>
+            </a:r>
+          </a:p>
+          <a:p>
+            <a:pPr>
+              <a:lnSpc>
+                <a:spcPct val="120000"/>
+              </a:lnSpc>
+              <a:spcAft>
+                <a:spcPts val="600"/>
+              </a:spcAft>
+            </a:pPr>
+            <a:r>
+              <a:rPr sz="1500" b="0" i="0">
+                <a:solidFill>
+                  <a:srgbClr val="000000"/>
+                </a:solidFill>
+                <a:latin typeface="Arial"/>
+              </a:rPr>
+              <a:t>•  Bias accumulated to 61.7 kJ/mol but system never moved</a:t>
+            </a:r>
+          </a:p>
+          <a:p>
+            <a:pPr>
+              <a:lnSpc>
+                <a:spcPct val="120000"/>
+              </a:lnSpc>
+              <a:spcAft>
+                <a:spcPts val="600"/>
+              </a:spcAft>
+            </a:pPr>
+            <a:r>
+              <a:rPr sz="1500" b="1" i="0">
+                <a:solidFill>
+                  <a:srgbClr val="DC2626"/>
+                </a:solidFill>
+                <a:latin typeface="Arial"/>
+              </a:rPr>
+              <a:t>•  Initial diagnosis: “system stuck in PC basin” — THIS WAS WRONG</a:t>
+            </a:r>
+          </a:p>
+        </p:txBody>
+      </p:sp>
+      <p:sp>
+        <p:nvSpPr>
+          <p:cNvPr id="4" name="Rectangle 3"/>
+          <p:cNvSpPr/>
+          <p:nvPr/>
+        </p:nvSpPr>
+        <p:spPr>
+          <a:xfrm>
+            <a:off x="457200" y="3886200"/>
+            <a:ext cx="11277295" cy="2514600"/>
+          </a:xfrm>
+          <a:prstGeom prst="rect">
+            <a:avLst/>
+          </a:prstGeom>
+          <a:solidFill>
+            <a:srgbClr val="F0F0F0"/>
+          </a:solidFill>
+          <a:ln w="6350">
+            <a:solidFill>
+              <a:srgbClr val="CCCCCC"/>
+            </a:solidFill>
+          </a:ln>
+        </p:spPr>
+        <p:style>
+          <a:lnRef idx="1">
+            <a:schemeClr val="accent1"/>
+          </a:lnRef>
+          <a:fillRef idx="3">
+            <a:schemeClr val="accent1"/>
+          </a:fillRef>
+          <a:effectRef idx="2">
+            <a:schemeClr val="accent1"/>
+          </a:effectRef>
+          <a:fontRef idx="minor">
+            <a:schemeClr val="lt1"/>
+          </a:fontRef>
+        </p:style>
+        <p:txBody>
+          <a:bodyPr rtlCol="0" anchor="ctr"/>
+          <a:lstStyle/>
+          <a:p/>
+        </p:txBody>
+      </p:sp>
+      <p:sp>
+        <p:nvSpPr>
+          <p:cNvPr id="5" name="TextBox 4"/>
+          <p:cNvSpPr txBox="1"/>
+          <p:nvPr/>
+        </p:nvSpPr>
+        <p:spPr>
+          <a:xfrm>
+            <a:off x="566928" y="3995928"/>
+            <a:ext cx="11057839" cy="2295144"/>
+          </a:xfrm>
+          <a:prstGeom prst="rect">
+            <a:avLst/>
+          </a:prstGeom>
+          <a:noFill/>
+        </p:spPr>
+        <p:txBody>
+          <a:bodyPr wrap="square" lIns="0" rIns="0" tIns="0" bIns="0">
+            <a:spAutoFit/>
+          </a:bodyPr>
+          <a:lstStyle/>
           <a:p>
             <a:pPr algn="l">
               <a:lnSpc>
@@ -4657,13 +4805,13 @@
               </a:spcAft>
             </a:pPr>
             <a:r>
-              <a:rPr sz="1000" b="0" i="0">
+              <a:rPr sz="900" b="0" i="0">
                 <a:solidFill>
                   <a:srgbClr val="1F1F1F"/>
                 </a:solidFill>
                 <a:latin typeface="Courier New"/>
               </a:rPr>
-              <a:t>...</a:t>
+              <a:t># COLVAR analysis</a:t>
             </a:r>
           </a:p>
           <a:p>
@@ -4676,13 +4824,165 @@
               </a:spcAft>
             </a:pPr>
             <a:r>
-              <a:rPr sz="1000" b="0" i="0">
+              <a:rPr sz="900" b="0" i="0">
                 <a:solidFill>
                   <a:srgbClr val="1F1F1F"/>
                 </a:solidFill>
                 <a:latin typeface="Courier New"/>
               </a:rPr>
-              <a:t>path: FUNCPATHMSD ARG=r1,...,r15 LAMBDA=3.3910        # &lt;- wrong by 112x</a:t>
+              <a:t>python3 -c "</a:t>
+            </a:r>
+          </a:p>
+          <a:p>
+            <a:pPr algn="l">
+              <a:lnSpc>
+                <a:spcPct val="110000"/>
+              </a:lnSpc>
+              <a:spcAft>
+                <a:spcPts val="0"/>
+              </a:spcAft>
+            </a:pPr>
+            <a:r>
+              <a:rPr sz="900" b="0" i="0">
+                <a:solidFill>
+                  <a:srgbClr val="1F1F1F"/>
+                </a:solidFill>
+                <a:latin typeface="Courier New"/>
+              </a:rPr>
+              <a:t>import numpy as np</a:t>
+            </a:r>
+          </a:p>
+          <a:p>
+            <a:pPr algn="l">
+              <a:lnSpc>
+                <a:spcPct val="110000"/>
+              </a:lnSpc>
+              <a:spcAft>
+                <a:spcPts val="0"/>
+              </a:spcAft>
+            </a:pPr>
+            <a:r>
+              <a:rPr sz="900" b="0" i="0">
+                <a:solidFill>
+                  <a:srgbClr val="1F1F1F"/>
+                </a:solidFill>
+                <a:latin typeface="Courier New"/>
+              </a:rPr>
+              <a:t>d = np.loadtxt('COLVAR', comments='#')</a:t>
+            </a:r>
+          </a:p>
+          <a:p>
+            <a:pPr algn="l">
+              <a:lnSpc>
+                <a:spcPct val="110000"/>
+              </a:lnSpc>
+              <a:spcAft>
+                <a:spcPts val="0"/>
+              </a:spcAft>
+            </a:pPr>
+            <a:r>
+              <a:rPr sz="900" b="0" i="0">
+                <a:solidFill>
+                  <a:srgbClr val="1F1F1F"/>
+                </a:solidFill>
+                <a:latin typeface="Courier New"/>
+              </a:rPr>
+              <a:t>s = d[:,1]</a:t>
+            </a:r>
+          </a:p>
+          <a:p>
+            <a:pPr algn="l">
+              <a:lnSpc>
+                <a:spcPct val="110000"/>
+              </a:lnSpc>
+              <a:spcAft>
+                <a:spcPts val="0"/>
+              </a:spcAft>
+            </a:pPr>
+            <a:r>
+              <a:rPr sz="900" b="0" i="0">
+                <a:solidFill>
+                  <a:srgbClr val="1F1F1F"/>
+                </a:solidFill>
+                <a:latin typeface="Courier New"/>
+              </a:rPr>
+              <a:t>print(f'O(s&lt;5): {(s&lt;5).sum()}'</a:t>
+            </a:r>
+          </a:p>
+          <a:p>
+            <a:pPr algn="l">
+              <a:lnSpc>
+                <a:spcPct val="110000"/>
+              </a:lnSpc>
+              <a:spcAft>
+                <a:spcPts val="0"/>
+              </a:spcAft>
+            </a:pPr>
+            <a:r>
+              <a:rPr sz="900" b="0" i="0">
+                <a:solidFill>
+                  <a:srgbClr val="1F1F1F"/>
+                </a:solidFill>
+                <a:latin typeface="Courier New"/>
+              </a:rPr>
+              <a:t>      f' PC(5-10): {((s&gt;5)&amp;(s&lt;10)).sum()}'</a:t>
+            </a:r>
+          </a:p>
+          <a:p>
+            <a:pPr algn="l">
+              <a:lnSpc>
+                <a:spcPct val="110000"/>
+              </a:lnSpc>
+              <a:spcAft>
+                <a:spcPts val="0"/>
+              </a:spcAft>
+            </a:pPr>
+            <a:r>
+              <a:rPr sz="900" b="0" i="0">
+                <a:solidFill>
+                  <a:srgbClr val="1F1F1F"/>
+                </a:solidFill>
+                <a:latin typeface="Courier New"/>
+              </a:rPr>
+              <a:t>      f' C(s&gt;10): {(s&gt;10).sum()}')</a:t>
+            </a:r>
+          </a:p>
+          <a:p>
+            <a:pPr algn="l">
+              <a:lnSpc>
+                <a:spcPct val="110000"/>
+              </a:lnSpc>
+              <a:spcAft>
+                <a:spcPts val="0"/>
+              </a:spcAft>
+            </a:pPr>
+            <a:r>
+              <a:rPr sz="900" b="0" i="0">
+                <a:solidFill>
+                  <a:srgbClr val="1F1F1F"/>
+                </a:solidFill>
+                <a:latin typeface="Courier New"/>
+              </a:rPr>
+              <a:t>"</a:t>
+            </a:r>
+          </a:p>
+          <a:p>
+            <a:pPr algn="l">
+              <a:lnSpc>
+                <a:spcPct val="110000"/>
+              </a:lnSpc>
+              <a:spcAft>
+                <a:spcPts val="0"/>
+              </a:spcAft>
+            </a:pPr>
+            <a:r>
+              <a:rPr sz="900" b="0" i="0">
+                <a:solidFill>
+                  <a:srgbClr val="1F1F1F"/>
+                </a:solidFill>
+                <a:latin typeface="Courier New"/>
+              </a:rPr>
+              <a:t># Output: O: 0  PC: 46304  C: 0</a:t>
             </a:r>
           </a:p>
         </p:txBody>
@@ -4695,8 +4995,8 @@
         </p:nvSpPr>
         <p:spPr>
           <a:xfrm>
-            <a:off x="457200" y="3611880"/>
-            <a:ext cx="11277295" cy="274320"/>
+            <a:off x="457200" y="6446520"/>
+            <a:ext cx="11277295" cy="320040"/>
           </a:xfrm>
           <a:prstGeom prst="rect">
             <a:avLst/>
@@ -4711,27 +5011,27 @@
           <a:p>
             <a:pPr algn="l"/>
             <a:r>
-              <a:rPr sz="1200" b="0" i="1">
+              <a:rPr sz="800" b="0" i="1">
                 <a:solidFill>
                   <a:srgbClr val="666666"/>
                 </a:solidFill>
                 <a:latin typeface="Arial"/>
               </a:rPr>
-              <a:t>Old (broken) plumed.dat excerpt:</a:t>
-            </a:r>
-          </a:p>
-        </p:txBody>
-      </p:sp>
-      <p:sp>
-        <p:nvSpPr>
-          <p:cNvPr id="7" name="TextBox 6"/>
+              <a:t>Job 41514529 on Longleaf c130604  |  single_walker/COLVAR</a:t>
+            </a:r>
+          </a:p>
+        </p:txBody>
+      </p:sp>
+      <p:sp>
+        <p:nvSpPr>
+          <p:cNvPr id="9" name="TextBox 8"/>
           <p:cNvSpPr txBox="1"/>
           <p:nvPr/>
         </p:nvSpPr>
         <p:spPr>
           <a:xfrm>
-            <a:off x="457200" y="6446520"/>
-            <a:ext cx="11277295" cy="320040"/>
+            <a:off x="10058400" y="6400800"/>
+            <a:ext cx="2011680" cy="365760"/>
           </a:xfrm>
           <a:prstGeom prst="rect">
             <a:avLst/>
@@ -4739,6 +5039,153 @@
           <a:noFill/>
         </p:spPr>
         <p:txBody>
+          <a:bodyPr wrap="none" lIns="0" rIns="0">
+            <a:spAutoFit/>
+          </a:bodyPr>
+          <a:lstStyle/>
+          <a:p>
+            <a:pPr algn="r"/>
+            <a:r>
+              <a:rPr sz="800" b="0" i="0">
+                <a:solidFill>
+                  <a:srgbClr val="6B7280"/>
+                </a:solidFill>
+                <a:latin typeface="Arial"/>
+              </a:rPr>
+              <a:t>TrpB MetaD Benchmark  ·  4 / 10</a:t>
+            </a:r>
+          </a:p>
+        </p:txBody>
+      </p:sp>
+    </p:spTree>
+  </p:cSld>
+  <p:clrMapOvr>
+    <a:masterClrMapping/>
+  </p:clrMapOvr>
+</p:sld>
+</file>
+
+<file path=ppt/slides/slide5.xml><?xml version="1.0" encoding="utf-8"?>
+<p:sld xmlns:a="http://schemas.openxmlformats.org/drawingml/2006/main" xmlns:p="http://schemas.openxmlformats.org/presentationml/2006/main" xmlns:r="http://schemas.openxmlformats.org/officeDocument/2006/relationships">
+  <p:cSld>
+    <p:bg>
+      <p:bgPr>
+        <a:solidFill>
+          <a:srgbClr val="FDFDFD"/>
+        </a:solidFill>
+        <a:effectLst/>
+      </p:bgPr>
+    </p:bg>
+    <p:spTree>
+      <p:nvGrpSpPr>
+        <p:cNvPr id="1" name=""/>
+        <p:cNvGrpSpPr/>
+        <p:nvPr/>
+      </p:nvGrpSpPr>
+      <p:grpSpPr/>
+      <p:sp>
+        <p:nvSpPr>
+          <p:cNvPr id="9" name="Rectangle 8"/>
+          <p:cNvSpPr/>
+          <p:nvPr/>
+        </p:nvSpPr>
+        <p:spPr>
+          <a:xfrm>
+            <a:off x="109728" y="0"/>
+            <a:ext cx="12079224" cy="1005840"/>
+          </a:xfrm>
+          <a:prstGeom prst="rect">
+            <a:avLst/>
+          </a:prstGeom>
+          <a:solidFill>
+            <a:srgbClr val="F4F6FB"/>
+          </a:solidFill>
+          <a:ln>
+            <a:noFill/>
+          </a:ln>
+        </p:spPr>
+        <p:style>
+          <a:lnRef idx="1">
+            <a:schemeClr val="accent1"/>
+          </a:lnRef>
+          <a:fillRef idx="3">
+            <a:schemeClr val="accent1"/>
+          </a:fillRef>
+          <a:effectRef idx="2">
+            <a:schemeClr val="accent1"/>
+          </a:effectRef>
+          <a:fontRef idx="minor">
+            <a:schemeClr val="lt1"/>
+          </a:fontRef>
+        </p:style>
+        <p:txBody>
+          <a:bodyPr rtlCol="0" anchor="ctr"/>
+          <a:lstStyle/>
+          <a:p>
+            <a:pPr algn="ctr"/>
+          </a:p>
+        </p:txBody>
+      </p:sp>
+      <p:sp>
+        <p:nvSpPr>
+          <p:cNvPr id="8" name="Rectangle 7"/>
+          <p:cNvSpPr/>
+          <p:nvPr/>
+        </p:nvSpPr>
+        <p:spPr>
+          <a:xfrm>
+            <a:off x="0" y="0"/>
+            <a:ext cx="109728" cy="6858000"/>
+          </a:xfrm>
+          <a:prstGeom prst="rect">
+            <a:avLst/>
+          </a:prstGeom>
+          <a:solidFill>
+            <a:srgbClr val="2E5CA7"/>
+          </a:solidFill>
+          <a:ln>
+            <a:noFill/>
+          </a:ln>
+        </p:spPr>
+        <p:style>
+          <a:lnRef idx="1">
+            <a:schemeClr val="accent1"/>
+          </a:lnRef>
+          <a:fillRef idx="3">
+            <a:schemeClr val="accent1"/>
+          </a:fillRef>
+          <a:effectRef idx="2">
+            <a:schemeClr val="accent1"/>
+          </a:effectRef>
+          <a:fontRef idx="minor">
+            <a:schemeClr val="lt1"/>
+          </a:fontRef>
+        </p:style>
+        <p:txBody>
+          <a:bodyPr rtlCol="0" anchor="ctr"/>
+          <a:lstStyle/>
+          <a:p>
+            <a:pPr algn="ctr"/>
+          </a:p>
+        </p:txBody>
+      </p:sp>
+      <p:sp>
+        <p:nvSpPr>
+          <p:cNvPr id="2" name="TextBox 1"/>
+          <p:cNvSpPr txBox="1"/>
+          <p:nvPr/>
+        </p:nvSpPr>
+        <p:spPr>
+          <a:xfrm>
+            <a:off x="457200" y="320040"/>
+            <a:ext cx="11277295" cy="777240"/>
+          </a:xfrm>
+          <a:prstGeom prst="rect">
+            <a:avLst/>
+          </a:prstGeom>
+          <a:noFill/>
+        </p:spPr>
+        <p:txBody>
           <a:bodyPr wrap="square" lIns="0" rIns="0" tIns="0" bIns="0">
             <a:spAutoFit/>
           </a:bodyPr>
@@ -4746,6 +5193,298 @@
           <a:p>
             <a:pPr algn="l"/>
             <a:r>
+              <a:rPr sz="2400" b="1" i="0">
+                <a:solidFill>
+                  <a:srgbClr val="1A2744"/>
+                </a:solidFill>
+                <a:latin typeface="Arial"/>
+              </a:rPr>
+              <a:t>We switched from PATHMSD to FUNCPATHMSD due to an atom serial issue — but kept the old LAMBDA</a:t>
+            </a:r>
+          </a:p>
+        </p:txBody>
+      </p:sp>
+      <p:sp>
+        <p:nvSpPr>
+          <p:cNvPr id="3" name="TextBox 2"/>
+          <p:cNvSpPr txBox="1"/>
+          <p:nvPr/>
+        </p:nvSpPr>
+        <p:spPr>
+          <a:xfrm>
+            <a:off x="457200" y="1143000"/>
+            <a:ext cx="11277295" cy="2286000"/>
+          </a:xfrm>
+          <a:prstGeom prst="rect">
+            <a:avLst/>
+          </a:prstGeom>
+          <a:noFill/>
+        </p:spPr>
+        <p:txBody>
+          <a:bodyPr wrap="square" lIns="0" rIns="0" tIns="0" bIns="0">
+            <a:spAutoFit/>
+          </a:bodyPr>
+          <a:lstStyle/>
+          <a:p>
+            <a:pPr algn="l">
+              <a:lnSpc>
+                <a:spcPct val="120000"/>
+              </a:lnSpc>
+              <a:spcAft>
+                <a:spcPts val="600"/>
+              </a:spcAft>
+            </a:pPr>
+            <a:r>
+              <a:rPr sz="1400" b="0" i="0">
+                <a:solidFill>
+                  <a:srgbClr val="000000"/>
+                </a:solidFill>
+                <a:latin typeface="Arial"/>
+              </a:rPr>
+              <a:t>•  SI used “path collective variables” + GROMACS 5.1.2 + PLUMED2 (no input file provided)</a:t>
+            </a:r>
+          </a:p>
+          <a:p>
+            <a:pPr algn="l">
+              <a:lnSpc>
+                <a:spcPct val="120000"/>
+              </a:lnSpc>
+              <a:spcAft>
+                <a:spcPts val="600"/>
+              </a:spcAft>
+            </a:pPr>
+            <a:r>
+              <a:rPr sz="1400" b="0" i="0">
+                <a:solidFill>
+                  <a:srgbClr val="000000"/>
+                </a:solidFill>
+                <a:latin typeface="Arial"/>
+              </a:rPr>
+              <a:t>•  We first tried PATHMSD, but conda PLUMED had missing modules + atom serial errors</a:t>
+            </a:r>
+          </a:p>
+          <a:p>
+            <a:pPr algn="l">
+              <a:lnSpc>
+                <a:spcPct val="120000"/>
+              </a:lnSpc>
+              <a:spcAft>
+                <a:spcPts val="600"/>
+              </a:spcAft>
+            </a:pPr>
+            <a:r>
+              <a:rPr sz="1400" b="0" i="0">
+                <a:solidFill>
+                  <a:srgbClr val="000000"/>
+                </a:solidFill>
+                <a:latin typeface="Arial"/>
+              </a:rPr>
+              <a:t>•  Switched to FUNCPATHMSD (equivalent math, but takes explicit RMSD inputs)</a:t>
+            </a:r>
+          </a:p>
+          <a:p>
+            <a:pPr algn="l">
+              <a:lnSpc>
+                <a:spcPct val="120000"/>
+              </a:lnSpc>
+              <a:spcAft>
+                <a:spcPts val="600"/>
+              </a:spcAft>
+            </a:pPr>
+            <a:r>
+              <a:rPr sz="1400" b="0" i="0">
+                <a:solidFill>
+                  <a:srgbClr val="000000"/>
+                </a:solidFill>
+                <a:latin typeface="Arial"/>
+              </a:rPr>
+              <a:t>•  KEPT the same LAMBDA=3.391 nm⁻² — did not realize the convention differs</a:t>
+            </a:r>
+          </a:p>
+        </p:txBody>
+      </p:sp>
+      <p:sp>
+        <p:nvSpPr>
+          <p:cNvPr id="4" name="Rectangle 3"/>
+          <p:cNvSpPr/>
+          <p:nvPr/>
+        </p:nvSpPr>
+        <p:spPr>
+          <a:xfrm>
+            <a:off x="457200" y="3931920"/>
+            <a:ext cx="11277295" cy="1737360"/>
+          </a:xfrm>
+          <a:prstGeom prst="rect">
+            <a:avLst/>
+          </a:prstGeom>
+          <a:solidFill>
+            <a:srgbClr val="F0F0F0"/>
+          </a:solidFill>
+          <a:ln w="6350">
+            <a:solidFill>
+              <a:srgbClr val="CCCCCC"/>
+            </a:solidFill>
+          </a:ln>
+        </p:spPr>
+        <p:style>
+          <a:lnRef idx="1">
+            <a:schemeClr val="accent1"/>
+          </a:lnRef>
+          <a:fillRef idx="3">
+            <a:schemeClr val="accent1"/>
+          </a:fillRef>
+          <a:effectRef idx="2">
+            <a:schemeClr val="accent1"/>
+          </a:effectRef>
+          <a:fontRef idx="minor">
+            <a:schemeClr val="lt1"/>
+          </a:fontRef>
+        </p:style>
+        <p:txBody>
+          <a:bodyPr rtlCol="0" anchor="ctr"/>
+          <a:lstStyle/>
+          <a:p/>
+        </p:txBody>
+      </p:sp>
+      <p:sp>
+        <p:nvSpPr>
+          <p:cNvPr id="5" name="TextBox 4"/>
+          <p:cNvSpPr txBox="1"/>
+          <p:nvPr/>
+        </p:nvSpPr>
+        <p:spPr>
+          <a:xfrm>
+            <a:off x="566928" y="4041648"/>
+            <a:ext cx="11057839" cy="1517904"/>
+          </a:xfrm>
+          <a:prstGeom prst="rect">
+            <a:avLst/>
+          </a:prstGeom>
+          <a:noFill/>
+        </p:spPr>
+        <p:txBody>
+          <a:bodyPr wrap="square" lIns="0" rIns="0" tIns="0" bIns="0">
+            <a:spAutoFit/>
+          </a:bodyPr>
+          <a:lstStyle/>
+          <a:p>
+            <a:pPr algn="l">
+              <a:lnSpc>
+                <a:spcPct val="110000"/>
+              </a:lnSpc>
+              <a:spcAft>
+                <a:spcPts val="0"/>
+              </a:spcAft>
+            </a:pPr>
+            <a:r>
+              <a:rPr sz="1000" b="0" i="0">
+                <a:solidFill>
+                  <a:srgbClr val="1F1F1F"/>
+                </a:solidFill>
+                <a:latin typeface="Courier New"/>
+              </a:rPr>
+              <a:t>r1: RMSD REFERENCE=frames/frame_01.pdb TYPE=OPTIMAL  # &lt;- missing SQUARED</a:t>
+            </a:r>
+          </a:p>
+          <a:p>
+            <a:pPr algn="l">
+              <a:lnSpc>
+                <a:spcPct val="110000"/>
+              </a:lnSpc>
+              <a:spcAft>
+                <a:spcPts val="0"/>
+              </a:spcAft>
+            </a:pPr>
+            <a:r>
+              <a:rPr sz="1000" b="0" i="0">
+                <a:solidFill>
+                  <a:srgbClr val="1F1F1F"/>
+                </a:solidFill>
+                <a:latin typeface="Courier New"/>
+              </a:rPr>
+              <a:t>...</a:t>
+            </a:r>
+          </a:p>
+          <a:p>
+            <a:pPr algn="l">
+              <a:lnSpc>
+                <a:spcPct val="110000"/>
+              </a:lnSpc>
+              <a:spcAft>
+                <a:spcPts val="0"/>
+              </a:spcAft>
+            </a:pPr>
+            <a:r>
+              <a:rPr sz="1000" b="0" i="0">
+                <a:solidFill>
+                  <a:srgbClr val="1F1F1F"/>
+                </a:solidFill>
+                <a:latin typeface="Courier New"/>
+              </a:rPr>
+              <a:t>path: FUNCPATHMSD ARG=r1,...,r15 LAMBDA=3.3910        # &lt;- wrong by 112x</a:t>
+            </a:r>
+          </a:p>
+        </p:txBody>
+      </p:sp>
+      <p:sp>
+        <p:nvSpPr>
+          <p:cNvPr id="6" name="TextBox 5"/>
+          <p:cNvSpPr txBox="1"/>
+          <p:nvPr/>
+        </p:nvSpPr>
+        <p:spPr>
+          <a:xfrm>
+            <a:off x="457200" y="3611880"/>
+            <a:ext cx="11277295" cy="274320"/>
+          </a:xfrm>
+          <a:prstGeom prst="rect">
+            <a:avLst/>
+          </a:prstGeom>
+          <a:noFill/>
+        </p:spPr>
+        <p:txBody>
+          <a:bodyPr wrap="square" lIns="0" rIns="0" tIns="0" bIns="0">
+            <a:spAutoFit/>
+          </a:bodyPr>
+          <a:lstStyle/>
+          <a:p>
+            <a:pPr algn="l"/>
+            <a:r>
+              <a:rPr sz="1200" b="0" i="1">
+                <a:solidFill>
+                  <a:srgbClr val="666666"/>
+                </a:solidFill>
+                <a:latin typeface="Arial"/>
+              </a:rPr>
+              <a:t>Old (broken) plumed.dat excerpt:</a:t>
+            </a:r>
+          </a:p>
+        </p:txBody>
+      </p:sp>
+      <p:sp>
+        <p:nvSpPr>
+          <p:cNvPr id="7" name="TextBox 6"/>
+          <p:cNvSpPr txBox="1"/>
+          <p:nvPr/>
+        </p:nvSpPr>
+        <p:spPr>
+          <a:xfrm>
+            <a:off x="457200" y="6446520"/>
+            <a:ext cx="11277295" cy="320040"/>
+          </a:xfrm>
+          <a:prstGeom prst="rect">
+            <a:avLst/>
+          </a:prstGeom>
+          <a:noFill/>
+        </p:spPr>
+        <p:txBody>
+          <a:bodyPr wrap="square" lIns="0" rIns="0" tIns="0" bIns="0">
+            <a:spAutoFit/>
+          </a:bodyPr>
+          <a:lstStyle/>
+          <a:p>
+            <a:pPr algn="l"/>
+            <a:r>
               <a:rPr sz="800" b="0" i="1">
                 <a:solidFill>
                   <a:srgbClr val="666666"/>
@@ -4753,6 +5492,41 @@
                 <a:latin typeface="Arial"/>
               </a:rPr>
               <a:t>SI S3: “The PLUMED2 software package together with the GROMACS 5.1.2 code were used”  |  FP-020 in failure-patterns.md</a:t>
+            </a:r>
+          </a:p>
+        </p:txBody>
+      </p:sp>
+      <p:sp>
+        <p:nvSpPr>
+          <p:cNvPr id="10" name="TextBox 9"/>
+          <p:cNvSpPr txBox="1"/>
+          <p:nvPr/>
+        </p:nvSpPr>
+        <p:spPr>
+          <a:xfrm>
+            <a:off x="10058400" y="6400800"/>
+            <a:ext cx="2011680" cy="365760"/>
+          </a:xfrm>
+          <a:prstGeom prst="rect">
+            <a:avLst/>
+          </a:prstGeom>
+          <a:noFill/>
+        </p:spPr>
+        <p:txBody>
+          <a:bodyPr wrap="none" lIns="0" rIns="0">
+            <a:spAutoFit/>
+          </a:bodyPr>
+          <a:lstStyle/>
+          <a:p>
+            <a:pPr algn="r"/>
+            <a:r>
+              <a:rPr sz="800" b="0" i="0">
+                <a:solidFill>
+                  <a:srgbClr val="6B7280"/>
+                </a:solidFill>
+                <a:latin typeface="Arial"/>
+              </a:rPr>
+              <a:t>TrpB MetaD Benchmark  ·  5 / 10</a:t>
             </a:r>
           </a:p>
         </p:txBody>
@@ -4768,6 +5542,14 @@
 <file path=ppt/slides/slide6.xml><?xml version="1.0" encoding="utf-8"?>
 <p:sld xmlns:a="http://schemas.openxmlformats.org/drawingml/2006/main" xmlns:p="http://schemas.openxmlformats.org/presentationml/2006/main" xmlns:r="http://schemas.openxmlformats.org/officeDocument/2006/relationships">
   <p:cSld>
+    <p:bg>
+      <p:bgPr>
+        <a:solidFill>
+          <a:srgbClr val="FDFDFD"/>
+        </a:solidFill>
+        <a:effectLst/>
+      </p:bgPr>
+    </p:bg>
     <p:spTree>
       <p:nvGrpSpPr>
         <p:cNvPr id="1" name=""/>
@@ -4775,6 +5557,92 @@
         <p:nvPr/>
       </p:nvGrpSpPr>
       <p:grpSpPr/>
+      <p:sp>
+        <p:nvSpPr>
+          <p:cNvPr id="9" name="Rectangle 8"/>
+          <p:cNvSpPr/>
+          <p:nvPr/>
+        </p:nvSpPr>
+        <p:spPr>
+          <a:xfrm>
+            <a:off x="109728" y="0"/>
+            <a:ext cx="12079224" cy="1005840"/>
+          </a:xfrm>
+          <a:prstGeom prst="rect">
+            <a:avLst/>
+          </a:prstGeom>
+          <a:solidFill>
+            <a:srgbClr val="F4F6FB"/>
+          </a:solidFill>
+          <a:ln>
+            <a:noFill/>
+          </a:ln>
+        </p:spPr>
+        <p:style>
+          <a:lnRef idx="1">
+            <a:schemeClr val="accent1"/>
+          </a:lnRef>
+          <a:fillRef idx="3">
+            <a:schemeClr val="accent1"/>
+          </a:fillRef>
+          <a:effectRef idx="2">
+            <a:schemeClr val="accent1"/>
+          </a:effectRef>
+          <a:fontRef idx="minor">
+            <a:schemeClr val="lt1"/>
+          </a:fontRef>
+        </p:style>
+        <p:txBody>
+          <a:bodyPr rtlCol="0" anchor="ctr"/>
+          <a:lstStyle/>
+          <a:p>
+            <a:pPr algn="ctr"/>
+          </a:p>
+        </p:txBody>
+      </p:sp>
+      <p:sp>
+        <p:nvSpPr>
+          <p:cNvPr id="8" name="Rectangle 7"/>
+          <p:cNvSpPr/>
+          <p:nvPr/>
+        </p:nvSpPr>
+        <p:spPr>
+          <a:xfrm>
+            <a:off x="0" y="0"/>
+            <a:ext cx="109728" cy="6858000"/>
+          </a:xfrm>
+          <a:prstGeom prst="rect">
+            <a:avLst/>
+          </a:prstGeom>
+          <a:solidFill>
+            <a:srgbClr val="2E5CA7"/>
+          </a:solidFill>
+          <a:ln>
+            <a:noFill/>
+          </a:ln>
+        </p:spPr>
+        <p:style>
+          <a:lnRef idx="1">
+            <a:schemeClr val="accent1"/>
+          </a:lnRef>
+          <a:fillRef idx="3">
+            <a:schemeClr val="accent1"/>
+          </a:fillRef>
+          <a:effectRef idx="2">
+            <a:schemeClr val="accent1"/>
+          </a:effectRef>
+          <a:fontRef idx="minor">
+            <a:schemeClr val="lt1"/>
+          </a:fontRef>
+        </p:style>
+        <p:txBody>
+          <a:bodyPr rtlCol="0" anchor="ctr"/>
+          <a:lstStyle/>
+          <a:p>
+            <a:pPr algn="ctr"/>
+          </a:p>
+        </p:txBody>
+      </p:sp>
       <p:sp>
         <p:nvSpPr>
           <p:cNvPr id="2" name="TextBox 1"/>
@@ -5426,6 +6294,41 @@
           </a:p>
         </p:txBody>
       </p:sp>
+      <p:sp>
+        <p:nvSpPr>
+          <p:cNvPr id="10" name="TextBox 9"/>
+          <p:cNvSpPr txBox="1"/>
+          <p:nvPr/>
+        </p:nvSpPr>
+        <p:spPr>
+          <a:xfrm>
+            <a:off x="10058400" y="6400800"/>
+            <a:ext cx="2011680" cy="365760"/>
+          </a:xfrm>
+          <a:prstGeom prst="rect">
+            <a:avLst/>
+          </a:prstGeom>
+          <a:noFill/>
+        </p:spPr>
+        <p:txBody>
+          <a:bodyPr wrap="none" lIns="0" rIns="0">
+            <a:spAutoFit/>
+          </a:bodyPr>
+          <a:lstStyle/>
+          <a:p>
+            <a:pPr algn="r"/>
+            <a:r>
+              <a:rPr sz="800" b="0" i="0">
+                <a:solidFill>
+                  <a:srgbClr val="6B7280"/>
+                </a:solidFill>
+                <a:latin typeface="Arial"/>
+              </a:rPr>
+              <a:t>TrpB MetaD Benchmark  ·  6 / 10</a:t>
+            </a:r>
+          </a:p>
+        </p:txBody>
+      </p:sp>
     </p:spTree>
   </p:cSld>
   <p:clrMapOvr>
@@ -5437,6 +6340,14 @@
 <file path=ppt/slides/slide7.xml><?xml version="1.0" encoding="utf-8"?>
 <p:sld xmlns:a="http://schemas.openxmlformats.org/drawingml/2006/main" xmlns:p="http://schemas.openxmlformats.org/presentationml/2006/main" xmlns:r="http://schemas.openxmlformats.org/officeDocument/2006/relationships">
   <p:cSld>
+    <p:bg>
+      <p:bgPr>
+        <a:solidFill>
+          <a:srgbClr val="FDFDFD"/>
+        </a:solidFill>
+        <a:effectLst/>
+      </p:bgPr>
+    </p:bg>
     <p:spTree>
       <p:nvGrpSpPr>
         <p:cNvPr id="1" name=""/>
@@ -5446,518 +6357,23 @@
       <p:grpSpPr/>
       <p:sp>
         <p:nvSpPr>
-          <p:cNvPr id="2" name="TextBox 1"/>
-          <p:cNvSpPr txBox="1"/>
-          <p:nvPr/>
-        </p:nvSpPr>
-        <p:spPr>
-          <a:xfrm>
-            <a:off x="457200" y="320040"/>
-            <a:ext cx="11277295" cy="777240"/>
-          </a:xfrm>
-          <a:prstGeom prst="rect">
-            <a:avLst/>
-          </a:prstGeom>
-          <a:noFill/>
-        </p:spPr>
-        <p:txBody>
-          <a:bodyPr wrap="square" lIns="0" rIns="0" tIns="0" bIns="0">
-            <a:spAutoFit/>
-          </a:bodyPr>
-          <a:lstStyle/>
-          <a:p>
-            <a:pPr algn="l"/>
-            <a:r>
-              <a:rPr sz="2400" b="1" i="0">
-                <a:solidFill>
-                  <a:srgbClr val="1A2744"/>
-                </a:solidFill>
-                <a:latin typeface="Arial"/>
-              </a:rPr>
-              <a:t>generate_path_cv.py used np.sum (total SD) but PLUMED RMSD outputs np.mean (per-atom)</a:t>
-            </a:r>
-          </a:p>
-        </p:txBody>
-      </p:sp>
-      <p:sp>
-        <p:nvSpPr>
-          <p:cNvPr id="3" name="TextBox 2"/>
-          <p:cNvSpPr txBox="1"/>
-          <p:nvPr/>
-        </p:nvSpPr>
-        <p:spPr>
-          <a:xfrm>
-            <a:off x="457200" y="1188720"/>
-            <a:ext cx="5577840" cy="320040"/>
-          </a:xfrm>
-          <a:prstGeom prst="rect">
-            <a:avLst/>
-          </a:prstGeom>
-          <a:noFill/>
-        </p:spPr>
-        <p:txBody>
-          <a:bodyPr wrap="square" lIns="0" rIns="0" tIns="0" bIns="0">
-            <a:spAutoFit/>
-          </a:bodyPr>
-          <a:lstStyle/>
-          <a:p>
-            <a:pPr algn="l"/>
-            <a:r>
-              <a:rPr sz="1400" b="1" i="0">
-                <a:solidFill>
-                  <a:srgbClr val="1A2744"/>
-                </a:solidFill>
-                <a:latin typeface="Arial"/>
-              </a:rPr>
-              <a:t>Formula</a:t>
-            </a:r>
-          </a:p>
-        </p:txBody>
-      </p:sp>
-      <p:sp>
-        <p:nvSpPr>
-          <p:cNvPr id="4" name="TextBox 3"/>
-          <p:cNvSpPr txBox="1"/>
-          <p:nvPr/>
-        </p:nvSpPr>
-        <p:spPr>
-          <a:xfrm>
-            <a:off x="457200" y="1508760"/>
-            <a:ext cx="5577840" cy="2377440"/>
-          </a:xfrm>
-          <a:prstGeom prst="rect">
-            <a:avLst/>
-          </a:prstGeom>
-          <a:noFill/>
-        </p:spPr>
-        <p:txBody>
-          <a:bodyPr wrap="square" lIns="0" rIns="0" tIns="0" bIns="0">
-            <a:spAutoFit/>
-          </a:bodyPr>
-          <a:lstStyle/>
-          <a:p>
-            <a:pPr algn="l">
-              <a:lnSpc>
-                <a:spcPct val="115000"/>
-              </a:lnSpc>
-              <a:spcAft>
-                <a:spcPts val="400"/>
-              </a:spcAft>
-            </a:pPr>
-            <a:r>
-              <a:rPr sz="1300" b="1" i="0">
-                <a:solidFill>
-                  <a:srgbClr val="000000"/>
-                </a:solidFill>
-                <a:latin typeface="Arial"/>
-              </a:rPr>
-              <a:t>λ = 2.3 / MSD_adjacent</a:t>
-            </a:r>
-          </a:p>
-          <a:p>
-            <a:pPr algn="l">
-              <a:lnSpc>
-                <a:spcPct val="115000"/>
-              </a:lnSpc>
-              <a:spcAft>
-                <a:spcPts val="400"/>
-              </a:spcAft>
-            </a:pPr>
-            <a:r>
-              <a:rPr sz="600" b="0" i="0">
-                <a:solidFill>
-                  <a:srgbClr val="000000"/>
-                </a:solidFill>
-                <a:latin typeface="Arial"/>
-              </a:rPr>
-              <a:t/>
-            </a:r>
-          </a:p>
-          <a:p>
-            <a:pPr algn="l">
-              <a:lnSpc>
-                <a:spcPct val="115000"/>
-              </a:lnSpc>
-              <a:spcAft>
-                <a:spcPts val="400"/>
-              </a:spcAft>
-            </a:pPr>
-            <a:r>
-              <a:rPr sz="1200" b="0" i="1">
-                <a:solidFill>
-                  <a:srgbClr val="666666"/>
-                </a:solidFill>
-                <a:latin typeface="Arial"/>
-              </a:rPr>
-              <a:t>Our script:</a:t>
-            </a:r>
-          </a:p>
-          <a:p>
-            <a:pPr algn="l">
-              <a:lnSpc>
-                <a:spcPct val="115000"/>
-              </a:lnSpc>
-              <a:spcAft>
-                <a:spcPts val="400"/>
-              </a:spcAft>
-            </a:pPr>
-            <a:r>
-              <a:rPr sz="1200" b="0" i="0">
-                <a:solidFill>
-                  <a:srgbClr val="000000"/>
-                </a:solidFill>
-                <a:latin typeface="Arial"/>
-              </a:rPr>
-              <a:t>  MSD = Σ|Δr|² = 0.678 nm² (total sum)</a:t>
-            </a:r>
-          </a:p>
-          <a:p>
-            <a:pPr algn="l">
-              <a:lnSpc>
-                <a:spcPct val="115000"/>
-              </a:lnSpc>
-              <a:spcAft>
-                <a:spcPts val="400"/>
-              </a:spcAft>
-            </a:pPr>
-            <a:r>
-              <a:rPr sz="1200" b="1" i="0">
-                <a:solidFill>
-                  <a:srgbClr val="DC2626"/>
-                </a:solidFill>
-                <a:latin typeface="Arial"/>
-              </a:rPr>
-              <a:t>  → λ = 3.391 nm⁻²</a:t>
-            </a:r>
-          </a:p>
-          <a:p>
-            <a:pPr algn="l">
-              <a:lnSpc>
-                <a:spcPct val="115000"/>
-              </a:lnSpc>
-              <a:spcAft>
-                <a:spcPts val="400"/>
-              </a:spcAft>
-            </a:pPr>
-            <a:r>
-              <a:rPr sz="600" b="0" i="0">
-                <a:solidFill>
-                  <a:srgbClr val="000000"/>
-                </a:solidFill>
-                <a:latin typeface="Arial"/>
-              </a:rPr>
-              <a:t/>
-            </a:r>
-          </a:p>
-          <a:p>
-            <a:pPr algn="l">
-              <a:lnSpc>
-                <a:spcPct val="115000"/>
-              </a:lnSpc>
-              <a:spcAft>
-                <a:spcPts val="400"/>
-              </a:spcAft>
-            </a:pPr>
-            <a:r>
-              <a:rPr sz="1200" b="0" i="1">
-                <a:solidFill>
-                  <a:srgbClr val="666666"/>
-                </a:solidFill>
-                <a:latin typeface="Arial"/>
-              </a:rPr>
-              <a:t>PLUMED expects:</a:t>
-            </a:r>
-          </a:p>
-          <a:p>
-            <a:pPr algn="l">
-              <a:lnSpc>
-                <a:spcPct val="115000"/>
-              </a:lnSpc>
-              <a:spcAft>
-                <a:spcPts val="400"/>
-              </a:spcAft>
-            </a:pPr>
-            <a:r>
-              <a:rPr sz="1200" b="0" i="0">
-                <a:solidFill>
-                  <a:srgbClr val="000000"/>
-                </a:solidFill>
-                <a:latin typeface="Arial"/>
-              </a:rPr>
-              <a:t>  MSD = (1/N)Σ|Δr|² = 0.00606 nm² (per-atom mean)</a:t>
-            </a:r>
-          </a:p>
-          <a:p>
-            <a:pPr algn="l">
-              <a:lnSpc>
-                <a:spcPct val="115000"/>
-              </a:lnSpc>
-              <a:spcAft>
-                <a:spcPts val="400"/>
-              </a:spcAft>
-            </a:pPr>
-            <a:r>
-              <a:rPr sz="1200" b="1" i="0">
-                <a:solidFill>
-                  <a:srgbClr val="1A2744"/>
-                </a:solidFill>
-                <a:latin typeface="Arial"/>
-              </a:rPr>
-              <a:t>  → λ = 379.77 nm⁻²</a:t>
-            </a:r>
-          </a:p>
-          <a:p>
-            <a:pPr algn="l">
-              <a:lnSpc>
-                <a:spcPct val="115000"/>
-              </a:lnSpc>
-              <a:spcAft>
-                <a:spcPts val="400"/>
-              </a:spcAft>
-            </a:pPr>
-            <a:r>
-              <a:rPr sz="600" b="0" i="0">
-                <a:solidFill>
-                  <a:srgbClr val="000000"/>
-                </a:solidFill>
-                <a:latin typeface="Arial"/>
-              </a:rPr>
-              <a:t/>
-            </a:r>
-          </a:p>
-          <a:p>
-            <a:pPr algn="l">
-              <a:lnSpc>
-                <a:spcPct val="115000"/>
-              </a:lnSpc>
-              <a:spcAft>
-                <a:spcPts val="400"/>
-              </a:spcAft>
-            </a:pPr>
-            <a:r>
-              <a:rPr sz="1200" b="1" i="0">
-                <a:solidFill>
-                  <a:srgbClr val="000000"/>
-                </a:solidFill>
-                <a:latin typeface="Arial"/>
-              </a:rPr>
-              <a:t>Ratio: 379.77 / 3.391 = 112 = N_atoms</a:t>
-            </a:r>
-          </a:p>
-        </p:txBody>
-      </p:sp>
-      <p:sp>
-        <p:nvSpPr>
-          <p:cNvPr id="5" name="TextBox 4"/>
-          <p:cNvSpPr txBox="1"/>
-          <p:nvPr/>
-        </p:nvSpPr>
-        <p:spPr>
-          <a:xfrm>
-            <a:off x="6172200" y="1188720"/>
-            <a:ext cx="5577840" cy="320040"/>
-          </a:xfrm>
-          <a:prstGeom prst="rect">
-            <a:avLst/>
-          </a:prstGeom>
-          <a:noFill/>
-        </p:spPr>
-        <p:txBody>
-          <a:bodyPr wrap="square" lIns="0" rIns="0" tIns="0" bIns="0">
-            <a:spAutoFit/>
-          </a:bodyPr>
-          <a:lstStyle/>
-          <a:p>
-            <a:pPr algn="l"/>
-            <a:r>
-              <a:rPr sz="1400" b="1" i="0">
-                <a:solidFill>
-                  <a:srgbClr val="1A2744"/>
-                </a:solidFill>
-                <a:latin typeface="Arial"/>
-              </a:rPr>
-              <a:t>Effect on adjacent-frame kernel weight</a:t>
-            </a:r>
-          </a:p>
-        </p:txBody>
-      </p:sp>
-      <p:sp>
-        <p:nvSpPr>
-          <p:cNvPr id="6" name="TextBox 5"/>
-          <p:cNvSpPr txBox="1"/>
-          <p:nvPr/>
-        </p:nvSpPr>
-        <p:spPr>
-          <a:xfrm>
-            <a:off x="6172200" y="1508760"/>
-            <a:ext cx="5577840" cy="2377440"/>
-          </a:xfrm>
-          <a:prstGeom prst="rect">
-            <a:avLst/>
-          </a:prstGeom>
-          <a:noFill/>
-        </p:spPr>
-        <p:txBody>
-          <a:bodyPr wrap="square" lIns="0" rIns="0" tIns="0" bIns="0">
-            <a:spAutoFit/>
-          </a:bodyPr>
-          <a:lstStyle/>
-          <a:p>
-            <a:pPr algn="l">
-              <a:lnSpc>
-                <a:spcPct val="115000"/>
-              </a:lnSpc>
-              <a:spcAft>
-                <a:spcPts val="400"/>
-              </a:spcAft>
-            </a:pPr>
-            <a:r>
-              <a:rPr sz="1200" b="0" i="1">
-                <a:solidFill>
-                  <a:srgbClr val="666666"/>
-                </a:solidFill>
-                <a:latin typeface="Arial"/>
-              </a:rPr>
-              <a:t>Broken λ:</a:t>
-            </a:r>
-          </a:p>
-          <a:p>
-            <a:pPr algn="l">
-              <a:lnSpc>
-                <a:spcPct val="115000"/>
-              </a:lnSpc>
-              <a:spcAft>
-                <a:spcPts val="400"/>
-              </a:spcAft>
-            </a:pPr>
-            <a:r>
-              <a:rPr sz="1200" b="1" i="0">
-                <a:solidFill>
-                  <a:srgbClr val="DC2626"/>
-                </a:solidFill>
-                <a:latin typeface="Arial"/>
-              </a:rPr>
-              <a:t>  exp(−0.264) = 0.77</a:t>
-            </a:r>
-          </a:p>
-          <a:p>
-            <a:pPr algn="l">
-              <a:lnSpc>
-                <a:spcPct val="115000"/>
-              </a:lnSpc>
-              <a:spcAft>
-                <a:spcPts val="400"/>
-              </a:spcAft>
-            </a:pPr>
-            <a:r>
-              <a:rPr sz="1200" b="0" i="0">
-                <a:solidFill>
-                  <a:srgbClr val="DC2626"/>
-                </a:solidFill>
-                <a:latin typeface="Arial"/>
-              </a:rPr>
-              <a:t>  → frames indistinguishable</a:t>
-            </a:r>
-          </a:p>
-          <a:p>
-            <a:pPr algn="l">
-              <a:lnSpc>
-                <a:spcPct val="115000"/>
-              </a:lnSpc>
-              <a:spcAft>
-                <a:spcPts val="400"/>
-              </a:spcAft>
-            </a:pPr>
-            <a:r>
-              <a:rPr sz="600" b="0" i="0">
-                <a:solidFill>
-                  <a:srgbClr val="000000"/>
-                </a:solidFill>
-                <a:latin typeface="Arial"/>
-              </a:rPr>
-              <a:t/>
-            </a:r>
-          </a:p>
-          <a:p>
-            <a:pPr algn="l">
-              <a:lnSpc>
-                <a:spcPct val="115000"/>
-              </a:lnSpc>
-              <a:spcAft>
-                <a:spcPts val="400"/>
-              </a:spcAft>
-            </a:pPr>
-            <a:r>
-              <a:rPr sz="1200" b="0" i="1">
-                <a:solidFill>
-                  <a:srgbClr val="666666"/>
-                </a:solidFill>
-                <a:latin typeface="Arial"/>
-              </a:rPr>
-              <a:t>Correct λ:</a:t>
-            </a:r>
-          </a:p>
-          <a:p>
-            <a:pPr algn="l">
-              <a:lnSpc>
-                <a:spcPct val="115000"/>
-              </a:lnSpc>
-              <a:spcAft>
-                <a:spcPts val="400"/>
-              </a:spcAft>
-            </a:pPr>
-            <a:r>
-              <a:rPr sz="1200" b="1" i="0">
-                <a:solidFill>
-                  <a:srgbClr val="1A2744"/>
-                </a:solidFill>
-                <a:latin typeface="Arial"/>
-              </a:rPr>
-              <a:t>  exp(−2.3) = 0.10</a:t>
-            </a:r>
-          </a:p>
-          <a:p>
-            <a:pPr algn="l">
-              <a:lnSpc>
-                <a:spcPct val="115000"/>
-              </a:lnSpc>
-              <a:spcAft>
-                <a:spcPts val="400"/>
-              </a:spcAft>
-            </a:pPr>
-            <a:r>
-              <a:rPr sz="1200" b="0" i="0">
-                <a:solidFill>
-                  <a:srgbClr val="1A2744"/>
-                </a:solidFill>
-                <a:latin typeface="Arial"/>
-              </a:rPr>
-              <a:t>  → proper discrimination</a:t>
-            </a:r>
-          </a:p>
-        </p:txBody>
-      </p:sp>
-      <p:sp>
-        <p:nvSpPr>
-          <p:cNvPr id="7" name="Rectangle 6"/>
+          <p:cNvPr id="11" name="Rectangle 10"/>
           <p:cNvSpPr/>
           <p:nvPr/>
         </p:nvSpPr>
         <p:spPr>
           <a:xfrm>
-            <a:off x="457200" y="4206240"/>
-            <a:ext cx="11277295" cy="2057400"/>
+            <a:off x="109728" y="0"/>
+            <a:ext cx="12079224" cy="1005840"/>
           </a:xfrm>
           <a:prstGeom prst="rect">
             <a:avLst/>
           </a:prstGeom>
           <a:solidFill>
-            <a:srgbClr val="F0F0F0"/>
+            <a:srgbClr val="F4F6FB"/>
           </a:solidFill>
-          <a:ln w="6350">
-            <a:solidFill>
-              <a:srgbClr val="CCCCCC"/>
-            </a:solidFill>
+          <a:ln>
+            <a:noFill/>
           </a:ln>
         </p:spPr>
         <p:style>
@@ -5977,335 +6393,30 @@
         <p:txBody>
           <a:bodyPr rtlCol="0" anchor="ctr"/>
           <a:lstStyle/>
-          <a:p/>
-        </p:txBody>
-      </p:sp>
-      <p:sp>
-        <p:nvSpPr>
-          <p:cNvPr id="8" name="TextBox 7"/>
-          <p:cNvSpPr txBox="1"/>
-          <p:nvPr/>
-        </p:nvSpPr>
-        <p:spPr>
-          <a:xfrm>
-            <a:off x="566928" y="4315968"/>
-            <a:ext cx="11057839" cy="1837944"/>
-          </a:xfrm>
-          <a:prstGeom prst="rect">
-            <a:avLst/>
-          </a:prstGeom>
-          <a:noFill/>
-        </p:spPr>
-        <p:txBody>
-          <a:bodyPr wrap="square" lIns="0" rIns="0" tIns="0" bIns="0">
-            <a:spAutoFit/>
-          </a:bodyPr>
-          <a:lstStyle/>
-          <a:p>
-            <a:pPr algn="l">
-              <a:lnSpc>
-                <a:spcPct val="110000"/>
-              </a:lnSpc>
-              <a:spcAft>
-                <a:spcPts val="0"/>
-              </a:spcAft>
-            </a:pPr>
-            <a:r>
-              <a:rPr sz="1000" b="0" i="0">
-                <a:solidFill>
-                  <a:srgbClr val="1F1F1F"/>
-                </a:solidFill>
-                <a:latin typeface="Courier New"/>
-              </a:rPr>
-              <a:t># Bug (line 296 of generate_path_cv.py):</a:t>
-            </a:r>
-          </a:p>
-          <a:p>
-            <a:pPr algn="l">
-              <a:lnSpc>
-                <a:spcPct val="110000"/>
-              </a:lnSpc>
-              <a:spcAft>
-                <a:spcPts val="0"/>
-              </a:spcAft>
-            </a:pPr>
-            <a:r>
-              <a:rPr sz="1000" b="0" i="0">
-                <a:solidFill>
-                  <a:srgbClr val="1F1F1F"/>
-                </a:solidFill>
-                <a:latin typeface="Courier New"/>
-              </a:rPr>
-              <a:t>def calculate_msd(coords1, coords2):</a:t>
-            </a:r>
-          </a:p>
-          <a:p>
-            <a:pPr algn="l">
-              <a:lnSpc>
-                <a:spcPct val="110000"/>
-              </a:lnSpc>
-              <a:spcAft>
-                <a:spcPts val="0"/>
-              </a:spcAft>
-            </a:pPr>
-            <a:r>
-              <a:rPr sz="1000" b="0" i="0">
-                <a:solidFill>
-                  <a:srgbClr val="1F1F1F"/>
-                </a:solidFill>
-                <a:latin typeface="Courier New"/>
-              </a:rPr>
-              <a:t>    return np.sum(np.sum(diff**2, axis=1))  # sum, not mean!</a:t>
-            </a:r>
-          </a:p>
-          <a:p>
-            <a:pPr algn="l">
-              <a:lnSpc>
-                <a:spcPct val="110000"/>
-              </a:lnSpc>
-              <a:spcAft>
-                <a:spcPts val="0"/>
-              </a:spcAft>
-            </a:pPr>
-            <a:r>
-              <a:rPr sz="1000" b="0" i="0">
-                <a:solidFill>
-                  <a:srgbClr val="1F1F1F"/>
-                </a:solidFill>
-                <a:latin typeface="Courier New"/>
-              </a:rPr>
-              <a:t># Fix:</a:t>
-            </a:r>
-          </a:p>
-          <a:p>
-            <a:pPr algn="l">
-              <a:lnSpc>
-                <a:spcPct val="110000"/>
-              </a:lnSpc>
-              <a:spcAft>
-                <a:spcPts val="0"/>
-              </a:spcAft>
-            </a:pPr>
-            <a:r>
-              <a:rPr sz="1000" b="0" i="0">
-                <a:solidFill>
-                  <a:srgbClr val="1F1F1F"/>
-                </a:solidFill>
-                <a:latin typeface="Courier New"/>
-              </a:rPr>
-              <a:t>    return np.mean(np.sum(diff**2, axis=1))  # per-atom mean</a:t>
-            </a:r>
-          </a:p>
-        </p:txBody>
-      </p:sp>
-      <p:sp>
-        <p:nvSpPr>
-          <p:cNvPr id="9" name="TextBox 8"/>
-          <p:cNvSpPr txBox="1"/>
-          <p:nvPr/>
-        </p:nvSpPr>
-        <p:spPr>
-          <a:xfrm>
-            <a:off x="457200" y="6446520"/>
-            <a:ext cx="11277295" cy="320040"/>
-          </a:xfrm>
-          <a:prstGeom prst="rect">
-            <a:avLst/>
-          </a:prstGeom>
-          <a:noFill/>
-        </p:spPr>
-        <p:txBody>
-          <a:bodyPr wrap="square" lIns="0" rIns="0" tIns="0" bIns="0">
-            <a:spAutoFit/>
-          </a:bodyPr>
-          <a:lstStyle/>
-          <a:p>
-            <a:pPr algn="l"/>
-            <a:r>
-              <a:rPr sz="800" b="0" i="1">
-                <a:solidFill>
-                  <a:srgbClr val="666666"/>
-                </a:solidFill>
-                <a:latin typeface="Arial"/>
-              </a:rPr>
-              <a:t>PLUMED docs: “LAMBDA is generally calculated as 2.3/&lt;rmsd&gt;**2” — plumed.org/doc-v2.9  |  SI S3: “λ = 2.3 × inverse of MSD”</a:t>
-            </a:r>
-          </a:p>
-        </p:txBody>
-      </p:sp>
-    </p:spTree>
-  </p:cSld>
-  <p:clrMapOvr>
-    <a:masterClrMapping/>
-  </p:clrMapOvr>
-</p:sld>
-</file>
-
-<file path=ppt/slides/slide8.xml><?xml version="1.0" encoding="utf-8"?>
-<p:sld xmlns:a="http://schemas.openxmlformats.org/drawingml/2006/main" xmlns:p="http://schemas.openxmlformats.org/presentationml/2006/main" xmlns:r="http://schemas.openxmlformats.org/officeDocument/2006/relationships">
-  <p:cSld>
-    <p:spTree>
-      <p:nvGrpSpPr>
-        <p:cNvPr id="1" name=""/>
-        <p:cNvGrpSpPr/>
-        <p:nvPr/>
-      </p:nvGrpSpPr>
-      <p:grpSpPr/>
-      <p:sp>
-        <p:nvSpPr>
-          <p:cNvPr id="2" name="TextBox 1"/>
-          <p:cNvSpPr txBox="1"/>
-          <p:nvPr/>
-        </p:nvSpPr>
-        <p:spPr>
-          <a:xfrm>
-            <a:off x="457200" y="320040"/>
-            <a:ext cx="11277295" cy="777240"/>
-          </a:xfrm>
-          <a:prstGeom prst="rect">
-            <a:avLst/>
-          </a:prstGeom>
-          <a:noFill/>
-        </p:spPr>
-        <p:txBody>
-          <a:bodyPr wrap="square" lIns="0" rIns="0" tIns="0" bIns="0">
-            <a:spAutoFit/>
-          </a:bodyPr>
-          <a:lstStyle/>
-          <a:p>
-            <a:pPr algn="l"/>
-            <a:r>
-              <a:rPr sz="2400" b="1" i="0">
-                <a:solidFill>
-                  <a:srgbClr val="1A2744"/>
-                </a:solidFill>
-                <a:latin typeface="Arial"/>
-              </a:rPr>
-              <a:t>Re-analysis with fixed LAMBDA shows s≈1.05 throughout — the system never left O</a:t>
-            </a:r>
-          </a:p>
-        </p:txBody>
-      </p:sp>
-      <p:sp>
-        <p:nvSpPr>
-          <p:cNvPr id="3" name="TextBox 2"/>
-          <p:cNvSpPr txBox="1"/>
-          <p:nvPr/>
-        </p:nvSpPr>
-        <p:spPr>
-          <a:xfrm>
-            <a:off x="457200" y="1143000"/>
-            <a:ext cx="11277295" cy="2560320"/>
-          </a:xfrm>
-          <a:prstGeom prst="rect">
-            <a:avLst/>
-          </a:prstGeom>
-          <a:noFill/>
-        </p:spPr>
-        <p:txBody>
-          <a:bodyPr wrap="square" lIns="0" rIns="0" tIns="0" bIns="0">
-            <a:spAutoFit/>
-          </a:bodyPr>
-          <a:lstStyle/>
-          <a:p>
-            <a:pPr algn="l">
-              <a:lnSpc>
-                <a:spcPct val="125000"/>
-              </a:lnSpc>
-              <a:spcAft>
-                <a:spcPts val="600"/>
-              </a:spcAft>
-            </a:pPr>
-            <a:r>
-              <a:rPr sz="1500" b="0" i="0">
-                <a:solidFill>
-                  <a:srgbClr val="000000"/>
-                </a:solidFill>
-                <a:latin typeface="Arial"/>
-              </a:rPr>
-              <a:t>•  Ran plumed driver (offline, no new MD, 1.3 seconds) with SQUARED + LAMBDA=379.77</a:t>
-            </a:r>
-          </a:p>
-          <a:p>
-            <a:pPr algn="l">
-              <a:lnSpc>
-                <a:spcPct val="125000"/>
-              </a:lnSpc>
-              <a:spcAft>
-                <a:spcPts val="600"/>
-              </a:spcAft>
-            </a:pPr>
-            <a:r>
-              <a:rPr sz="1500" b="0" i="0">
-                <a:solidFill>
-                  <a:srgbClr val="000000"/>
-                </a:solidFill>
-                <a:latin typeface="Arial"/>
-              </a:rPr>
-              <a:t>•  PLUMED printed “Consistency check completed! Your path cvs look good!”</a:t>
-            </a:r>
-          </a:p>
-          <a:p>
-            <a:pPr algn="l">
-              <a:lnSpc>
-                <a:spcPct val="125000"/>
-              </a:lnSpc>
-              <a:spcAft>
-                <a:spcPts val="600"/>
-              </a:spcAft>
-            </a:pPr>
-            <a:r>
-              <a:rPr sz="1500" b="0" i="0">
-                <a:solidFill>
-                  <a:srgbClr val="000000"/>
-                </a:solidFill>
-                <a:latin typeface="Arial"/>
-              </a:rPr>
-              <a:t>•  New COLVAR: s = 1.04–1.06 for all 4631 frames (97.5% in O basin)</a:t>
-            </a:r>
-          </a:p>
-          <a:p>
-            <a:pPr algn="l">
-              <a:lnSpc>
-                <a:spcPct val="125000"/>
-              </a:lnSpc>
-              <a:spcAft>
-                <a:spcPts val="600"/>
-              </a:spcAft>
-            </a:pPr>
-            <a:r>
-              <a:rPr sz="1500" b="0" i="0">
-                <a:solidFill>
-                  <a:srgbClr val="000000"/>
-                </a:solidFill>
-                <a:latin typeface="Arial"/>
-              </a:rPr>
-              <a:t>•  The 46 ns of MetaD was effectively unbiased MD (CV gradient ≈ 0 → no physical force from bias)</a:t>
-            </a:r>
-          </a:p>
-        </p:txBody>
-      </p:sp>
-      <p:sp>
-        <p:nvSpPr>
-          <p:cNvPr id="4" name="Rectangle 3"/>
+          <a:p>
+            <a:pPr algn="ctr"/>
+          </a:p>
+        </p:txBody>
+      </p:sp>
+      <p:sp>
+        <p:nvSpPr>
+          <p:cNvPr id="10" name="Rectangle 9"/>
           <p:cNvSpPr/>
           <p:nvPr/>
         </p:nvSpPr>
         <p:spPr>
           <a:xfrm>
-            <a:off x="457200" y="4160520"/>
-            <a:ext cx="11277295" cy="2103120"/>
+            <a:off x="0" y="0"/>
+            <a:ext cx="109728" cy="6858000"/>
           </a:xfrm>
           <a:prstGeom prst="rect">
             <a:avLst/>
           </a:prstGeom>
           <a:solidFill>
-            <a:srgbClr val="F0F0F0"/>
+            <a:srgbClr val="2E5CA7"/>
           </a:solidFill>
-          <a:ln w="6350">
-            <a:solidFill>
-              <a:srgbClr val="CCCCCC"/>
-            </a:solidFill>
+          <a:ln>
+            <a:noFill/>
           </a:ln>
         </p:spPr>
         <p:style>
@@ -6325,7 +6436,311 @@
         <p:txBody>
           <a:bodyPr rtlCol="0" anchor="ctr"/>
           <a:lstStyle/>
-          <a:p/>
+          <a:p>
+            <a:pPr algn="ctr"/>
+          </a:p>
+        </p:txBody>
+      </p:sp>
+      <p:sp>
+        <p:nvSpPr>
+          <p:cNvPr id="2" name="TextBox 1"/>
+          <p:cNvSpPr txBox="1"/>
+          <p:nvPr/>
+        </p:nvSpPr>
+        <p:spPr>
+          <a:xfrm>
+            <a:off x="457200" y="320040"/>
+            <a:ext cx="11277295" cy="777240"/>
+          </a:xfrm>
+          <a:prstGeom prst="rect">
+            <a:avLst/>
+          </a:prstGeom>
+          <a:noFill/>
+        </p:spPr>
+        <p:txBody>
+          <a:bodyPr wrap="square" lIns="0" rIns="0" tIns="0" bIns="0">
+            <a:spAutoFit/>
+          </a:bodyPr>
+          <a:lstStyle/>
+          <a:p>
+            <a:pPr algn="l"/>
+            <a:r>
+              <a:rPr sz="2400" b="1" i="0">
+                <a:solidFill>
+                  <a:srgbClr val="1A2744"/>
+                </a:solidFill>
+                <a:latin typeface="Arial"/>
+              </a:rPr>
+              <a:t>generate_path_cv.py used np.sum (total SD) but PLUMED RMSD outputs np.mean (per-atom)</a:t>
+            </a:r>
+          </a:p>
+        </p:txBody>
+      </p:sp>
+      <p:sp>
+        <p:nvSpPr>
+          <p:cNvPr id="3" name="TextBox 2"/>
+          <p:cNvSpPr txBox="1"/>
+          <p:nvPr/>
+        </p:nvSpPr>
+        <p:spPr>
+          <a:xfrm>
+            <a:off x="457200" y="1188720"/>
+            <a:ext cx="5577840" cy="320040"/>
+          </a:xfrm>
+          <a:prstGeom prst="rect">
+            <a:avLst/>
+          </a:prstGeom>
+          <a:noFill/>
+        </p:spPr>
+        <p:txBody>
+          <a:bodyPr wrap="square" lIns="0" rIns="0" tIns="0" bIns="0">
+            <a:spAutoFit/>
+          </a:bodyPr>
+          <a:lstStyle/>
+          <a:p>
+            <a:pPr algn="l"/>
+            <a:r>
+              <a:rPr sz="1400" b="1" i="0">
+                <a:solidFill>
+                  <a:srgbClr val="1A2744"/>
+                </a:solidFill>
+                <a:latin typeface="Arial"/>
+              </a:rPr>
+              <a:t>Formula</a:t>
+            </a:r>
+          </a:p>
+        </p:txBody>
+      </p:sp>
+      <p:sp>
+        <p:nvSpPr>
+          <p:cNvPr id="4" name="TextBox 3"/>
+          <p:cNvSpPr txBox="1"/>
+          <p:nvPr/>
+        </p:nvSpPr>
+        <p:spPr>
+          <a:xfrm>
+            <a:off x="457200" y="1508760"/>
+            <a:ext cx="5577840" cy="2377440"/>
+          </a:xfrm>
+          <a:prstGeom prst="rect">
+            <a:avLst/>
+          </a:prstGeom>
+          <a:noFill/>
+        </p:spPr>
+        <p:txBody>
+          <a:bodyPr wrap="square" lIns="0" rIns="0" tIns="0" bIns="0">
+            <a:spAutoFit/>
+          </a:bodyPr>
+          <a:lstStyle/>
+          <a:p>
+            <a:pPr algn="l">
+              <a:lnSpc>
+                <a:spcPct val="115000"/>
+              </a:lnSpc>
+              <a:spcAft>
+                <a:spcPts val="400"/>
+              </a:spcAft>
+            </a:pPr>
+            <a:r>
+              <a:rPr sz="1300" b="1" i="0">
+                <a:solidFill>
+                  <a:srgbClr val="000000"/>
+                </a:solidFill>
+                <a:latin typeface="Arial"/>
+              </a:rPr>
+              <a:t>λ = 2.3 / MSD_adjacent</a:t>
+            </a:r>
+          </a:p>
+          <a:p>
+            <a:pPr algn="l">
+              <a:lnSpc>
+                <a:spcPct val="115000"/>
+              </a:lnSpc>
+              <a:spcAft>
+                <a:spcPts val="400"/>
+              </a:spcAft>
+            </a:pPr>
+            <a:r>
+              <a:rPr sz="600" b="0" i="0">
+                <a:solidFill>
+                  <a:srgbClr val="000000"/>
+                </a:solidFill>
+                <a:latin typeface="Arial"/>
+              </a:rPr>
+              <a:t/>
+            </a:r>
+          </a:p>
+          <a:p>
+            <a:pPr algn="l">
+              <a:lnSpc>
+                <a:spcPct val="115000"/>
+              </a:lnSpc>
+              <a:spcAft>
+                <a:spcPts val="400"/>
+              </a:spcAft>
+            </a:pPr>
+            <a:r>
+              <a:rPr sz="1200" b="0" i="1">
+                <a:solidFill>
+                  <a:srgbClr val="666666"/>
+                </a:solidFill>
+                <a:latin typeface="Arial"/>
+              </a:rPr>
+              <a:t>Our script:</a:t>
+            </a:r>
+          </a:p>
+          <a:p>
+            <a:pPr algn="l">
+              <a:lnSpc>
+                <a:spcPct val="115000"/>
+              </a:lnSpc>
+              <a:spcAft>
+                <a:spcPts val="400"/>
+              </a:spcAft>
+            </a:pPr>
+            <a:r>
+              <a:rPr sz="1200" b="0" i="0">
+                <a:solidFill>
+                  <a:srgbClr val="000000"/>
+                </a:solidFill>
+                <a:latin typeface="Arial"/>
+              </a:rPr>
+              <a:t>  MSD = Σ|Δr|² = 0.678 nm² (total sum)</a:t>
+            </a:r>
+          </a:p>
+          <a:p>
+            <a:pPr algn="l">
+              <a:lnSpc>
+                <a:spcPct val="115000"/>
+              </a:lnSpc>
+              <a:spcAft>
+                <a:spcPts val="400"/>
+              </a:spcAft>
+            </a:pPr>
+            <a:r>
+              <a:rPr sz="1200" b="1" i="0">
+                <a:solidFill>
+                  <a:srgbClr val="DC2626"/>
+                </a:solidFill>
+                <a:latin typeface="Arial"/>
+              </a:rPr>
+              <a:t>  → λ = 3.391 nm⁻²</a:t>
+            </a:r>
+          </a:p>
+          <a:p>
+            <a:pPr algn="l">
+              <a:lnSpc>
+                <a:spcPct val="115000"/>
+              </a:lnSpc>
+              <a:spcAft>
+                <a:spcPts val="400"/>
+              </a:spcAft>
+            </a:pPr>
+            <a:r>
+              <a:rPr sz="600" b="0" i="0">
+                <a:solidFill>
+                  <a:srgbClr val="000000"/>
+                </a:solidFill>
+                <a:latin typeface="Arial"/>
+              </a:rPr>
+              <a:t/>
+            </a:r>
+          </a:p>
+          <a:p>
+            <a:pPr algn="l">
+              <a:lnSpc>
+                <a:spcPct val="115000"/>
+              </a:lnSpc>
+              <a:spcAft>
+                <a:spcPts val="400"/>
+              </a:spcAft>
+            </a:pPr>
+            <a:r>
+              <a:rPr sz="1200" b="0" i="1">
+                <a:solidFill>
+                  <a:srgbClr val="666666"/>
+                </a:solidFill>
+                <a:latin typeface="Arial"/>
+              </a:rPr>
+              <a:t>PLUMED expects:</a:t>
+            </a:r>
+          </a:p>
+          <a:p>
+            <a:pPr algn="l">
+              <a:lnSpc>
+                <a:spcPct val="115000"/>
+              </a:lnSpc>
+              <a:spcAft>
+                <a:spcPts val="400"/>
+              </a:spcAft>
+            </a:pPr>
+            <a:r>
+              <a:rPr sz="1200" b="0" i="0">
+                <a:solidFill>
+                  <a:srgbClr val="000000"/>
+                </a:solidFill>
+                <a:latin typeface="Arial"/>
+              </a:rPr>
+              <a:t>  MSD = (1/N)Σ|Δr|² = 0.00606 nm² (per-atom mean)</a:t>
+            </a:r>
+          </a:p>
+          <a:p>
+            <a:pPr algn="l">
+              <a:lnSpc>
+                <a:spcPct val="115000"/>
+              </a:lnSpc>
+              <a:spcAft>
+                <a:spcPts val="400"/>
+              </a:spcAft>
+            </a:pPr>
+            <a:r>
+              <a:rPr sz="1200" b="1" i="0">
+                <a:solidFill>
+                  <a:srgbClr val="1A2744"/>
+                </a:solidFill>
+                <a:latin typeface="Arial"/>
+              </a:rPr>
+              <a:t>  → λ = 379.77 nm⁻²</a:t>
+            </a:r>
+          </a:p>
+          <a:p>
+            <a:pPr algn="l">
+              <a:lnSpc>
+                <a:spcPct val="115000"/>
+              </a:lnSpc>
+              <a:spcAft>
+                <a:spcPts val="400"/>
+              </a:spcAft>
+            </a:pPr>
+            <a:r>
+              <a:rPr sz="600" b="0" i="0">
+                <a:solidFill>
+                  <a:srgbClr val="000000"/>
+                </a:solidFill>
+                <a:latin typeface="Arial"/>
+              </a:rPr>
+              <a:t/>
+            </a:r>
+          </a:p>
+          <a:p>
+            <a:pPr algn="l">
+              <a:lnSpc>
+                <a:spcPct val="115000"/>
+              </a:lnSpc>
+              <a:spcAft>
+                <a:spcPts val="400"/>
+              </a:spcAft>
+            </a:pPr>
+            <a:r>
+              <a:rPr sz="1200" b="1" i="0">
+                <a:solidFill>
+                  <a:srgbClr val="000000"/>
+                </a:solidFill>
+                <a:latin typeface="Arial"/>
+              </a:rPr>
+              <a:t>Ratio: 379.77 / 3.391 = 112 = N_atoms</a:t>
+            </a:r>
+          </a:p>
         </p:txBody>
       </p:sp>
       <p:sp>
@@ -6336,8 +6751,242 @@
         </p:nvSpPr>
         <p:spPr>
           <a:xfrm>
-            <a:off x="566928" y="4270248"/>
-            <a:ext cx="11057839" cy="1883664"/>
+            <a:off x="6172200" y="1188720"/>
+            <a:ext cx="5577840" cy="320040"/>
+          </a:xfrm>
+          <a:prstGeom prst="rect">
+            <a:avLst/>
+          </a:prstGeom>
+          <a:noFill/>
+        </p:spPr>
+        <p:txBody>
+          <a:bodyPr wrap="square" lIns="0" rIns="0" tIns="0" bIns="0">
+            <a:spAutoFit/>
+          </a:bodyPr>
+          <a:lstStyle/>
+          <a:p>
+            <a:pPr algn="l"/>
+            <a:r>
+              <a:rPr sz="1400" b="1" i="0">
+                <a:solidFill>
+                  <a:srgbClr val="1A2744"/>
+                </a:solidFill>
+                <a:latin typeface="Arial"/>
+              </a:rPr>
+              <a:t>Effect on adjacent-frame kernel weight</a:t>
+            </a:r>
+          </a:p>
+        </p:txBody>
+      </p:sp>
+      <p:sp>
+        <p:nvSpPr>
+          <p:cNvPr id="6" name="TextBox 5"/>
+          <p:cNvSpPr txBox="1"/>
+          <p:nvPr/>
+        </p:nvSpPr>
+        <p:spPr>
+          <a:xfrm>
+            <a:off x="6172200" y="1508760"/>
+            <a:ext cx="5577840" cy="2377440"/>
+          </a:xfrm>
+          <a:prstGeom prst="rect">
+            <a:avLst/>
+          </a:prstGeom>
+          <a:noFill/>
+        </p:spPr>
+        <p:txBody>
+          <a:bodyPr wrap="square" lIns="0" rIns="0" tIns="0" bIns="0">
+            <a:spAutoFit/>
+          </a:bodyPr>
+          <a:lstStyle/>
+          <a:p>
+            <a:pPr algn="l">
+              <a:lnSpc>
+                <a:spcPct val="115000"/>
+              </a:lnSpc>
+              <a:spcAft>
+                <a:spcPts val="400"/>
+              </a:spcAft>
+            </a:pPr>
+            <a:r>
+              <a:rPr sz="1200" b="0" i="1">
+                <a:solidFill>
+                  <a:srgbClr val="666666"/>
+                </a:solidFill>
+                <a:latin typeface="Arial"/>
+              </a:rPr>
+              <a:t>Broken λ:</a:t>
+            </a:r>
+          </a:p>
+          <a:p>
+            <a:pPr algn="l">
+              <a:lnSpc>
+                <a:spcPct val="115000"/>
+              </a:lnSpc>
+              <a:spcAft>
+                <a:spcPts val="400"/>
+              </a:spcAft>
+            </a:pPr>
+            <a:r>
+              <a:rPr sz="1200" b="1" i="0">
+                <a:solidFill>
+                  <a:srgbClr val="DC2626"/>
+                </a:solidFill>
+                <a:latin typeface="Arial"/>
+              </a:rPr>
+              <a:t>  exp(−0.264) = 0.77</a:t>
+            </a:r>
+          </a:p>
+          <a:p>
+            <a:pPr algn="l">
+              <a:lnSpc>
+                <a:spcPct val="115000"/>
+              </a:lnSpc>
+              <a:spcAft>
+                <a:spcPts val="400"/>
+              </a:spcAft>
+            </a:pPr>
+            <a:r>
+              <a:rPr sz="1200" b="0" i="0">
+                <a:solidFill>
+                  <a:srgbClr val="DC2626"/>
+                </a:solidFill>
+                <a:latin typeface="Arial"/>
+              </a:rPr>
+              <a:t>  → frames indistinguishable</a:t>
+            </a:r>
+          </a:p>
+          <a:p>
+            <a:pPr algn="l">
+              <a:lnSpc>
+                <a:spcPct val="115000"/>
+              </a:lnSpc>
+              <a:spcAft>
+                <a:spcPts val="400"/>
+              </a:spcAft>
+            </a:pPr>
+            <a:r>
+              <a:rPr sz="600" b="0" i="0">
+                <a:solidFill>
+                  <a:srgbClr val="000000"/>
+                </a:solidFill>
+                <a:latin typeface="Arial"/>
+              </a:rPr>
+              <a:t/>
+            </a:r>
+          </a:p>
+          <a:p>
+            <a:pPr algn="l">
+              <a:lnSpc>
+                <a:spcPct val="115000"/>
+              </a:lnSpc>
+              <a:spcAft>
+                <a:spcPts val="400"/>
+              </a:spcAft>
+            </a:pPr>
+            <a:r>
+              <a:rPr sz="1200" b="0" i="1">
+                <a:solidFill>
+                  <a:srgbClr val="666666"/>
+                </a:solidFill>
+                <a:latin typeface="Arial"/>
+              </a:rPr>
+              <a:t>Correct λ:</a:t>
+            </a:r>
+          </a:p>
+          <a:p>
+            <a:pPr algn="l">
+              <a:lnSpc>
+                <a:spcPct val="115000"/>
+              </a:lnSpc>
+              <a:spcAft>
+                <a:spcPts val="400"/>
+              </a:spcAft>
+            </a:pPr>
+            <a:r>
+              <a:rPr sz="1200" b="1" i="0">
+                <a:solidFill>
+                  <a:srgbClr val="1A2744"/>
+                </a:solidFill>
+                <a:latin typeface="Arial"/>
+              </a:rPr>
+              <a:t>  exp(−2.3) = 0.10</a:t>
+            </a:r>
+          </a:p>
+          <a:p>
+            <a:pPr algn="l">
+              <a:lnSpc>
+                <a:spcPct val="115000"/>
+              </a:lnSpc>
+              <a:spcAft>
+                <a:spcPts val="400"/>
+              </a:spcAft>
+            </a:pPr>
+            <a:r>
+              <a:rPr sz="1200" b="0" i="0">
+                <a:solidFill>
+                  <a:srgbClr val="1A2744"/>
+                </a:solidFill>
+                <a:latin typeface="Arial"/>
+              </a:rPr>
+              <a:t>  → proper discrimination</a:t>
+            </a:r>
+          </a:p>
+        </p:txBody>
+      </p:sp>
+      <p:sp>
+        <p:nvSpPr>
+          <p:cNvPr id="7" name="Rectangle 6"/>
+          <p:cNvSpPr/>
+          <p:nvPr/>
+        </p:nvSpPr>
+        <p:spPr>
+          <a:xfrm>
+            <a:off x="457200" y="4206240"/>
+            <a:ext cx="11277295" cy="2057400"/>
+          </a:xfrm>
+          <a:prstGeom prst="rect">
+            <a:avLst/>
+          </a:prstGeom>
+          <a:solidFill>
+            <a:srgbClr val="F0F0F0"/>
+          </a:solidFill>
+          <a:ln w="6350">
+            <a:solidFill>
+              <a:srgbClr val="CCCCCC"/>
+            </a:solidFill>
+          </a:ln>
+        </p:spPr>
+        <p:style>
+          <a:lnRef idx="1">
+            <a:schemeClr val="accent1"/>
+          </a:lnRef>
+          <a:fillRef idx="3">
+            <a:schemeClr val="accent1"/>
+          </a:fillRef>
+          <a:effectRef idx="2">
+            <a:schemeClr val="accent1"/>
+          </a:effectRef>
+          <a:fontRef idx="minor">
+            <a:schemeClr val="lt1"/>
+          </a:fontRef>
+        </p:style>
+        <p:txBody>
+          <a:bodyPr rtlCol="0" anchor="ctr"/>
+          <a:lstStyle/>
+          <a:p/>
+        </p:txBody>
+      </p:sp>
+      <p:sp>
+        <p:nvSpPr>
+          <p:cNvPr id="8" name="TextBox 7"/>
+          <p:cNvSpPr txBox="1"/>
+          <p:nvPr/>
+        </p:nvSpPr>
+        <p:spPr>
+          <a:xfrm>
+            <a:off x="566928" y="4315968"/>
+            <a:ext cx="11057839" cy="1837944"/>
           </a:xfrm>
           <a:prstGeom prst="rect">
             <a:avLst/>
@@ -6365,7 +7014,7 @@
                 </a:solidFill>
                 <a:latin typeface="Courier New"/>
               </a:rPr>
-              <a:t>plumed driver --plumed plumed_fixed.dat --mf_xtc metad.xtc \</a:t>
+              <a:t># Bug (line 296 of generate_path_cv.py):</a:t>
             </a:r>
           </a:p>
           <a:p>
@@ -6384,7 +7033,7 @@
                 </a:solidFill>
                 <a:latin typeface="Courier New"/>
               </a:rPr>
-              <a:t>  --timestep 0.002 --trajectory-stride 5000</a:t>
+              <a:t>def calculate_msd(coords1, coords2):</a:t>
             </a:r>
           </a:p>
           <a:p>
@@ -6403,7 +7052,7 @@
                 </a:solidFill>
                 <a:latin typeface="Courier New"/>
               </a:rPr>
-              <a:t># Output: "lambda is 379.770000"</a:t>
+              <a:t>    return np.sum(np.sum(diff**2, axis=1))  # sum, not mean!</a:t>
             </a:r>
           </a:p>
           <a:p>
@@ -6422,14 +7071,33 @@
                 </a:solidFill>
                 <a:latin typeface="Courier New"/>
               </a:rPr>
-              <a:t># Output: "Consistency check completed! Your path cvs look good!" </a:t>
-            </a:r>
-          </a:p>
-        </p:txBody>
-      </p:sp>
-      <p:sp>
-        <p:nvSpPr>
-          <p:cNvPr id="6" name="TextBox 5"/>
+              <a:t># Fix:</a:t>
+            </a:r>
+          </a:p>
+          <a:p>
+            <a:pPr algn="l">
+              <a:lnSpc>
+                <a:spcPct val="110000"/>
+              </a:lnSpc>
+              <a:spcAft>
+                <a:spcPts val="0"/>
+              </a:spcAft>
+            </a:pPr>
+            <a:r>
+              <a:rPr sz="1000" b="0" i="0">
+                <a:solidFill>
+                  <a:srgbClr val="1F1F1F"/>
+                </a:solidFill>
+                <a:latin typeface="Courier New"/>
+              </a:rPr>
+              <a:t>    return np.mean(np.sum(diff**2, axis=1))  # per-atom mean</a:t>
+            </a:r>
+          </a:p>
+        </p:txBody>
+      </p:sp>
+      <p:sp>
+        <p:nvSpPr>
+          <p:cNvPr id="9" name="TextBox 8"/>
           <p:cNvSpPr txBox="1"/>
           <p:nvPr/>
         </p:nvSpPr>
@@ -6457,7 +7125,500 @@
                 </a:solidFill>
                 <a:latin typeface="Arial"/>
               </a:rPr>
+              <a:t>PLUMED docs: “LAMBDA is generally calculated as 2.3/&lt;rmsd&gt;**2” — plumed.org/doc-v2.9  |  SI S3: “λ = 2.3 × inverse of MSD”</a:t>
+            </a:r>
+          </a:p>
+        </p:txBody>
+      </p:sp>
+      <p:sp>
+        <p:nvSpPr>
+          <p:cNvPr id="12" name="TextBox 11"/>
+          <p:cNvSpPr txBox="1"/>
+          <p:nvPr/>
+        </p:nvSpPr>
+        <p:spPr>
+          <a:xfrm>
+            <a:off x="10058400" y="6400800"/>
+            <a:ext cx="2011680" cy="365760"/>
+          </a:xfrm>
+          <a:prstGeom prst="rect">
+            <a:avLst/>
+          </a:prstGeom>
+          <a:noFill/>
+        </p:spPr>
+        <p:txBody>
+          <a:bodyPr wrap="none" lIns="0" rIns="0">
+            <a:spAutoFit/>
+          </a:bodyPr>
+          <a:lstStyle/>
+          <a:p>
+            <a:pPr algn="r"/>
+            <a:r>
+              <a:rPr sz="800" b="0" i="0">
+                <a:solidFill>
+                  <a:srgbClr val="6B7280"/>
+                </a:solidFill>
+                <a:latin typeface="Arial"/>
+              </a:rPr>
+              <a:t>TrpB MetaD Benchmark  ·  7 / 10</a:t>
+            </a:r>
+          </a:p>
+        </p:txBody>
+      </p:sp>
+    </p:spTree>
+  </p:cSld>
+  <p:clrMapOvr>
+    <a:masterClrMapping/>
+  </p:clrMapOvr>
+</p:sld>
+</file>
+
+<file path=ppt/slides/slide8.xml><?xml version="1.0" encoding="utf-8"?>
+<p:sld xmlns:a="http://schemas.openxmlformats.org/drawingml/2006/main" xmlns:p="http://schemas.openxmlformats.org/presentationml/2006/main" xmlns:r="http://schemas.openxmlformats.org/officeDocument/2006/relationships">
+  <p:cSld>
+    <p:bg>
+      <p:bgPr>
+        <a:solidFill>
+          <a:srgbClr val="FDFDFD"/>
+        </a:solidFill>
+        <a:effectLst/>
+      </p:bgPr>
+    </p:bg>
+    <p:spTree>
+      <p:nvGrpSpPr>
+        <p:cNvPr id="1" name=""/>
+        <p:cNvGrpSpPr/>
+        <p:nvPr/>
+      </p:nvGrpSpPr>
+      <p:grpSpPr/>
+      <p:sp>
+        <p:nvSpPr>
+          <p:cNvPr id="8" name="Rectangle 7"/>
+          <p:cNvSpPr/>
+          <p:nvPr/>
+        </p:nvSpPr>
+        <p:spPr>
+          <a:xfrm>
+            <a:off x="109728" y="0"/>
+            <a:ext cx="12079224" cy="1005840"/>
+          </a:xfrm>
+          <a:prstGeom prst="rect">
+            <a:avLst/>
+          </a:prstGeom>
+          <a:solidFill>
+            <a:srgbClr val="F4F6FB"/>
+          </a:solidFill>
+          <a:ln>
+            <a:noFill/>
+          </a:ln>
+        </p:spPr>
+        <p:style>
+          <a:lnRef idx="1">
+            <a:schemeClr val="accent1"/>
+          </a:lnRef>
+          <a:fillRef idx="3">
+            <a:schemeClr val="accent1"/>
+          </a:fillRef>
+          <a:effectRef idx="2">
+            <a:schemeClr val="accent1"/>
+          </a:effectRef>
+          <a:fontRef idx="minor">
+            <a:schemeClr val="lt1"/>
+          </a:fontRef>
+        </p:style>
+        <p:txBody>
+          <a:bodyPr rtlCol="0" anchor="ctr"/>
+          <a:lstStyle/>
+          <a:p>
+            <a:pPr algn="ctr"/>
+          </a:p>
+        </p:txBody>
+      </p:sp>
+      <p:sp>
+        <p:nvSpPr>
+          <p:cNvPr id="7" name="Rectangle 6"/>
+          <p:cNvSpPr/>
+          <p:nvPr/>
+        </p:nvSpPr>
+        <p:spPr>
+          <a:xfrm>
+            <a:off x="0" y="0"/>
+            <a:ext cx="109728" cy="6858000"/>
+          </a:xfrm>
+          <a:prstGeom prst="rect">
+            <a:avLst/>
+          </a:prstGeom>
+          <a:solidFill>
+            <a:srgbClr val="2E5CA7"/>
+          </a:solidFill>
+          <a:ln>
+            <a:noFill/>
+          </a:ln>
+        </p:spPr>
+        <p:style>
+          <a:lnRef idx="1">
+            <a:schemeClr val="accent1"/>
+          </a:lnRef>
+          <a:fillRef idx="3">
+            <a:schemeClr val="accent1"/>
+          </a:fillRef>
+          <a:effectRef idx="2">
+            <a:schemeClr val="accent1"/>
+          </a:effectRef>
+          <a:fontRef idx="minor">
+            <a:schemeClr val="lt1"/>
+          </a:fontRef>
+        </p:style>
+        <p:txBody>
+          <a:bodyPr rtlCol="0" anchor="ctr"/>
+          <a:lstStyle/>
+          <a:p>
+            <a:pPr algn="ctr"/>
+          </a:p>
+        </p:txBody>
+      </p:sp>
+      <p:sp>
+        <p:nvSpPr>
+          <p:cNvPr id="2" name="TextBox 1"/>
+          <p:cNvSpPr txBox="1"/>
+          <p:nvPr/>
+        </p:nvSpPr>
+        <p:spPr>
+          <a:xfrm>
+            <a:off x="457200" y="320040"/>
+            <a:ext cx="11277295" cy="777240"/>
+          </a:xfrm>
+          <a:prstGeom prst="rect">
+            <a:avLst/>
+          </a:prstGeom>
+          <a:noFill/>
+        </p:spPr>
+        <p:txBody>
+          <a:bodyPr wrap="square" lIns="0" rIns="0" tIns="0" bIns="0">
+            <a:spAutoFit/>
+          </a:bodyPr>
+          <a:lstStyle/>
+          <a:p>
+            <a:pPr algn="l"/>
+            <a:r>
+              <a:rPr sz="2400" b="1" i="0">
+                <a:solidFill>
+                  <a:srgbClr val="1A2744"/>
+                </a:solidFill>
+                <a:latin typeface="Arial"/>
+              </a:rPr>
+              <a:t>Re-analysis with fixed LAMBDA shows s≈1.05 throughout — the system never left O</a:t>
+            </a:r>
+          </a:p>
+        </p:txBody>
+      </p:sp>
+      <p:sp>
+        <p:nvSpPr>
+          <p:cNvPr id="3" name="TextBox 2"/>
+          <p:cNvSpPr txBox="1"/>
+          <p:nvPr/>
+        </p:nvSpPr>
+        <p:spPr>
+          <a:xfrm>
+            <a:off x="457200" y="1143000"/>
+            <a:ext cx="11277295" cy="2560320"/>
+          </a:xfrm>
+          <a:prstGeom prst="rect">
+            <a:avLst/>
+          </a:prstGeom>
+          <a:noFill/>
+        </p:spPr>
+        <p:txBody>
+          <a:bodyPr wrap="square" lIns="0" rIns="0" tIns="0" bIns="0">
+            <a:spAutoFit/>
+          </a:bodyPr>
+          <a:lstStyle/>
+          <a:p>
+            <a:pPr algn="l">
+              <a:lnSpc>
+                <a:spcPct val="125000"/>
+              </a:lnSpc>
+              <a:spcAft>
+                <a:spcPts val="600"/>
+              </a:spcAft>
+            </a:pPr>
+            <a:r>
+              <a:rPr sz="1500" b="0" i="0">
+                <a:solidFill>
+                  <a:srgbClr val="000000"/>
+                </a:solidFill>
+                <a:latin typeface="Arial"/>
+              </a:rPr>
+              <a:t>•  Ran plumed driver (offline, no new MD, 1.3 seconds) with SQUARED + LAMBDA=379.77</a:t>
+            </a:r>
+          </a:p>
+          <a:p>
+            <a:pPr algn="l">
+              <a:lnSpc>
+                <a:spcPct val="125000"/>
+              </a:lnSpc>
+              <a:spcAft>
+                <a:spcPts val="600"/>
+              </a:spcAft>
+            </a:pPr>
+            <a:r>
+              <a:rPr sz="1500" b="0" i="0">
+                <a:solidFill>
+                  <a:srgbClr val="000000"/>
+                </a:solidFill>
+                <a:latin typeface="Arial"/>
+              </a:rPr>
+              <a:t>•  PLUMED printed “Consistency check completed! Your path cvs look good!”</a:t>
+            </a:r>
+          </a:p>
+          <a:p>
+            <a:pPr algn="l">
+              <a:lnSpc>
+                <a:spcPct val="125000"/>
+              </a:lnSpc>
+              <a:spcAft>
+                <a:spcPts val="600"/>
+              </a:spcAft>
+            </a:pPr>
+            <a:r>
+              <a:rPr sz="1500" b="0" i="0">
+                <a:solidFill>
+                  <a:srgbClr val="000000"/>
+                </a:solidFill>
+                <a:latin typeface="Arial"/>
+              </a:rPr>
+              <a:t>•  New COLVAR: s = 1.04–1.06 for all 4631 frames (97.5% in O basin)</a:t>
+            </a:r>
+          </a:p>
+          <a:p>
+            <a:pPr algn="l">
+              <a:lnSpc>
+                <a:spcPct val="125000"/>
+              </a:lnSpc>
+              <a:spcAft>
+                <a:spcPts val="600"/>
+              </a:spcAft>
+            </a:pPr>
+            <a:r>
+              <a:rPr sz="1500" b="0" i="0">
+                <a:solidFill>
+                  <a:srgbClr val="000000"/>
+                </a:solidFill>
+                <a:latin typeface="Arial"/>
+              </a:rPr>
+              <a:t>•  The 46 ns of MetaD was effectively unbiased MD (CV gradient ≈ 0 → no physical force from bias)</a:t>
+            </a:r>
+          </a:p>
+        </p:txBody>
+      </p:sp>
+      <p:sp>
+        <p:nvSpPr>
+          <p:cNvPr id="4" name="Rectangle 3"/>
+          <p:cNvSpPr/>
+          <p:nvPr/>
+        </p:nvSpPr>
+        <p:spPr>
+          <a:xfrm>
+            <a:off x="457200" y="4160520"/>
+            <a:ext cx="11277295" cy="2103120"/>
+          </a:xfrm>
+          <a:prstGeom prst="rect">
+            <a:avLst/>
+          </a:prstGeom>
+          <a:solidFill>
+            <a:srgbClr val="F0F0F0"/>
+          </a:solidFill>
+          <a:ln w="6350">
+            <a:solidFill>
+              <a:srgbClr val="CCCCCC"/>
+            </a:solidFill>
+          </a:ln>
+        </p:spPr>
+        <p:style>
+          <a:lnRef idx="1">
+            <a:schemeClr val="accent1"/>
+          </a:lnRef>
+          <a:fillRef idx="3">
+            <a:schemeClr val="accent1"/>
+          </a:fillRef>
+          <a:effectRef idx="2">
+            <a:schemeClr val="accent1"/>
+          </a:effectRef>
+          <a:fontRef idx="minor">
+            <a:schemeClr val="lt1"/>
+          </a:fontRef>
+        </p:style>
+        <p:txBody>
+          <a:bodyPr rtlCol="0" anchor="ctr"/>
+          <a:lstStyle/>
+          <a:p/>
+        </p:txBody>
+      </p:sp>
+      <p:sp>
+        <p:nvSpPr>
+          <p:cNvPr id="5" name="TextBox 4"/>
+          <p:cNvSpPr txBox="1"/>
+          <p:nvPr/>
+        </p:nvSpPr>
+        <p:spPr>
+          <a:xfrm>
+            <a:off x="566928" y="4270248"/>
+            <a:ext cx="11057839" cy="1883664"/>
+          </a:xfrm>
+          <a:prstGeom prst="rect">
+            <a:avLst/>
+          </a:prstGeom>
+          <a:noFill/>
+        </p:spPr>
+        <p:txBody>
+          <a:bodyPr wrap="square" lIns="0" rIns="0" tIns="0" bIns="0">
+            <a:spAutoFit/>
+          </a:bodyPr>
+          <a:lstStyle/>
+          <a:p>
+            <a:pPr algn="l">
+              <a:lnSpc>
+                <a:spcPct val="110000"/>
+              </a:lnSpc>
+              <a:spcAft>
+                <a:spcPts val="0"/>
+              </a:spcAft>
+            </a:pPr>
+            <a:r>
+              <a:rPr sz="1000" b="0" i="0">
+                <a:solidFill>
+                  <a:srgbClr val="1F1F1F"/>
+                </a:solidFill>
+                <a:latin typeface="Courier New"/>
+              </a:rPr>
+              <a:t>plumed driver --plumed plumed_fixed.dat --mf_xtc metad.xtc \</a:t>
+            </a:r>
+          </a:p>
+          <a:p>
+            <a:pPr algn="l">
+              <a:lnSpc>
+                <a:spcPct val="110000"/>
+              </a:lnSpc>
+              <a:spcAft>
+                <a:spcPts val="0"/>
+              </a:spcAft>
+            </a:pPr>
+            <a:r>
+              <a:rPr sz="1000" b="0" i="0">
+                <a:solidFill>
+                  <a:srgbClr val="1F1F1F"/>
+                </a:solidFill>
+                <a:latin typeface="Courier New"/>
+              </a:rPr>
+              <a:t>  --timestep 0.002 --trajectory-stride 5000</a:t>
+            </a:r>
+          </a:p>
+          <a:p>
+            <a:pPr algn="l">
+              <a:lnSpc>
+                <a:spcPct val="110000"/>
+              </a:lnSpc>
+              <a:spcAft>
+                <a:spcPts val="0"/>
+              </a:spcAft>
+            </a:pPr>
+            <a:r>
+              <a:rPr sz="1000" b="0" i="0">
+                <a:solidFill>
+                  <a:srgbClr val="1F1F1F"/>
+                </a:solidFill>
+                <a:latin typeface="Courier New"/>
+              </a:rPr>
+              <a:t># Output: "lambda is 379.770000"</a:t>
+            </a:r>
+          </a:p>
+          <a:p>
+            <a:pPr algn="l">
+              <a:lnSpc>
+                <a:spcPct val="110000"/>
+              </a:lnSpc>
+              <a:spcAft>
+                <a:spcPts val="0"/>
+              </a:spcAft>
+            </a:pPr>
+            <a:r>
+              <a:rPr sz="1000" b="0" i="0">
+                <a:solidFill>
+                  <a:srgbClr val="1F1F1F"/>
+                </a:solidFill>
+                <a:latin typeface="Courier New"/>
+              </a:rPr>
+              <a:t># Output: "Consistency check completed! Your path cvs look good!" </a:t>
+            </a:r>
+          </a:p>
+        </p:txBody>
+      </p:sp>
+      <p:sp>
+        <p:nvSpPr>
+          <p:cNvPr id="6" name="TextBox 5"/>
+          <p:cNvSpPr txBox="1"/>
+          <p:nvPr/>
+        </p:nvSpPr>
+        <p:spPr>
+          <a:xfrm>
+            <a:off x="457200" y="6446520"/>
+            <a:ext cx="11277295" cy="320040"/>
+          </a:xfrm>
+          <a:prstGeom prst="rect">
+            <a:avLst/>
+          </a:prstGeom>
+          <a:noFill/>
+        </p:spPr>
+        <p:txBody>
+          <a:bodyPr wrap="square" lIns="0" rIns="0" tIns="0" bIns="0">
+            <a:spAutoFit/>
+          </a:bodyPr>
+          <a:lstStyle/>
+          <a:p>
+            <a:pPr algn="l"/>
+            <a:r>
+              <a:rPr sz="800" b="0" i="1">
+                <a:solidFill>
+                  <a:srgbClr val="666666"/>
+                </a:solidFill>
+                <a:latin typeface="Arial"/>
+              </a:rPr>
               <a:t>rerun/COLVAR_rerun_fixed  |  plumed driver on Longleaf single_walker/</a:t>
+            </a:r>
+          </a:p>
+        </p:txBody>
+      </p:sp>
+      <p:sp>
+        <p:nvSpPr>
+          <p:cNvPr id="9" name="TextBox 8"/>
+          <p:cNvSpPr txBox="1"/>
+          <p:nvPr/>
+        </p:nvSpPr>
+        <p:spPr>
+          <a:xfrm>
+            <a:off x="10058400" y="6400800"/>
+            <a:ext cx="2011680" cy="365760"/>
+          </a:xfrm>
+          <a:prstGeom prst="rect">
+            <a:avLst/>
+          </a:prstGeom>
+          <a:noFill/>
+        </p:spPr>
+        <p:txBody>
+          <a:bodyPr wrap="none" lIns="0" rIns="0">
+            <a:spAutoFit/>
+          </a:bodyPr>
+          <a:lstStyle/>
+          <a:p>
+            <a:pPr algn="r"/>
+            <a:r>
+              <a:rPr sz="800" b="0" i="0">
+                <a:solidFill>
+                  <a:srgbClr val="6B7280"/>
+                </a:solidFill>
+                <a:latin typeface="Arial"/>
+              </a:rPr>
+              <a:t>TrpB MetaD Benchmark  ·  8 / 10</a:t>
             </a:r>
           </a:p>
         </p:txBody>
@@ -6473,6 +7634,14 @@
 <file path=ppt/slides/slide9.xml><?xml version="1.0" encoding="utf-8"?>
 <p:sld xmlns:a="http://schemas.openxmlformats.org/drawingml/2006/main" xmlns:p="http://schemas.openxmlformats.org/presentationml/2006/main" xmlns:r="http://schemas.openxmlformats.org/officeDocument/2006/relationships">
   <p:cSld>
+    <p:bg>
+      <p:bgPr>
+        <a:solidFill>
+          <a:srgbClr val="FDFDFD"/>
+        </a:solidFill>
+        <a:effectLst/>
+      </p:bgPr>
+    </p:bg>
     <p:spTree>
       <p:nvGrpSpPr>
         <p:cNvPr id="1" name=""/>
@@ -6480,6 +7649,92 @@
         <p:nvPr/>
       </p:nvGrpSpPr>
       <p:grpSpPr/>
+      <p:sp>
+        <p:nvSpPr>
+          <p:cNvPr id="7" name="Rectangle 6"/>
+          <p:cNvSpPr/>
+          <p:nvPr/>
+        </p:nvSpPr>
+        <p:spPr>
+          <a:xfrm>
+            <a:off x="109728" y="0"/>
+            <a:ext cx="12079224" cy="1005840"/>
+          </a:xfrm>
+          <a:prstGeom prst="rect">
+            <a:avLst/>
+          </a:prstGeom>
+          <a:solidFill>
+            <a:srgbClr val="F4F6FB"/>
+          </a:solidFill>
+          <a:ln>
+            <a:noFill/>
+          </a:ln>
+        </p:spPr>
+        <p:style>
+          <a:lnRef idx="1">
+            <a:schemeClr val="accent1"/>
+          </a:lnRef>
+          <a:fillRef idx="3">
+            <a:schemeClr val="accent1"/>
+          </a:fillRef>
+          <a:effectRef idx="2">
+            <a:schemeClr val="accent1"/>
+          </a:effectRef>
+          <a:fontRef idx="minor">
+            <a:schemeClr val="lt1"/>
+          </a:fontRef>
+        </p:style>
+        <p:txBody>
+          <a:bodyPr rtlCol="0" anchor="ctr"/>
+          <a:lstStyle/>
+          <a:p>
+            <a:pPr algn="ctr"/>
+          </a:p>
+        </p:txBody>
+      </p:sp>
+      <p:sp>
+        <p:nvSpPr>
+          <p:cNvPr id="6" name="Rectangle 5"/>
+          <p:cNvSpPr/>
+          <p:nvPr/>
+        </p:nvSpPr>
+        <p:spPr>
+          <a:xfrm>
+            <a:off x="0" y="0"/>
+            <a:ext cx="109728" cy="6858000"/>
+          </a:xfrm>
+          <a:prstGeom prst="rect">
+            <a:avLst/>
+          </a:prstGeom>
+          <a:solidFill>
+            <a:srgbClr val="2E5CA7"/>
+          </a:solidFill>
+          <a:ln>
+            <a:noFill/>
+          </a:ln>
+        </p:spPr>
+        <p:style>
+          <a:lnRef idx="1">
+            <a:schemeClr val="accent1"/>
+          </a:lnRef>
+          <a:fillRef idx="3">
+            <a:schemeClr val="accent1"/>
+          </a:fillRef>
+          <a:effectRef idx="2">
+            <a:schemeClr val="accent1"/>
+          </a:effectRef>
+          <a:fontRef idx="minor">
+            <a:schemeClr val="lt1"/>
+          </a:fontRef>
+        </p:style>
+        <p:txBody>
+          <a:bodyPr rtlCol="0" anchor="ctr"/>
+          <a:lstStyle/>
+          <a:p>
+            <a:pPr algn="ctr"/>
+          </a:p>
+        </p:txBody>
+      </p:sp>
       <p:sp>
         <p:nvSpPr>
           <p:cNvPr id="2" name="TextBox 1"/>
@@ -7102,6 +8357,41 @@
           </a:p>
         </p:txBody>
       </p:sp>
+      <p:sp>
+        <p:nvSpPr>
+          <p:cNvPr id="8" name="TextBox 7"/>
+          <p:cNvSpPr txBox="1"/>
+          <p:nvPr/>
+        </p:nvSpPr>
+        <p:spPr>
+          <a:xfrm>
+            <a:off x="10058400" y="6400800"/>
+            <a:ext cx="2011680" cy="365760"/>
+          </a:xfrm>
+          <a:prstGeom prst="rect">
+            <a:avLst/>
+          </a:prstGeom>
+          <a:noFill/>
+        </p:spPr>
+        <p:txBody>
+          <a:bodyPr wrap="none" lIns="0" rIns="0">
+            <a:spAutoFit/>
+          </a:bodyPr>
+          <a:lstStyle/>
+          <a:p>
+            <a:pPr algn="r"/>
+            <a:r>
+              <a:rPr sz="800" b="0" i="0">
+                <a:solidFill>
+                  <a:srgbClr val="6B7280"/>
+                </a:solidFill>
+                <a:latin typeface="Arial"/>
+              </a:rPr>
+              <a:t>TrpB MetaD Benchmark  ·  9 / 10</a:t>
+            </a:r>
+          </a:p>
+        </p:txBody>
+      </p:sp>
     </p:spTree>
   </p:cSld>
   <p:clrMapOvr>

--- a/reports/GroupMeeting_2026-04-09.pptx
+++ b/reports/GroupMeeting_2026-04-09.pptx
@@ -1,22 +1,22 @@
 
 <file path=ppt/presentation.xml><?xml version="1.0" encoding="utf-8"?>
-<p:presentation xmlns:a="http://schemas.openxmlformats.org/drawingml/2006/main" xmlns:r="http://schemas.openxmlformats.org/officeDocument/2006/relationships" xmlns:p="http://schemas.openxmlformats.org/presentationml/2006/main" saveSubsetFonts="1" autoCompressPictures="0">
+<p:presentation xmlns:a="http://schemas.openxmlformats.org/drawingml/2006/main" xmlns:r="http://schemas.openxmlformats.org/officeDocument/2006/relationships" xmlns:p="http://schemas.openxmlformats.org/presentationml/2006/main" autoCompressPictures="0">
   <p:sldMasterIdLst>
     <p:sldMasterId id="2147483648" r:id="rId1"/>
   </p:sldMasterIdLst>
   <p:sldIdLst>
-    <p:sldId id="256" r:id="rId7"/>
-    <p:sldId id="257" r:id="rId8"/>
-    <p:sldId id="258" r:id="rId9"/>
-    <p:sldId id="259" r:id="rId10"/>
-    <p:sldId id="260" r:id="rId11"/>
-    <p:sldId id="261" r:id="rId12"/>
-    <p:sldId id="262" r:id="rId13"/>
-    <p:sldId id="263" r:id="rId14"/>
-    <p:sldId id="264" r:id="rId15"/>
-    <p:sldId id="265" r:id="rId16"/>
+    <p:sldId id="256" r:id="rId3"/>
+    <p:sldId id="257" r:id="rId4"/>
+    <p:sldId id="258" r:id="rId5"/>
+    <p:sldId id="259" r:id="rId6"/>
+    <p:sldId id="260" r:id="rId7"/>
+    <p:sldId id="261" r:id="rId8"/>
+    <p:sldId id="262" r:id="rId9"/>
+    <p:sldId id="263" r:id="rId10"/>
+    <p:sldId id="264" r:id="rId11"/>
+    <p:sldId id="265" r:id="rId12"/>
   </p:sldIdLst>
-  <p:sldSz cx="12191695" cy="6858000" type="screen4x3"/>
+  <p:sldSz cx="12191365" cy="6858000" type="screen4x3"/>
   <p:notesSz cx="6858000" cy="9144000"/>
   <p:defaultTextStyle>
     <a:defPPr>
@@ -113,6 +113,22 @@
       </a:defRPr>
     </a:lvl9pPr>
   </p:defaultTextStyle>
+  <p:extLst>
+    <p:ext uri="{EFAFB233-063F-42B5-8137-9DF3F51BA10A}">
+      <p15:sldGuideLst xmlns:p15="http://schemas.microsoft.com/office/powerpoint/2012/main">
+        <p15:guide id="1" orient="horz" pos="2160" userDrawn="1">
+          <p15:clr>
+            <a:srgbClr val="A4A3A4"/>
+          </p15:clr>
+        </p15:guide>
+        <p15:guide id="2" pos="2880" userDrawn="1">
+          <p15:clr>
+            <a:srgbClr val="A4A3A4"/>
+          </p15:clr>
+        </p15:guide>
+      </p15:sldGuideLst>
+    </p:ext>
+  </p:extLst>
 </p:presentation>
 </file>
 
@@ -297,7 +313,6 @@
           <a:p>
             <a:fld id="{5BCAD085-E8A6-8845-BD4E-CB4CCA059FC4}" type="datetimeFigureOut">
               <a:rPr lang="en-US" smtClean="0"/>
-              <a:t>1/27/13</a:t>
             </a:fld>
             <a:endParaRPr lang="en-US"/>
           </a:p>
@@ -339,18 +354,12 @@
           <a:p>
             <a:fld id="{C1FF6DA9-008F-8B48-92A6-B652298478BF}" type="slidenum">
               <a:rPr lang="en-US" smtClean="0"/>
-              <a:t>‹#›</a:t>
             </a:fld>
             <a:endParaRPr lang="en-US"/>
           </a:p>
         </p:txBody>
       </p:sp>
     </p:spTree>
-    <p:extLst>
-      <p:ext uri="{BB962C8B-B14F-4D97-AF65-F5344CB8AC3E}">
-        <p14:creationId xmlns:p14="http://schemas.microsoft.com/office/powerpoint/2010/main" val="3168075583"/>
-      </p:ext>
-    </p:extLst>
   </p:cSld>
   <p:clrMapOvr>
     <a:masterClrMapping/>
@@ -418,6 +427,7 @@
               <a:rPr lang="en-US" smtClean="0"/>
               <a:t>Click to edit Master text styles</a:t>
             </a:r>
+            <a:endParaRPr lang="en-US" smtClean="0"/>
           </a:p>
           <a:p>
             <a:pPr lvl="1"/>
@@ -425,6 +435,7 @@
               <a:rPr lang="en-US" smtClean="0"/>
               <a:t>Second level</a:t>
             </a:r>
+            <a:endParaRPr lang="en-US" smtClean="0"/>
           </a:p>
           <a:p>
             <a:pPr lvl="2"/>
@@ -432,6 +443,7 @@
               <a:rPr lang="en-US" smtClean="0"/>
               <a:t>Third level</a:t>
             </a:r>
+            <a:endParaRPr lang="en-US" smtClean="0"/>
           </a:p>
           <a:p>
             <a:pPr lvl="3"/>
@@ -439,6 +451,7 @@
               <a:rPr lang="en-US" smtClean="0"/>
               <a:t>Fourth level</a:t>
             </a:r>
+            <a:endParaRPr lang="en-US" smtClean="0"/>
           </a:p>
           <a:p>
             <a:pPr lvl="4"/>
@@ -467,7 +480,6 @@
           <a:p>
             <a:fld id="{5BCAD085-E8A6-8845-BD4E-CB4CCA059FC4}" type="datetimeFigureOut">
               <a:rPr lang="en-US" smtClean="0"/>
-              <a:t>1/27/13</a:t>
             </a:fld>
             <a:endParaRPr lang="en-US"/>
           </a:p>
@@ -509,18 +521,12 @@
           <a:p>
             <a:fld id="{C1FF6DA9-008F-8B48-92A6-B652298478BF}" type="slidenum">
               <a:rPr lang="en-US" smtClean="0"/>
-              <a:t>‹#›</a:t>
             </a:fld>
             <a:endParaRPr lang="en-US"/>
           </a:p>
         </p:txBody>
       </p:sp>
     </p:spTree>
-    <p:extLst>
-      <p:ext uri="{BB962C8B-B14F-4D97-AF65-F5344CB8AC3E}">
-        <p14:creationId xmlns:p14="http://schemas.microsoft.com/office/powerpoint/2010/main" val="2910927964"/>
-      </p:ext>
-    </p:extLst>
   </p:cSld>
   <p:clrMapOvr>
     <a:masterClrMapping/>
@@ -598,6 +604,7 @@
               <a:rPr lang="en-US" smtClean="0"/>
               <a:t>Click to edit Master text styles</a:t>
             </a:r>
+            <a:endParaRPr lang="en-US" smtClean="0"/>
           </a:p>
           <a:p>
             <a:pPr lvl="1"/>
@@ -605,6 +612,7 @@
               <a:rPr lang="en-US" smtClean="0"/>
               <a:t>Second level</a:t>
             </a:r>
+            <a:endParaRPr lang="en-US" smtClean="0"/>
           </a:p>
           <a:p>
             <a:pPr lvl="2"/>
@@ -612,6 +620,7 @@
               <a:rPr lang="en-US" smtClean="0"/>
               <a:t>Third level</a:t>
             </a:r>
+            <a:endParaRPr lang="en-US" smtClean="0"/>
           </a:p>
           <a:p>
             <a:pPr lvl="3"/>
@@ -619,6 +628,7 @@
               <a:rPr lang="en-US" smtClean="0"/>
               <a:t>Fourth level</a:t>
             </a:r>
+            <a:endParaRPr lang="en-US" smtClean="0"/>
           </a:p>
           <a:p>
             <a:pPr lvl="4"/>
@@ -647,7 +657,6 @@
           <a:p>
             <a:fld id="{5BCAD085-E8A6-8845-BD4E-CB4CCA059FC4}" type="datetimeFigureOut">
               <a:rPr lang="en-US" smtClean="0"/>
-              <a:t>1/27/13</a:t>
             </a:fld>
             <a:endParaRPr lang="en-US"/>
           </a:p>
@@ -689,18 +698,12 @@
           <a:p>
             <a:fld id="{C1FF6DA9-008F-8B48-92A6-B652298478BF}" type="slidenum">
               <a:rPr lang="en-US" smtClean="0"/>
-              <a:t>‹#›</a:t>
             </a:fld>
             <a:endParaRPr lang="en-US"/>
           </a:p>
         </p:txBody>
       </p:sp>
     </p:spTree>
-    <p:extLst>
-      <p:ext uri="{BB962C8B-B14F-4D97-AF65-F5344CB8AC3E}">
-        <p14:creationId xmlns:p14="http://schemas.microsoft.com/office/powerpoint/2010/main" val="3612223792"/>
-      </p:ext>
-    </p:extLst>
   </p:cSld>
   <p:clrMapOvr>
     <a:masterClrMapping/>
@@ -768,6 +771,7 @@
               <a:rPr lang="en-US" smtClean="0"/>
               <a:t>Click to edit Master text styles</a:t>
             </a:r>
+            <a:endParaRPr lang="en-US" smtClean="0"/>
           </a:p>
           <a:p>
             <a:pPr lvl="1"/>
@@ -775,6 +779,7 @@
               <a:rPr lang="en-US" smtClean="0"/>
               <a:t>Second level</a:t>
             </a:r>
+            <a:endParaRPr lang="en-US" smtClean="0"/>
           </a:p>
           <a:p>
             <a:pPr lvl="2"/>
@@ -782,6 +787,7 @@
               <a:rPr lang="en-US" smtClean="0"/>
               <a:t>Third level</a:t>
             </a:r>
+            <a:endParaRPr lang="en-US" smtClean="0"/>
           </a:p>
           <a:p>
             <a:pPr lvl="3"/>
@@ -789,6 +795,7 @@
               <a:rPr lang="en-US" smtClean="0"/>
               <a:t>Fourth level</a:t>
             </a:r>
+            <a:endParaRPr lang="en-US" smtClean="0"/>
           </a:p>
           <a:p>
             <a:pPr lvl="4"/>
@@ -817,7 +824,6 @@
           <a:p>
             <a:fld id="{5BCAD085-E8A6-8845-BD4E-CB4CCA059FC4}" type="datetimeFigureOut">
               <a:rPr lang="en-US" smtClean="0"/>
-              <a:t>1/27/13</a:t>
             </a:fld>
             <a:endParaRPr lang="en-US"/>
           </a:p>
@@ -859,18 +865,12 @@
           <a:p>
             <a:fld id="{C1FF6DA9-008F-8B48-92A6-B652298478BF}" type="slidenum">
               <a:rPr lang="en-US" smtClean="0"/>
-              <a:t>‹#›</a:t>
             </a:fld>
             <a:endParaRPr lang="en-US"/>
           </a:p>
         </p:txBody>
       </p:sp>
     </p:spTree>
-    <p:extLst>
-      <p:ext uri="{BB962C8B-B14F-4D97-AF65-F5344CB8AC3E}">
-        <p14:creationId xmlns:p14="http://schemas.microsoft.com/office/powerpoint/2010/main" val="2614314258"/>
-      </p:ext>
-    </p:extLst>
   </p:cSld>
   <p:clrMapOvr>
     <a:masterClrMapping/>
@@ -1043,6 +1043,7 @@
               <a:rPr lang="en-US" smtClean="0"/>
               <a:t>Click to edit Master text styles</a:t>
             </a:r>
+            <a:endParaRPr lang="en-US" smtClean="0"/>
           </a:p>
         </p:txBody>
       </p:sp>
@@ -1063,7 +1064,6 @@
           <a:p>
             <a:fld id="{5BCAD085-E8A6-8845-BD4E-CB4CCA059FC4}" type="datetimeFigureOut">
               <a:rPr lang="en-US" smtClean="0"/>
-              <a:t>1/27/13</a:t>
             </a:fld>
             <a:endParaRPr lang="en-US"/>
           </a:p>
@@ -1105,18 +1105,12 @@
           <a:p>
             <a:fld id="{C1FF6DA9-008F-8B48-92A6-B652298478BF}" type="slidenum">
               <a:rPr lang="en-US" smtClean="0"/>
-              <a:t>‹#›</a:t>
             </a:fld>
             <a:endParaRPr lang="en-US"/>
           </a:p>
         </p:txBody>
       </p:sp>
     </p:spTree>
-    <p:extLst>
-      <p:ext uri="{BB962C8B-B14F-4D97-AF65-F5344CB8AC3E}">
-        <p14:creationId xmlns:p14="http://schemas.microsoft.com/office/powerpoint/2010/main" val="960648375"/>
-      </p:ext>
-    </p:extLst>
   </p:cSld>
   <p:clrMapOvr>
     <a:masterClrMapping/>
@@ -1217,6 +1211,7 @@
               <a:rPr lang="en-US" smtClean="0"/>
               <a:t>Click to edit Master text styles</a:t>
             </a:r>
+            <a:endParaRPr lang="en-US" smtClean="0"/>
           </a:p>
           <a:p>
             <a:pPr lvl="1"/>
@@ -1224,6 +1219,7 @@
               <a:rPr lang="en-US" smtClean="0"/>
               <a:t>Second level</a:t>
             </a:r>
+            <a:endParaRPr lang="en-US" smtClean="0"/>
           </a:p>
           <a:p>
             <a:pPr lvl="2"/>
@@ -1231,6 +1227,7 @@
               <a:rPr lang="en-US" smtClean="0"/>
               <a:t>Third level</a:t>
             </a:r>
+            <a:endParaRPr lang="en-US" smtClean="0"/>
           </a:p>
           <a:p>
             <a:pPr lvl="3"/>
@@ -1238,6 +1235,7 @@
               <a:rPr lang="en-US" smtClean="0"/>
               <a:t>Fourth level</a:t>
             </a:r>
+            <a:endParaRPr lang="en-US" smtClean="0"/>
           </a:p>
           <a:p>
             <a:pPr lvl="4"/>
@@ -1302,6 +1300,7 @@
               <a:rPr lang="en-US" smtClean="0"/>
               <a:t>Click to edit Master text styles</a:t>
             </a:r>
+            <a:endParaRPr lang="en-US" smtClean="0"/>
           </a:p>
           <a:p>
             <a:pPr lvl="1"/>
@@ -1309,6 +1308,7 @@
               <a:rPr lang="en-US" smtClean="0"/>
               <a:t>Second level</a:t>
             </a:r>
+            <a:endParaRPr lang="en-US" smtClean="0"/>
           </a:p>
           <a:p>
             <a:pPr lvl="2"/>
@@ -1316,6 +1316,7 @@
               <a:rPr lang="en-US" smtClean="0"/>
               <a:t>Third level</a:t>
             </a:r>
+            <a:endParaRPr lang="en-US" smtClean="0"/>
           </a:p>
           <a:p>
             <a:pPr lvl="3"/>
@@ -1323,6 +1324,7 @@
               <a:rPr lang="en-US" smtClean="0"/>
               <a:t>Fourth level</a:t>
             </a:r>
+            <a:endParaRPr lang="en-US" smtClean="0"/>
           </a:p>
           <a:p>
             <a:pPr lvl="4"/>
@@ -1351,7 +1353,6 @@
           <a:p>
             <a:fld id="{5BCAD085-E8A6-8845-BD4E-CB4CCA059FC4}" type="datetimeFigureOut">
               <a:rPr lang="en-US" smtClean="0"/>
-              <a:t>1/27/13</a:t>
             </a:fld>
             <a:endParaRPr lang="en-US"/>
           </a:p>
@@ -1393,18 +1394,12 @@
           <a:p>
             <a:fld id="{C1FF6DA9-008F-8B48-92A6-B652298478BF}" type="slidenum">
               <a:rPr lang="en-US" smtClean="0"/>
-              <a:t>‹#›</a:t>
             </a:fld>
             <a:endParaRPr lang="en-US"/>
           </a:p>
         </p:txBody>
       </p:sp>
     </p:spTree>
-    <p:extLst>
-      <p:ext uri="{BB962C8B-B14F-4D97-AF65-F5344CB8AC3E}">
-        <p14:creationId xmlns:p14="http://schemas.microsoft.com/office/powerpoint/2010/main" val="2782244947"/>
-      </p:ext>
-    </p:extLst>
   </p:cSld>
   <p:clrMapOvr>
     <a:masterClrMapping/>
@@ -1518,6 +1513,7 @@
               <a:rPr lang="en-US" smtClean="0"/>
               <a:t>Click to edit Master text styles</a:t>
             </a:r>
+            <a:endParaRPr lang="en-US" smtClean="0"/>
           </a:p>
         </p:txBody>
       </p:sp>
@@ -1574,6 +1570,7 @@
               <a:rPr lang="en-US" smtClean="0"/>
               <a:t>Click to edit Master text styles</a:t>
             </a:r>
+            <a:endParaRPr lang="en-US" smtClean="0"/>
           </a:p>
           <a:p>
             <a:pPr lvl="1"/>
@@ -1581,6 +1578,7 @@
               <a:rPr lang="en-US" smtClean="0"/>
               <a:t>Second level</a:t>
             </a:r>
+            <a:endParaRPr lang="en-US" smtClean="0"/>
           </a:p>
           <a:p>
             <a:pPr lvl="2"/>
@@ -1588,6 +1586,7 @@
               <a:rPr lang="en-US" smtClean="0"/>
               <a:t>Third level</a:t>
             </a:r>
+            <a:endParaRPr lang="en-US" smtClean="0"/>
           </a:p>
           <a:p>
             <a:pPr lvl="3"/>
@@ -1595,6 +1594,7 @@
               <a:rPr lang="en-US" smtClean="0"/>
               <a:t>Fourth level</a:t>
             </a:r>
+            <a:endParaRPr lang="en-US" smtClean="0"/>
           </a:p>
           <a:p>
             <a:pPr lvl="4"/>
@@ -1668,6 +1668,7 @@
               <a:rPr lang="en-US" smtClean="0"/>
               <a:t>Click to edit Master text styles</a:t>
             </a:r>
+            <a:endParaRPr lang="en-US" smtClean="0"/>
           </a:p>
         </p:txBody>
       </p:sp>
@@ -1724,6 +1725,7 @@
               <a:rPr lang="en-US" smtClean="0"/>
               <a:t>Click to edit Master text styles</a:t>
             </a:r>
+            <a:endParaRPr lang="en-US" smtClean="0"/>
           </a:p>
           <a:p>
             <a:pPr lvl="1"/>
@@ -1731,6 +1733,7 @@
               <a:rPr lang="en-US" smtClean="0"/>
               <a:t>Second level</a:t>
             </a:r>
+            <a:endParaRPr lang="en-US" smtClean="0"/>
           </a:p>
           <a:p>
             <a:pPr lvl="2"/>
@@ -1738,6 +1741,7 @@
               <a:rPr lang="en-US" smtClean="0"/>
               <a:t>Third level</a:t>
             </a:r>
+            <a:endParaRPr lang="en-US" smtClean="0"/>
           </a:p>
           <a:p>
             <a:pPr lvl="3"/>
@@ -1745,6 +1749,7 @@
               <a:rPr lang="en-US" smtClean="0"/>
               <a:t>Fourth level</a:t>
             </a:r>
+            <a:endParaRPr lang="en-US" smtClean="0"/>
           </a:p>
           <a:p>
             <a:pPr lvl="4"/>
@@ -1773,7 +1778,6 @@
           <a:p>
             <a:fld id="{5BCAD085-E8A6-8845-BD4E-CB4CCA059FC4}" type="datetimeFigureOut">
               <a:rPr lang="en-US" smtClean="0"/>
-              <a:t>1/27/13</a:t>
             </a:fld>
             <a:endParaRPr lang="en-US"/>
           </a:p>
@@ -1815,18 +1819,12 @@
           <a:p>
             <a:fld id="{C1FF6DA9-008F-8B48-92A6-B652298478BF}" type="slidenum">
               <a:rPr lang="en-US" smtClean="0"/>
-              <a:t>‹#›</a:t>
             </a:fld>
             <a:endParaRPr lang="en-US"/>
           </a:p>
         </p:txBody>
       </p:sp>
     </p:spTree>
-    <p:extLst>
-      <p:ext uri="{BB962C8B-B14F-4D97-AF65-F5344CB8AC3E}">
-        <p14:creationId xmlns:p14="http://schemas.microsoft.com/office/powerpoint/2010/main" val="990158736"/>
-      </p:ext>
-    </p:extLst>
   </p:cSld>
   <p:clrMapOvr>
     <a:masterClrMapping/>
@@ -1891,7 +1889,6 @@
           <a:p>
             <a:fld id="{5BCAD085-E8A6-8845-BD4E-CB4CCA059FC4}" type="datetimeFigureOut">
               <a:rPr lang="en-US" smtClean="0"/>
-              <a:t>1/27/13</a:t>
             </a:fld>
             <a:endParaRPr lang="en-US"/>
           </a:p>
@@ -1933,18 +1930,12 @@
           <a:p>
             <a:fld id="{C1FF6DA9-008F-8B48-92A6-B652298478BF}" type="slidenum">
               <a:rPr lang="en-US" smtClean="0"/>
-              <a:t>‹#›</a:t>
             </a:fld>
             <a:endParaRPr lang="en-US"/>
           </a:p>
         </p:txBody>
       </p:sp>
     </p:spTree>
-    <p:extLst>
-      <p:ext uri="{BB962C8B-B14F-4D97-AF65-F5344CB8AC3E}">
-        <p14:creationId xmlns:p14="http://schemas.microsoft.com/office/powerpoint/2010/main" val="727027711"/>
-      </p:ext>
-    </p:extLst>
   </p:cSld>
   <p:clrMapOvr>
     <a:masterClrMapping/>
@@ -1986,7 +1977,6 @@
           <a:p>
             <a:fld id="{5BCAD085-E8A6-8845-BD4E-CB4CCA059FC4}" type="datetimeFigureOut">
               <a:rPr lang="en-US" smtClean="0"/>
-              <a:t>1/27/13</a:t>
             </a:fld>
             <a:endParaRPr lang="en-US"/>
           </a:p>
@@ -2028,18 +2018,12 @@
           <a:p>
             <a:fld id="{C1FF6DA9-008F-8B48-92A6-B652298478BF}" type="slidenum">
               <a:rPr lang="en-US" smtClean="0"/>
-              <a:t>‹#›</a:t>
             </a:fld>
             <a:endParaRPr lang="en-US"/>
           </a:p>
         </p:txBody>
       </p:sp>
     </p:spTree>
-    <p:extLst>
-      <p:ext uri="{BB962C8B-B14F-4D97-AF65-F5344CB8AC3E}">
-        <p14:creationId xmlns:p14="http://schemas.microsoft.com/office/powerpoint/2010/main" val="1212999818"/>
-      </p:ext>
-    </p:extLst>
   </p:cSld>
   <p:clrMapOvr>
     <a:masterClrMapping/>
@@ -2149,6 +2133,7 @@
               <a:rPr lang="en-US" smtClean="0"/>
               <a:t>Click to edit Master text styles</a:t>
             </a:r>
+            <a:endParaRPr lang="en-US" smtClean="0"/>
           </a:p>
           <a:p>
             <a:pPr lvl="1"/>
@@ -2156,6 +2141,7 @@
               <a:rPr lang="en-US" smtClean="0"/>
               <a:t>Second level</a:t>
             </a:r>
+            <a:endParaRPr lang="en-US" smtClean="0"/>
           </a:p>
           <a:p>
             <a:pPr lvl="2"/>
@@ -2163,6 +2149,7 @@
               <a:rPr lang="en-US" smtClean="0"/>
               <a:t>Third level</a:t>
             </a:r>
+            <a:endParaRPr lang="en-US" smtClean="0"/>
           </a:p>
           <a:p>
             <a:pPr lvl="3"/>
@@ -2170,6 +2157,7 @@
               <a:rPr lang="en-US" smtClean="0"/>
               <a:t>Fourth level</a:t>
             </a:r>
+            <a:endParaRPr lang="en-US" smtClean="0"/>
           </a:p>
           <a:p>
             <a:pPr lvl="4"/>
@@ -2243,6 +2231,7 @@
               <a:rPr lang="en-US" smtClean="0"/>
               <a:t>Click to edit Master text styles</a:t>
             </a:r>
+            <a:endParaRPr lang="en-US" smtClean="0"/>
           </a:p>
         </p:txBody>
       </p:sp>
@@ -2263,7 +2252,6 @@
           <a:p>
             <a:fld id="{5BCAD085-E8A6-8845-BD4E-CB4CCA059FC4}" type="datetimeFigureOut">
               <a:rPr lang="en-US" smtClean="0"/>
-              <a:t>1/27/13</a:t>
             </a:fld>
             <a:endParaRPr lang="en-US"/>
           </a:p>
@@ -2305,18 +2293,12 @@
           <a:p>
             <a:fld id="{C1FF6DA9-008F-8B48-92A6-B652298478BF}" type="slidenum">
               <a:rPr lang="en-US" smtClean="0"/>
-              <a:t>‹#›</a:t>
             </a:fld>
             <a:endParaRPr lang="en-US"/>
           </a:p>
         </p:txBody>
       </p:sp>
     </p:spTree>
-    <p:extLst>
-      <p:ext uri="{BB962C8B-B14F-4D97-AF65-F5344CB8AC3E}">
-        <p14:creationId xmlns:p14="http://schemas.microsoft.com/office/powerpoint/2010/main" val="1840726560"/>
-      </p:ext>
-    </p:extLst>
   </p:cSld>
   <p:clrMapOvr>
     <a:masterClrMapping/>
@@ -2496,6 +2478,7 @@
               <a:rPr lang="en-US" smtClean="0"/>
               <a:t>Click to edit Master text styles</a:t>
             </a:r>
+            <a:endParaRPr lang="en-US" smtClean="0"/>
           </a:p>
         </p:txBody>
       </p:sp>
@@ -2516,7 +2499,6 @@
           <a:p>
             <a:fld id="{5BCAD085-E8A6-8845-BD4E-CB4CCA059FC4}" type="datetimeFigureOut">
               <a:rPr lang="en-US" smtClean="0"/>
-              <a:t>1/27/13</a:t>
             </a:fld>
             <a:endParaRPr lang="en-US"/>
           </a:p>
@@ -2558,18 +2540,12 @@
           <a:p>
             <a:fld id="{C1FF6DA9-008F-8B48-92A6-B652298478BF}" type="slidenum">
               <a:rPr lang="en-US" smtClean="0"/>
-              <a:t>‹#›</a:t>
             </a:fld>
             <a:endParaRPr lang="en-US"/>
           </a:p>
         </p:txBody>
       </p:sp>
     </p:spTree>
-    <p:extLst>
-      <p:ext uri="{BB962C8B-B14F-4D97-AF65-F5344CB8AC3E}">
-        <p14:creationId xmlns:p14="http://schemas.microsoft.com/office/powerpoint/2010/main" val="3889236939"/>
-      </p:ext>
-    </p:extLst>
   </p:cSld>
   <p:clrMapOvr>
     <a:masterClrMapping/>
@@ -2662,6 +2638,7 @@
               <a:rPr lang="en-US" smtClean="0"/>
               <a:t>Click to edit Master text styles</a:t>
             </a:r>
+            <a:endParaRPr lang="en-US" smtClean="0"/>
           </a:p>
           <a:p>
             <a:pPr lvl="1"/>
@@ -2669,6 +2646,7 @@
               <a:rPr lang="en-US" smtClean="0"/>
               <a:t>Second level</a:t>
             </a:r>
+            <a:endParaRPr lang="en-US" smtClean="0"/>
           </a:p>
           <a:p>
             <a:pPr lvl="2"/>
@@ -2676,6 +2654,7 @@
               <a:rPr lang="en-US" smtClean="0"/>
               <a:t>Third level</a:t>
             </a:r>
+            <a:endParaRPr lang="en-US" smtClean="0"/>
           </a:p>
           <a:p>
             <a:pPr lvl="3"/>
@@ -2683,6 +2662,7 @@
               <a:rPr lang="en-US" smtClean="0"/>
               <a:t>Fourth level</a:t>
             </a:r>
+            <a:endParaRPr lang="en-US" smtClean="0"/>
           </a:p>
           <a:p>
             <a:pPr lvl="4"/>
@@ -2729,7 +2709,6 @@
           <a:p>
             <a:fld id="{5BCAD085-E8A6-8845-BD4E-CB4CCA059FC4}" type="datetimeFigureOut">
               <a:rPr lang="en-US" smtClean="0"/>
-              <a:t>1/27/13</a:t>
             </a:fld>
             <a:endParaRPr lang="en-US"/>
           </a:p>
@@ -2807,18 +2786,12 @@
           <a:p>
             <a:fld id="{C1FF6DA9-008F-8B48-92A6-B652298478BF}" type="slidenum">
               <a:rPr lang="en-US" smtClean="0"/>
-              <a:t>‹#›</a:t>
             </a:fld>
             <a:endParaRPr lang="en-US"/>
           </a:p>
         </p:txBody>
       </p:sp>
     </p:spTree>
-    <p:extLst>
-      <p:ext uri="{BB962C8B-B14F-4D97-AF65-F5344CB8AC3E}">
-        <p14:creationId xmlns:p14="http://schemas.microsoft.com/office/powerpoint/2010/main" val="2209977519"/>
-      </p:ext>
-    </p:extLst>
   </p:cSld>
   <p:clrMap bg1="lt1" tx1="dk1" bg2="lt2" tx2="dk2" accent1="accent1" accent2="accent2" accent3="accent3" accent4="accent4" accent5="accent5" accent6="accent6" hlink="hlink" folHlink="folHlink"/>
   <p:sldLayoutIdLst>
@@ -2856,7 +2829,7 @@
         <a:spcBef>
           <a:spcPct val="20000"/>
         </a:spcBef>
-        <a:buFont typeface="Arial"/>
+        <a:buFont typeface="Arial" panose="020B0604020202090204"/>
         <a:buChar char="•"/>
         <a:defRPr sz="3200" kern="1200">
           <a:solidFill>
@@ -2871,7 +2844,7 @@
         <a:spcBef>
           <a:spcPct val="20000"/>
         </a:spcBef>
-        <a:buFont typeface="Arial"/>
+        <a:buFont typeface="Arial" panose="020B0604020202090204"/>
         <a:buChar char="–"/>
         <a:defRPr sz="2800" kern="1200">
           <a:solidFill>
@@ -2886,7 +2859,7 @@
         <a:spcBef>
           <a:spcPct val="20000"/>
         </a:spcBef>
-        <a:buFont typeface="Arial"/>
+        <a:buFont typeface="Arial" panose="020B0604020202090204"/>
         <a:buChar char="•"/>
         <a:defRPr sz="2400" kern="1200">
           <a:solidFill>
@@ -2901,7 +2874,7 @@
         <a:spcBef>
           <a:spcPct val="20000"/>
         </a:spcBef>
-        <a:buFont typeface="Arial"/>
+        <a:buFont typeface="Arial" panose="020B0604020202090204"/>
         <a:buChar char="–"/>
         <a:defRPr sz="2000" kern="1200">
           <a:solidFill>
@@ -2916,7 +2889,7 @@
         <a:spcBef>
           <a:spcPct val="20000"/>
         </a:spcBef>
-        <a:buFont typeface="Arial"/>
+        <a:buFont typeface="Arial" panose="020B0604020202090204"/>
         <a:buChar char="»"/>
         <a:defRPr sz="2000" kern="1200">
           <a:solidFill>
@@ -2931,7 +2904,7 @@
         <a:spcBef>
           <a:spcPct val="20000"/>
         </a:spcBef>
-        <a:buFont typeface="Arial"/>
+        <a:buFont typeface="Arial" panose="020B0604020202090204"/>
         <a:buChar char="•"/>
         <a:defRPr sz="2000" kern="1200">
           <a:solidFill>
@@ -2946,7 +2919,7 @@
         <a:spcBef>
           <a:spcPct val="20000"/>
         </a:spcBef>
-        <a:buFont typeface="Arial"/>
+        <a:buFont typeface="Arial" panose="020B0604020202090204"/>
         <a:buChar char="•"/>
         <a:defRPr sz="2000" kern="1200">
           <a:solidFill>
@@ -2961,7 +2934,7 @@
         <a:spcBef>
           <a:spcPct val="20000"/>
         </a:spcBef>
-        <a:buFont typeface="Arial"/>
+        <a:buFont typeface="Arial" panose="020B0604020202090204"/>
         <a:buChar char="•"/>
         <a:defRPr sz="2000" kern="1200">
           <a:solidFill>
@@ -2976,7 +2949,7 @@
         <a:spcBef>
           <a:spcPct val="20000"/>
         </a:spcBef>
-        <a:buFont typeface="Arial"/>
+        <a:buFont typeface="Arial" panose="020B0604020202090204"/>
         <a:buChar char="•"/>
         <a:defRPr sz="2000" kern="1200">
           <a:solidFill>
@@ -3088,7 +3061,7 @@
 </file>
 
 <file path=ppt/slides/slide1.xml><?xml version="1.0" encoding="utf-8"?>
-<p:sld xmlns:a="http://schemas.openxmlformats.org/drawingml/2006/main" xmlns:p="http://schemas.openxmlformats.org/presentationml/2006/main" xmlns:r="http://schemas.openxmlformats.org/officeDocument/2006/relationships">
+<p:sld xmlns:a="http://schemas.openxmlformats.org/drawingml/2006/main" xmlns:r="http://schemas.openxmlformats.org/officeDocument/2006/relationships" xmlns:p="http://schemas.openxmlformats.org/presentationml/2006/main">
   <p:cSld>
     <p:bg>
       <p:bgPr>
@@ -3219,10 +3192,16 @@
                 <a:solidFill>
                   <a:srgbClr val="1A2744"/>
                 </a:solidFill>
-                <a:latin typeface="Arial"/>
+                <a:latin typeface="Arial" panose="020B0604020202090204"/>
               </a:rPr>
               <a:t>TrpB MetaDynamics Benchmark — Weekly Progress Report</a:t>
             </a:r>
+            <a:endParaRPr sz="3200" b="1" i="0">
+              <a:solidFill>
+                <a:srgbClr val="1A2744"/>
+              </a:solidFill>
+              <a:latin typeface="Arial" panose="020B0604020202090204"/>
+            </a:endParaRPr>
           </a:p>
         </p:txBody>
       </p:sp>
@@ -3234,8 +3213,8 @@
         </p:nvSpPr>
         <p:spPr>
           <a:xfrm>
-            <a:off x="457200" y="3749039"/>
-            <a:ext cx="11277295" cy="548640"/>
+            <a:off x="4626458" y="3749039"/>
+            <a:ext cx="2938780" cy="368300"/>
           </a:xfrm>
           <a:prstGeom prst="rect">
             <a:avLst/>
@@ -3254,10 +3233,16 @@
                 <a:solidFill>
                   <a:srgbClr val="000000"/>
                 </a:solidFill>
-                <a:latin typeface="Arial"/>
-              </a:rPr>
-              <a:t>Zhenpeng Liu  |  Anima Lab  |  2026-04-09</a:t>
-            </a:r>
+                <a:latin typeface="Arial" panose="020B0604020202090204"/>
+              </a:rPr>
+              <a:t>Zhenpeng Liu   2026-04-09</a:t>
+            </a:r>
+            <a:endParaRPr sz="1800" b="0" i="0">
+              <a:solidFill>
+                <a:srgbClr val="000000"/>
+              </a:solidFill>
+              <a:latin typeface="Arial" panose="020B0604020202090204"/>
+            </a:endParaRPr>
           </a:p>
         </p:txBody>
       </p:sp>
@@ -3278,21 +3263,27 @@
           <a:noFill/>
         </p:spPr>
         <p:txBody>
-          <a:bodyPr wrap="square" lIns="0" rIns="0" tIns="0" bIns="0">
+          <a:bodyPr wrap="square" lIns="0" tIns="0" rIns="0" bIns="0">
             <a:spAutoFit/>
           </a:bodyPr>
           <a:lstStyle/>
           <a:p>
             <a:pPr algn="l"/>
             <a:r>
-              <a:rPr sz="800" b="0" i="1">
+              <a:rPr sz="1000" b="0" i="1">
                 <a:solidFill>
                   <a:srgbClr val="666666"/>
                 </a:solidFill>
-                <a:latin typeface="Arial"/>
+                <a:latin typeface="Arial" panose="020B0604020202090204"/>
               </a:rPr>
               <a:t>Replicating Maria-Solano et al., JACS 2019, 141, 13049–13056</a:t>
             </a:r>
+            <a:endParaRPr sz="1000" b="0" i="1">
+              <a:solidFill>
+                <a:srgbClr val="666666"/>
+              </a:solidFill>
+              <a:latin typeface="Arial" panose="020B0604020202090204"/>
+            </a:endParaRPr>
           </a:p>
         </p:txBody>
       </p:sp>
@@ -3324,10 +3315,16 @@
                 <a:solidFill>
                   <a:srgbClr val="6B7280"/>
                 </a:solidFill>
-                <a:latin typeface="Arial"/>
+                <a:latin typeface="Arial" panose="020B0604020202090204"/>
               </a:rPr>
               <a:t>TrpB MetaD Benchmark  ·  1 / 10</a:t>
             </a:r>
+            <a:endParaRPr sz="800" b="0" i="0">
+              <a:solidFill>
+                <a:srgbClr val="6B7280"/>
+              </a:solidFill>
+              <a:latin typeface="Arial" panose="020B0604020202090204"/>
+            </a:endParaRPr>
           </a:p>
         </p:txBody>
       </p:sp>
@@ -3340,7 +3337,7 @@
 </file>
 
 <file path=ppt/slides/slide10.xml><?xml version="1.0" encoding="utf-8"?>
-<p:sld xmlns:a="http://schemas.openxmlformats.org/drawingml/2006/main" xmlns:p="http://schemas.openxmlformats.org/presentationml/2006/main" xmlns:r="http://schemas.openxmlformats.org/officeDocument/2006/relationships">
+<p:sld xmlns:a="http://schemas.openxmlformats.org/drawingml/2006/main" xmlns:r="http://schemas.openxmlformats.org/officeDocument/2006/relationships" xmlns:p="http://schemas.openxmlformats.org/presentationml/2006/main">
   <p:cSld>
     <p:bg>
       <p:bgPr>
@@ -3470,10 +3467,16 @@
                 <a:solidFill>
                   <a:srgbClr val="1A2744"/>
                 </a:solidFill>
-                <a:latin typeface="Arial"/>
+                <a:latin typeface="Arial" panose="020B0604020202090204"/>
               </a:rPr>
               <a:t>Plan: replace plumed.dat with PATHMSD, resubmit initial run, extract 10 snapshots</a:t>
             </a:r>
+            <a:endParaRPr sz="2200" b="1">
+              <a:solidFill>
+                <a:srgbClr val="1A2744"/>
+              </a:solidFill>
+              <a:latin typeface="Arial" panose="020B0604020202090204"/>
+            </a:endParaRPr>
           </a:p>
         </p:txBody>
       </p:sp>
@@ -3509,10 +3512,16 @@
                 <a:solidFill>
                   <a:srgbClr val="16A34A"/>
                 </a:solidFill>
-                <a:latin typeface="Arial"/>
+                <a:latin typeface="Arial" panose="020B0604020202090204"/>
               </a:rPr>
               <a:t>•  Today: PATHMSD verified on existing 46 ns trajectory with plumed driver (offline, 1.3 s) ✓</a:t>
             </a:r>
+            <a:endParaRPr sz="1300" b="1">
+              <a:solidFill>
+                <a:srgbClr val="16A34A"/>
+              </a:solidFill>
+              <a:latin typeface="Arial" panose="020B0604020202090204"/>
+            </a:endParaRPr>
           </a:p>
           <a:p>
             <a:pPr>
@@ -3525,10 +3534,16 @@
                 <a:solidFill>
                   <a:srgbClr val="000000"/>
                 </a:solidFill>
-                <a:latin typeface="Arial"/>
+                <a:latin typeface="Arial" panose="020B0604020202090204"/>
               </a:rPr>
               <a:t>•  Today: update 6-stage pipeline state to reflect re-diagnosis of FP-020 + new plumed.dat</a:t>
             </a:r>
+            <a:endParaRPr sz="1300" b="0">
+              <a:solidFill>
+                <a:srgbClr val="000000"/>
+              </a:solidFill>
+              <a:latin typeface="Arial" panose="020B0604020202090204"/>
+            </a:endParaRPr>
           </a:p>
           <a:p>
             <a:pPr>
@@ -3541,10 +3556,16 @@
                 <a:solidFill>
                   <a:srgbClr val="000000"/>
                 </a:solidFill>
-                <a:latin typeface="Arial"/>
-              </a:rPr>
-              <a:t>•  This week: backup broken Job 41514529 data and resubmit 50 ns initial run with PATHMSD version</a:t>
-            </a:r>
+                <a:latin typeface="Arial" panose="020B0604020202090204"/>
+              </a:rPr>
+              <a:t>•  Deployed today: archived Job 41514529 data, resubmitted as Job 42679152 (RUNNING on c0301, CV healthy)</a:t>
+            </a:r>
+            <a:endParaRPr sz="1300" b="0">
+              <a:solidFill>
+                <a:srgbClr val="000000"/>
+              </a:solidFill>
+              <a:latin typeface="Arial" panose="020B0604020202090204"/>
+            </a:endParaRPr>
           </a:p>
           <a:p>
             <a:pPr>
@@ -3557,10 +3578,16 @@
                 <a:solidFill>
                   <a:srgbClr val="000000"/>
                 </a:solidFill>
-                <a:latin typeface="Arial"/>
+                <a:latin typeface="Arial" panose="020B0604020202090204"/>
               </a:rPr>
               <a:t>•  Next week: extract 10 snapshots covering O / PC / C regions from initial run trajectory</a:t>
             </a:r>
+            <a:endParaRPr sz="1300" b="0">
+              <a:solidFill>
+                <a:srgbClr val="000000"/>
+              </a:solidFill>
+              <a:latin typeface="Arial" panose="020B0604020202090204"/>
+            </a:endParaRPr>
           </a:p>
           <a:p>
             <a:pPr>
@@ -3573,10 +3600,16 @@
                 <a:solidFill>
                   <a:srgbClr val="000000"/>
                 </a:solidFill>
-                <a:latin typeface="Arial"/>
+                <a:latin typeface="Arial" panose="020B0604020202090204"/>
               </a:rPr>
               <a:t>•  Week after: launch 10-walker WT-MetaD production (SI protocol: 50–100 ns each, ~500 ns total)</a:t>
             </a:r>
+            <a:endParaRPr sz="1300" b="0">
+              <a:solidFill>
+                <a:srgbClr val="000000"/>
+              </a:solidFill>
+              <a:latin typeface="Arial" panose="020B0604020202090204"/>
+            </a:endParaRPr>
           </a:p>
           <a:p>
             <a:pPr>
@@ -3589,10 +3622,16 @@
                 <a:solidFill>
                   <a:srgbClr val="000000"/>
                 </a:solidFill>
-                <a:latin typeface="Arial"/>
+                <a:latin typeface="Arial" panose="020B0604020202090204"/>
               </a:rPr>
               <a:t>•  Target: FES comparison with JACS 2019 Figure 2a within 2 weeks</a:t>
             </a:r>
+            <a:endParaRPr sz="1300" b="0">
+              <a:solidFill>
+                <a:srgbClr val="000000"/>
+              </a:solidFill>
+              <a:latin typeface="Arial" panose="020B0604020202090204"/>
+            </a:endParaRPr>
           </a:p>
         </p:txBody>
       </p:sp>
@@ -3634,7 +3673,7 @@
           </a:fontRef>
         </p:style>
         <p:txBody>
-          <a:bodyPr rtlCol="0" anchor="ctr" wrap="none" tIns="73152" bIns="73152"/>
+          <a:bodyPr wrap="none" tIns="73152" bIns="73152" rtlCol="0" anchor="ctr"/>
           <a:lstStyle/>
           <a:p>
             <a:pPr algn="ctr">
@@ -3647,10 +3686,16 @@
                 <a:solidFill>
                   <a:srgbClr val="000000"/>
                 </a:solidFill>
-                <a:latin typeface="Courier New"/>
-              </a:rPr>
-              <a:t># Final plumed.dat (matches SI protocol, 2 lines for the path CV):</a:t>
-            </a:r>
+                <a:latin typeface="Courier New" panose="02070409020205090404"/>
+              </a:rPr>
+              <a:t># Final plumed.dat — SI action choice + directly reported WT-MetaD params; λ locally recalibrated, initial σ = PLUMED default</a:t>
+            </a:r>
+            <a:endParaRPr sz="1100">
+              <a:solidFill>
+                <a:srgbClr val="000000"/>
+              </a:solidFill>
+              <a:latin typeface="Courier New" panose="02070409020205090404"/>
+            </a:endParaRPr>
           </a:p>
           <a:p>
             <a:pPr>
@@ -3663,10 +3708,16 @@
                 <a:solidFill>
                   <a:srgbClr val="000000"/>
                 </a:solidFill>
-                <a:latin typeface="Courier New"/>
+                <a:latin typeface="Courier New" panose="02070409020205090404"/>
               </a:rPr>
               <a:t>path: PATHMSD REFERENCE=path_gromacs.pdb LAMBDA=379.77</a:t>
             </a:r>
+            <a:endParaRPr sz="1100">
+              <a:solidFill>
+                <a:srgbClr val="000000"/>
+              </a:solidFill>
+              <a:latin typeface="Courier New" panose="02070409020205090404"/>
+            </a:endParaRPr>
           </a:p>
           <a:p>
             <a:pPr>
@@ -3679,10 +3730,16 @@
                 <a:solidFill>
                   <a:srgbClr val="000000"/>
                 </a:solidFill>
-                <a:latin typeface="Courier New"/>
+                <a:latin typeface="Courier New" panose="02070409020205090404"/>
               </a:rPr>
               <a:t>metad: METAD ARG=path.sss,path.zzz SIGMA=0.05 ADAPTIVE=GEOM HEIGHT=0.628 \</a:t>
             </a:r>
+            <a:endParaRPr sz="1100">
+              <a:solidFill>
+                <a:srgbClr val="000000"/>
+              </a:solidFill>
+              <a:latin typeface="Courier New" panose="02070409020205090404"/>
+            </a:endParaRPr>
           </a:p>
           <a:p>
             <a:pPr>
@@ -3695,10 +3752,16 @@
                 <a:solidFill>
                   <a:srgbClr val="000000"/>
                 </a:solidFill>
-                <a:latin typeface="Courier New"/>
+                <a:latin typeface="Courier New" panose="02070409020205090404"/>
               </a:rPr>
               <a:t>       PACE=1000 BIASFACTOR=10 TEMP=350 FILE=HILLS</a:t>
             </a:r>
+            <a:endParaRPr sz="1100">
+              <a:solidFill>
+                <a:srgbClr val="000000"/>
+              </a:solidFill>
+              <a:latin typeface="Courier New" panose="02070409020205090404"/>
+            </a:endParaRPr>
           </a:p>
           <a:p>
             <a:pPr>
@@ -3711,10 +3774,16 @@
                 <a:solidFill>
                   <a:srgbClr val="000000"/>
                 </a:solidFill>
-                <a:latin typeface="Courier New"/>
+                <a:latin typeface="Courier New" panose="02070409020205090404"/>
               </a:rPr>
               <a:t>PRINT ARG=path.sss,path.zzz,metad.bias FILE=COLVAR STRIDE=500</a:t>
             </a:r>
+            <a:endParaRPr sz="1100">
+              <a:solidFill>
+                <a:srgbClr val="000000"/>
+              </a:solidFill>
+              <a:latin typeface="Courier New" panose="02070409020205090404"/>
+            </a:endParaRPr>
           </a:p>
         </p:txBody>
       </p:sp>
@@ -3741,14 +3810,20 @@
           <a:lstStyle/>
           <a:p>
             <a:r>
-              <a:rPr sz="800" i="1">
+              <a:rPr sz="1000" i="1">
                 <a:solidFill>
                   <a:srgbClr val="666666"/>
                 </a:solidFill>
-                <a:latin typeface="Arial"/>
-              </a:rPr>
-              <a:t>Target: replication/metadynamics/single_walker/plumed.dat (master branch)  |  SI S4: 'After an initial metadynamics run, we extracted ten snapshots... multiple-walkers with 10 replicas, 50–100 ns each'  |  LAMBDA source: 2.3/&lt;rmsd&gt;² × 100 (GROMACS nm), Google Groups plumed-users</a:t>
-            </a:r>
+                <a:latin typeface="Arial" panose="020B0604020202090204"/>
+              </a:rPr>
+              <a:t>Target: replication/metadynamics/single_walker/plumed.dat  |  SI match = action + reported params; λ=379.77 recalibrated from our 15 frames; σ=0.05 uses PLUMED default (SI does not report initial sigma)</a:t>
+            </a:r>
+            <a:endParaRPr sz="1000" i="1">
+              <a:solidFill>
+                <a:srgbClr val="666666"/>
+              </a:solidFill>
+              <a:latin typeface="Arial" panose="020B0604020202090204"/>
+            </a:endParaRPr>
           </a:p>
         </p:txBody>
       </p:sp>
@@ -3780,10 +3855,16 @@
                 <a:solidFill>
                   <a:srgbClr val="6B7280"/>
                 </a:solidFill>
-                <a:latin typeface="Arial"/>
+                <a:latin typeface="Arial" panose="020B0604020202090204"/>
               </a:rPr>
               <a:t>TrpB MetaD Benchmark  ·  10 / 10</a:t>
             </a:r>
+            <a:endParaRPr sz="800" b="0" i="0">
+              <a:solidFill>
+                <a:srgbClr val="6B7280"/>
+              </a:solidFill>
+              <a:latin typeface="Arial" panose="020B0604020202090204"/>
+            </a:endParaRPr>
           </a:p>
         </p:txBody>
       </p:sp>
@@ -3796,7 +3877,7 @@
 </file>
 
 <file path=ppt/slides/slide2.xml><?xml version="1.0" encoding="utf-8"?>
-<p:sld xmlns:a="http://schemas.openxmlformats.org/drawingml/2006/main" xmlns:p="http://schemas.openxmlformats.org/presentationml/2006/main" xmlns:r="http://schemas.openxmlformats.org/officeDocument/2006/relationships">
+<p:sld xmlns:a="http://schemas.openxmlformats.org/drawingml/2006/main" xmlns:r="http://schemas.openxmlformats.org/officeDocument/2006/relationships" xmlns:p="http://schemas.openxmlformats.org/presentationml/2006/main">
   <p:cSld>
     <p:bg>
       <p:bgPr>
@@ -3916,7 +3997,7 @@
           <a:noFill/>
         </p:spPr>
         <p:txBody>
-          <a:bodyPr wrap="square" lIns="0" rIns="0" tIns="0" bIns="0">
+          <a:bodyPr wrap="square" lIns="0" tIns="0" rIns="0" bIns="0">
             <a:spAutoFit/>
           </a:bodyPr>
           <a:lstStyle/>
@@ -3927,10 +4008,16 @@
                 <a:solidFill>
                   <a:srgbClr val="1A2744"/>
                 </a:solidFill>
-                <a:latin typeface="Arial"/>
+                <a:latin typeface="Arial" panose="020B0604020202090204"/>
               </a:rPr>
               <a:t>Replicating JACS 2019 MetaDynamics on TrpB COMM domain as F1 conformational baseline</a:t>
             </a:r>
+            <a:endParaRPr sz="2400" b="1" i="0">
+              <a:solidFill>
+                <a:srgbClr val="1A2744"/>
+              </a:solidFill>
+              <a:latin typeface="Arial" panose="020B0604020202090204"/>
+            </a:endParaRPr>
           </a:p>
         </p:txBody>
       </p:sp>
@@ -3951,7 +4038,7 @@
           <a:noFill/>
         </p:spPr>
         <p:txBody>
-          <a:bodyPr wrap="square" lIns="0" rIns="0" tIns="0" bIns="0">
+          <a:bodyPr wrap="square" lIns="0" tIns="0" rIns="0" bIns="0">
             <a:spAutoFit/>
           </a:bodyPr>
           <a:lstStyle/>
@@ -3969,10 +4056,16 @@
                 <a:solidFill>
                   <a:srgbClr val="000000"/>
                 </a:solidFill>
-                <a:latin typeface="Arial"/>
+                <a:latin typeface="Arial" panose="020B0604020202090204"/>
               </a:rPr>
               <a:t>•  Goal: benchmark FES for PfTrpS(Ain) O→PC→C transition</a:t>
             </a:r>
+            <a:endParaRPr sz="1800" b="0" i="0">
+              <a:solidFill>
+                <a:srgbClr val="000000"/>
+              </a:solidFill>
+              <a:latin typeface="Arial" panose="020B0604020202090204"/>
+            </a:endParaRPr>
           </a:p>
           <a:p>
             <a:pPr algn="l">
@@ -3988,10 +4081,16 @@
                 <a:solidFill>
                   <a:srgbClr val="000000"/>
                 </a:solidFill>
-                <a:latin typeface="Arial"/>
+                <a:latin typeface="Arial" panose="020B0604020202090204"/>
               </a:rPr>
               <a:t>•  Downstream: conformational reward for GenSLM + GRPO, ground truth for STAR-MD benchmark</a:t>
             </a:r>
+            <a:endParaRPr sz="1800" b="0" i="0">
+              <a:solidFill>
+                <a:srgbClr val="000000"/>
+              </a:solidFill>
+              <a:latin typeface="Arial" panose="020B0604020202090204"/>
+            </a:endParaRPr>
           </a:p>
           <a:p>
             <a:pPr algn="l">
@@ -4007,10 +4106,16 @@
                 <a:solidFill>
                   <a:srgbClr val="000000"/>
                 </a:solidFill>
-                <a:latin typeface="Arial"/>
+                <a:latin typeface="Arial" panose="020B0604020202090204"/>
               </a:rPr>
               <a:t>•  Stage: initial single-walker MetaD run</a:t>
             </a:r>
+            <a:endParaRPr sz="1800" b="0" i="0">
+              <a:solidFill>
+                <a:srgbClr val="000000"/>
+              </a:solidFill>
+              <a:latin typeface="Arial" panose="020B0604020202090204"/>
+            </a:endParaRPr>
           </a:p>
         </p:txBody>
       </p:sp>
@@ -4031,21 +4136,27 @@
           <a:noFill/>
         </p:spPr>
         <p:txBody>
-          <a:bodyPr wrap="square" lIns="0" rIns="0" tIns="0" bIns="0">
+          <a:bodyPr wrap="square" lIns="0" tIns="0" rIns="0" bIns="0">
             <a:spAutoFit/>
           </a:bodyPr>
           <a:lstStyle/>
           <a:p>
             <a:pPr algn="l"/>
             <a:r>
-              <a:rPr sz="800" b="0" i="1">
+              <a:rPr sz="1000" b="0" i="1">
                 <a:solidFill>
                   <a:srgbClr val="666666"/>
                 </a:solidFill>
-                <a:latin typeface="Arial"/>
+                <a:latin typeface="Arial" panose="020B0604020202090204"/>
               </a:rPr>
               <a:t>Maria-Solano et al., JACS 2019  |  SI protocol: 10 walkers × 50–100 ns after initial run</a:t>
             </a:r>
+            <a:endParaRPr sz="1000" b="0" i="1">
+              <a:solidFill>
+                <a:srgbClr val="666666"/>
+              </a:solidFill>
+              <a:latin typeface="Arial" panose="020B0604020202090204"/>
+            </a:endParaRPr>
           </a:p>
         </p:txBody>
       </p:sp>
@@ -4077,10 +4188,16 @@
                 <a:solidFill>
                   <a:srgbClr val="6B7280"/>
                 </a:solidFill>
-                <a:latin typeface="Arial"/>
+                <a:latin typeface="Arial" panose="020B0604020202090204"/>
               </a:rPr>
               <a:t>TrpB MetaD Benchmark  ·  2 / 10</a:t>
             </a:r>
+            <a:endParaRPr sz="800" b="0" i="0">
+              <a:solidFill>
+                <a:srgbClr val="6B7280"/>
+              </a:solidFill>
+              <a:latin typeface="Arial" panose="020B0604020202090204"/>
+            </a:endParaRPr>
           </a:p>
         </p:txBody>
       </p:sp>
@@ -4093,7 +4210,7 @@
 </file>
 
 <file path=ppt/slides/slide3.xml><?xml version="1.0" encoding="utf-8"?>
-<p:sld xmlns:a="http://schemas.openxmlformats.org/drawingml/2006/main" xmlns:p="http://schemas.openxmlformats.org/presentationml/2006/main" xmlns:r="http://schemas.openxmlformats.org/officeDocument/2006/relationships">
+<p:sld xmlns:a="http://schemas.openxmlformats.org/drawingml/2006/main" xmlns:r="http://schemas.openxmlformats.org/officeDocument/2006/relationships" xmlns:p="http://schemas.openxmlformats.org/presentationml/2006/main">
   <p:cSld>
     <p:bg>
       <p:bgPr>
@@ -4213,7 +4330,7 @@
           <a:noFill/>
         </p:spPr>
         <p:txBody>
-          <a:bodyPr wrap="square" lIns="0" rIns="0" tIns="0" bIns="0">
+          <a:bodyPr wrap="square" lIns="0" tIns="0" rIns="0" bIns="0">
             <a:spAutoFit/>
           </a:bodyPr>
           <a:lstStyle/>
@@ -4224,10 +4341,16 @@
                 <a:solidFill>
                   <a:srgbClr val="1A2744"/>
                 </a:solidFill>
-                <a:latin typeface="Arial"/>
+                <a:latin typeface="Arial" panose="020B0604020202090204"/>
               </a:rPr>
               <a:t>Last week: system preparation and MetaDynamics submission completed</a:t>
             </a:r>
+            <a:endParaRPr sz="2400" b="1" i="0">
+              <a:solidFill>
+                <a:srgbClr val="1A2744"/>
+              </a:solidFill>
+              <a:latin typeface="Arial" panose="020B0604020202090204"/>
+            </a:endParaRPr>
           </a:p>
         </p:txBody>
       </p:sp>
@@ -4248,7 +4371,7 @@
           <a:noFill/>
         </p:spPr>
         <p:txBody>
-          <a:bodyPr wrap="square" lIns="0" rIns="0" tIns="0" bIns="0">
+          <a:bodyPr wrap="square" lIns="0" tIns="0" rIns="0" bIns="0">
             <a:spAutoFit/>
           </a:bodyPr>
           <a:lstStyle/>
@@ -4266,10 +4389,16 @@
                 <a:solidFill>
                   <a:srgbClr val="000000"/>
                 </a:solidFill>
-                <a:latin typeface="Arial"/>
+                <a:latin typeface="Arial" panose="020B0604020202090204"/>
               </a:rPr>
               <a:t>•  500 ns conventional MD completed (Job 40806029, 71.5 hrs)</a:t>
             </a:r>
+            <a:endParaRPr sz="1700" b="0" i="0">
+              <a:solidFill>
+                <a:srgbClr val="000000"/>
+              </a:solidFill>
+              <a:latin typeface="Arial" panose="020B0604020202090204"/>
+            </a:endParaRPr>
           </a:p>
           <a:p>
             <a:pPr algn="l">
@@ -4285,10 +4414,16 @@
                 <a:solidFill>
                   <a:srgbClr val="000000"/>
                 </a:solidFill>
-                <a:latin typeface="Arial"/>
+                <a:latin typeface="Arial" panose="020B0604020202090204"/>
               </a:rPr>
               <a:t>•  AMBER → GROMACS format conversion (ParmEd, 39268 atoms)</a:t>
             </a:r>
+            <a:endParaRPr sz="1700" b="0" i="0">
+              <a:solidFill>
+                <a:srgbClr val="000000"/>
+              </a:solidFill>
+              <a:latin typeface="Arial" panose="020B0604020202090204"/>
+            </a:endParaRPr>
           </a:p>
           <a:p>
             <a:pPr algn="l">
@@ -4304,10 +4439,16 @@
                 <a:solidFill>
                   <a:srgbClr val="000000"/>
                 </a:solidFill>
-                <a:latin typeface="Arial"/>
+                <a:latin typeface="Arial" panose="020B0604020202090204"/>
               </a:rPr>
               <a:t>•  PLUMED 2.9.2 compiled from source (conda version had broken libplumedKernel.so)</a:t>
             </a:r>
+            <a:endParaRPr sz="1700" b="0" i="0">
+              <a:solidFill>
+                <a:srgbClr val="000000"/>
+              </a:solidFill>
+              <a:latin typeface="Arial" panose="020B0604020202090204"/>
+            </a:endParaRPr>
           </a:p>
           <a:p>
             <a:pPr algn="l">
@@ -4323,10 +4464,16 @@
                 <a:solidFill>
                   <a:srgbClr val="000000"/>
                 </a:solidFill>
-                <a:latin typeface="Arial"/>
+                <a:latin typeface="Arial" panose="020B0604020202090204"/>
               </a:rPr>
               <a:t>•  Single-walker MetaD submitted (Job 41514529, FUNCPATHMSD + ADAPTIVE=GEOM)</a:t>
             </a:r>
+            <a:endParaRPr sz="1700" b="0" i="0">
+              <a:solidFill>
+                <a:srgbClr val="000000"/>
+              </a:solidFill>
+              <a:latin typeface="Arial" panose="020B0604020202090204"/>
+            </a:endParaRPr>
           </a:p>
         </p:txBody>
       </p:sp>
@@ -4390,7 +4537,7 @@
           <a:noFill/>
         </p:spPr>
         <p:txBody>
-          <a:bodyPr wrap="square" lIns="0" rIns="0" tIns="0" bIns="0">
+          <a:bodyPr wrap="square" lIns="0" tIns="0" rIns="0" bIns="0">
             <a:spAutoFit/>
           </a:bodyPr>
           <a:lstStyle/>
@@ -4408,10 +4555,16 @@
                 <a:solidFill>
                   <a:srgbClr val="1F1F1F"/>
                 </a:solidFill>
-                <a:latin typeface="Courier New"/>
+                <a:latin typeface="Courier New" panose="02070409020205090404"/>
               </a:rPr>
               <a:t>gmx mdrun -deffnm metad -plumed plumed.dat -ntmpi 1 -ntomp 8</a:t>
             </a:r>
+            <a:endParaRPr sz="1100" b="0" i="0">
+              <a:solidFill>
+                <a:srgbClr val="1F1F1F"/>
+              </a:solidFill>
+              <a:latin typeface="Courier New" panose="02070409020205090404"/>
+            </a:endParaRPr>
           </a:p>
         </p:txBody>
       </p:sp>
@@ -4432,21 +4585,27 @@
           <a:noFill/>
         </p:spPr>
         <p:txBody>
-          <a:bodyPr wrap="square" lIns="0" rIns="0" tIns="0" bIns="0">
+          <a:bodyPr wrap="square" lIns="0" tIns="0" rIns="0" bIns="0">
             <a:spAutoFit/>
           </a:bodyPr>
           <a:lstStyle/>
           <a:p>
             <a:pPr algn="l"/>
             <a:r>
-              <a:rPr sz="800" b="0" i="1">
+              <a:rPr sz="1000" b="0" i="1">
                 <a:solidFill>
                   <a:srgbClr val="666666"/>
                 </a:solidFill>
-                <a:latin typeface="Arial"/>
+                <a:latin typeface="Arial" panose="020B0604020202090204"/>
               </a:rPr>
               <a:t>replication/metadynamics/single_walker/submit.sh</a:t>
             </a:r>
+            <a:endParaRPr sz="1000" b="0" i="1">
+              <a:solidFill>
+                <a:srgbClr val="666666"/>
+              </a:solidFill>
+              <a:latin typeface="Arial" panose="020B0604020202090204"/>
+            </a:endParaRPr>
           </a:p>
         </p:txBody>
       </p:sp>
@@ -4478,10 +4637,16 @@
                 <a:solidFill>
                   <a:srgbClr val="6B7280"/>
                 </a:solidFill>
-                <a:latin typeface="Arial"/>
+                <a:latin typeface="Arial" panose="020B0604020202090204"/>
               </a:rPr>
               <a:t>TrpB MetaD Benchmark  ·  3 / 10</a:t>
             </a:r>
+            <a:endParaRPr sz="800" b="0" i="0">
+              <a:solidFill>
+                <a:srgbClr val="6B7280"/>
+              </a:solidFill>
+              <a:latin typeface="Arial" panose="020B0604020202090204"/>
+            </a:endParaRPr>
           </a:p>
         </p:txBody>
       </p:sp>
@@ -4494,7 +4659,7 @@
 </file>
 
 <file path=ppt/slides/slide4.xml><?xml version="1.0" encoding="utf-8"?>
-<p:sld xmlns:a="http://schemas.openxmlformats.org/drawingml/2006/main" xmlns:p="http://schemas.openxmlformats.org/presentationml/2006/main" xmlns:r="http://schemas.openxmlformats.org/officeDocument/2006/relationships">
+<p:sld xmlns:a="http://schemas.openxmlformats.org/drawingml/2006/main" xmlns:r="http://schemas.openxmlformats.org/officeDocument/2006/relationships" xmlns:p="http://schemas.openxmlformats.org/presentationml/2006/main">
   <p:cSld>
     <p:bg>
       <p:bgPr>
@@ -4614,7 +4779,7 @@
           <a:noFill/>
         </p:spPr>
         <p:txBody>
-          <a:bodyPr wrap="square" lIns="0" rIns="0" tIns="0" bIns="0">
+          <a:bodyPr wrap="square" lIns="0" tIns="0" rIns="0" bIns="0">
             <a:spAutoFit/>
           </a:bodyPr>
           <a:lstStyle/>
@@ -4625,10 +4790,16 @@
                 <a:solidFill>
                   <a:srgbClr val="1A2744"/>
                 </a:solidFill>
-                <a:latin typeface="Arial"/>
+                <a:latin typeface="Arial" panose="020B0604020202090204"/>
               </a:rPr>
               <a:t>Job 41514529 ran 46.3 ns but s(R) was confined to [7.77, 7.83] — no exploration</a:t>
             </a:r>
+            <a:endParaRPr sz="2400" b="1" i="0">
+              <a:solidFill>
+                <a:srgbClr val="1A2744"/>
+              </a:solidFill>
+              <a:latin typeface="Arial" panose="020B0604020202090204"/>
+            </a:endParaRPr>
           </a:p>
         </p:txBody>
       </p:sp>
@@ -4667,10 +4838,16 @@
                 <a:solidFill>
                   <a:srgbClr val="000000"/>
                 </a:solidFill>
-                <a:latin typeface="Arial"/>
+                <a:latin typeface="Arial" panose="020B0604020202090204"/>
               </a:rPr>
               <a:t>•  Walltime kill at 72h, reached 46.3 of 50 ns</a:t>
             </a:r>
+            <a:endParaRPr sz="1500" b="0" i="0">
+              <a:solidFill>
+                <a:srgbClr val="000000"/>
+              </a:solidFill>
+              <a:latin typeface="Arial" panose="020B0604020202090204"/>
+            </a:endParaRPr>
           </a:p>
           <a:p>
             <a:pPr>
@@ -4686,10 +4863,16 @@
                 <a:solidFill>
                   <a:srgbClr val="000000"/>
                 </a:solidFill>
-                <a:latin typeface="Arial"/>
+                <a:latin typeface="Arial" panose="020B0604020202090204"/>
               </a:rPr>
               <a:t>•  COLVAR: 100% of frames in PC region (s=5–10), 0% in O or C</a:t>
             </a:r>
+            <a:endParaRPr sz="1500" b="0" i="0">
+              <a:solidFill>
+                <a:srgbClr val="000000"/>
+              </a:solidFill>
+              <a:latin typeface="Arial" panose="020B0604020202090204"/>
+            </a:endParaRPr>
           </a:p>
           <a:p>
             <a:pPr>
@@ -4705,10 +4888,16 @@
                 <a:solidFill>
                   <a:srgbClr val="000000"/>
                 </a:solidFill>
-                <a:latin typeface="Arial"/>
+                <a:latin typeface="Arial" panose="020B0604020202090204"/>
               </a:rPr>
               <a:t>•  Bias accumulated to 61.7 kJ/mol but system never moved</a:t>
             </a:r>
+            <a:endParaRPr sz="1500" b="0" i="0">
+              <a:solidFill>
+                <a:srgbClr val="000000"/>
+              </a:solidFill>
+              <a:latin typeface="Arial" panose="020B0604020202090204"/>
+            </a:endParaRPr>
           </a:p>
           <a:p>
             <a:pPr>
@@ -4724,10 +4913,16 @@
                 <a:solidFill>
                   <a:srgbClr val="DC2626"/>
                 </a:solidFill>
-                <a:latin typeface="Arial"/>
+                <a:latin typeface="Arial" panose="020B0604020202090204"/>
               </a:rPr>
               <a:t>•  Initial diagnosis: “system stuck in PC basin” — THIS WAS WRONG</a:t>
             </a:r>
+            <a:endParaRPr sz="1500" b="1" i="0">
+              <a:solidFill>
+                <a:srgbClr val="DC2626"/>
+              </a:solidFill>
+              <a:latin typeface="Arial" panose="020B0604020202090204"/>
+            </a:endParaRPr>
           </a:p>
         </p:txBody>
       </p:sp>
@@ -4791,7 +4986,7 @@
           <a:noFill/>
         </p:spPr>
         <p:txBody>
-          <a:bodyPr wrap="square" lIns="0" rIns="0" tIns="0" bIns="0">
+          <a:bodyPr wrap="square" lIns="0" tIns="0" rIns="0" bIns="0">
             <a:spAutoFit/>
           </a:bodyPr>
           <a:lstStyle/>
@@ -4805,14 +5000,20 @@
               </a:spcAft>
             </a:pPr>
             <a:r>
-              <a:rPr sz="900" b="0" i="0">
+              <a:rPr sz="1100" b="0" i="0">
                 <a:solidFill>
                   <a:srgbClr val="1F1F1F"/>
                 </a:solidFill>
-                <a:latin typeface="Courier New"/>
+                <a:latin typeface="Courier New" panose="02070409020205090404"/>
               </a:rPr>
               <a:t># COLVAR analysis</a:t>
             </a:r>
+            <a:endParaRPr sz="1100" b="0" i="0">
+              <a:solidFill>
+                <a:srgbClr val="1F1F1F"/>
+              </a:solidFill>
+              <a:latin typeface="Courier New" panose="02070409020205090404"/>
+            </a:endParaRPr>
           </a:p>
           <a:p>
             <a:pPr algn="l">
@@ -4824,14 +5025,20 @@
               </a:spcAft>
             </a:pPr>
             <a:r>
-              <a:rPr sz="900" b="0" i="0">
+              <a:rPr sz="1100" b="0" i="0">
                 <a:solidFill>
                   <a:srgbClr val="1F1F1F"/>
                 </a:solidFill>
-                <a:latin typeface="Courier New"/>
+                <a:latin typeface="Courier New" panose="02070409020205090404"/>
               </a:rPr>
               <a:t>python3 -c "</a:t>
             </a:r>
+            <a:endParaRPr sz="1100" b="0" i="0">
+              <a:solidFill>
+                <a:srgbClr val="1F1F1F"/>
+              </a:solidFill>
+              <a:latin typeface="Courier New" panose="02070409020205090404"/>
+            </a:endParaRPr>
           </a:p>
           <a:p>
             <a:pPr algn="l">
@@ -4843,14 +5050,20 @@
               </a:spcAft>
             </a:pPr>
             <a:r>
-              <a:rPr sz="900" b="0" i="0">
+              <a:rPr sz="1100" b="0" i="0">
                 <a:solidFill>
                   <a:srgbClr val="1F1F1F"/>
                 </a:solidFill>
-                <a:latin typeface="Courier New"/>
+                <a:latin typeface="Courier New" panose="02070409020205090404"/>
               </a:rPr>
               <a:t>import numpy as np</a:t>
             </a:r>
+            <a:endParaRPr sz="1100" b="0" i="0">
+              <a:solidFill>
+                <a:srgbClr val="1F1F1F"/>
+              </a:solidFill>
+              <a:latin typeface="Courier New" panose="02070409020205090404"/>
+            </a:endParaRPr>
           </a:p>
           <a:p>
             <a:pPr algn="l">
@@ -4862,14 +5075,20 @@
               </a:spcAft>
             </a:pPr>
             <a:r>
-              <a:rPr sz="900" b="0" i="0">
+              <a:rPr sz="1100" b="0" i="0">
                 <a:solidFill>
                   <a:srgbClr val="1F1F1F"/>
                 </a:solidFill>
-                <a:latin typeface="Courier New"/>
+                <a:latin typeface="Courier New" panose="02070409020205090404"/>
               </a:rPr>
               <a:t>d = np.loadtxt('COLVAR', comments='#')</a:t>
             </a:r>
+            <a:endParaRPr sz="1100" b="0" i="0">
+              <a:solidFill>
+                <a:srgbClr val="1F1F1F"/>
+              </a:solidFill>
+              <a:latin typeface="Courier New" panose="02070409020205090404"/>
+            </a:endParaRPr>
           </a:p>
           <a:p>
             <a:pPr algn="l">
@@ -4881,14 +5100,20 @@
               </a:spcAft>
             </a:pPr>
             <a:r>
-              <a:rPr sz="900" b="0" i="0">
+              <a:rPr sz="1100" b="0" i="0">
                 <a:solidFill>
                   <a:srgbClr val="1F1F1F"/>
                 </a:solidFill>
-                <a:latin typeface="Courier New"/>
+                <a:latin typeface="Courier New" panose="02070409020205090404"/>
               </a:rPr>
               <a:t>s = d[:,1]</a:t>
             </a:r>
+            <a:endParaRPr sz="1100" b="0" i="0">
+              <a:solidFill>
+                <a:srgbClr val="1F1F1F"/>
+              </a:solidFill>
+              <a:latin typeface="Courier New" panose="02070409020205090404"/>
+            </a:endParaRPr>
           </a:p>
           <a:p>
             <a:pPr algn="l">
@@ -4900,14 +5125,20 @@
               </a:spcAft>
             </a:pPr>
             <a:r>
-              <a:rPr sz="900" b="0" i="0">
+              <a:rPr sz="1100" b="0" i="0">
                 <a:solidFill>
                   <a:srgbClr val="1F1F1F"/>
                 </a:solidFill>
-                <a:latin typeface="Courier New"/>
+                <a:latin typeface="Courier New" panose="02070409020205090404"/>
               </a:rPr>
               <a:t>print(f'O(s&lt;5): {(s&lt;5).sum()}'</a:t>
             </a:r>
+            <a:endParaRPr sz="1100" b="0" i="0">
+              <a:solidFill>
+                <a:srgbClr val="1F1F1F"/>
+              </a:solidFill>
+              <a:latin typeface="Courier New" panose="02070409020205090404"/>
+            </a:endParaRPr>
           </a:p>
           <a:p>
             <a:pPr algn="l">
@@ -4919,14 +5150,20 @@
               </a:spcAft>
             </a:pPr>
             <a:r>
-              <a:rPr sz="900" b="0" i="0">
+              <a:rPr sz="1100" b="0" i="0">
                 <a:solidFill>
                   <a:srgbClr val="1F1F1F"/>
                 </a:solidFill>
-                <a:latin typeface="Courier New"/>
+                <a:latin typeface="Courier New" panose="02070409020205090404"/>
               </a:rPr>
               <a:t>      f' PC(5-10): {((s&gt;5)&amp;(s&lt;10)).sum()}'</a:t>
             </a:r>
+            <a:endParaRPr sz="1100" b="0" i="0">
+              <a:solidFill>
+                <a:srgbClr val="1F1F1F"/>
+              </a:solidFill>
+              <a:latin typeface="Courier New" panose="02070409020205090404"/>
+            </a:endParaRPr>
           </a:p>
           <a:p>
             <a:pPr algn="l">
@@ -4938,14 +5175,20 @@
               </a:spcAft>
             </a:pPr>
             <a:r>
-              <a:rPr sz="900" b="0" i="0">
+              <a:rPr sz="1100" b="0" i="0">
                 <a:solidFill>
                   <a:srgbClr val="1F1F1F"/>
                 </a:solidFill>
-                <a:latin typeface="Courier New"/>
+                <a:latin typeface="Courier New" panose="02070409020205090404"/>
               </a:rPr>
               <a:t>      f' C(s&gt;10): {(s&gt;10).sum()}')</a:t>
             </a:r>
+            <a:endParaRPr sz="1100" b="0" i="0">
+              <a:solidFill>
+                <a:srgbClr val="1F1F1F"/>
+              </a:solidFill>
+              <a:latin typeface="Courier New" panose="02070409020205090404"/>
+            </a:endParaRPr>
           </a:p>
           <a:p>
             <a:pPr algn="l">
@@ -4957,14 +5200,20 @@
               </a:spcAft>
             </a:pPr>
             <a:r>
-              <a:rPr sz="900" b="0" i="0">
+              <a:rPr sz="1100" b="0" i="0">
                 <a:solidFill>
                   <a:srgbClr val="1F1F1F"/>
                 </a:solidFill>
-                <a:latin typeface="Courier New"/>
+                <a:latin typeface="Courier New" panose="02070409020205090404"/>
               </a:rPr>
               <a:t>"</a:t>
             </a:r>
+            <a:endParaRPr sz="1100" b="0" i="0">
+              <a:solidFill>
+                <a:srgbClr val="1F1F1F"/>
+              </a:solidFill>
+              <a:latin typeface="Courier New" panose="02070409020205090404"/>
+            </a:endParaRPr>
           </a:p>
           <a:p>
             <a:pPr algn="l">
@@ -4976,14 +5225,20 @@
               </a:spcAft>
             </a:pPr>
             <a:r>
-              <a:rPr sz="900" b="0" i="0">
+              <a:rPr sz="1100" b="0" i="0">
                 <a:solidFill>
                   <a:srgbClr val="1F1F1F"/>
                 </a:solidFill>
-                <a:latin typeface="Courier New"/>
+                <a:latin typeface="Courier New" panose="02070409020205090404"/>
               </a:rPr>
               <a:t># Output: O: 0  PC: 46304  C: 0</a:t>
             </a:r>
+            <a:endParaRPr sz="1100" b="0" i="0">
+              <a:solidFill>
+                <a:srgbClr val="1F1F1F"/>
+              </a:solidFill>
+              <a:latin typeface="Courier New" panose="02070409020205090404"/>
+            </a:endParaRPr>
           </a:p>
         </p:txBody>
       </p:sp>
@@ -5004,21 +5259,27 @@
           <a:noFill/>
         </p:spPr>
         <p:txBody>
-          <a:bodyPr wrap="square" lIns="0" rIns="0" tIns="0" bIns="0">
+          <a:bodyPr wrap="square" lIns="0" tIns="0" rIns="0" bIns="0">
             <a:spAutoFit/>
           </a:bodyPr>
           <a:lstStyle/>
           <a:p>
             <a:pPr algn="l"/>
             <a:r>
-              <a:rPr sz="800" b="0" i="1">
+              <a:rPr sz="1000" b="0" i="1">
                 <a:solidFill>
                   <a:srgbClr val="666666"/>
                 </a:solidFill>
-                <a:latin typeface="Arial"/>
+                <a:latin typeface="Arial" panose="020B0604020202090204"/>
               </a:rPr>
               <a:t>Job 41514529 on Longleaf c130604  |  single_walker/COLVAR</a:t>
             </a:r>
+            <a:endParaRPr sz="1000" b="0" i="1">
+              <a:solidFill>
+                <a:srgbClr val="666666"/>
+              </a:solidFill>
+              <a:latin typeface="Arial" panose="020B0604020202090204"/>
+            </a:endParaRPr>
           </a:p>
         </p:txBody>
       </p:sp>
@@ -5050,10 +5311,16 @@
                 <a:solidFill>
                   <a:srgbClr val="6B7280"/>
                 </a:solidFill>
-                <a:latin typeface="Arial"/>
+                <a:latin typeface="Arial" panose="020B0604020202090204"/>
               </a:rPr>
               <a:t>TrpB MetaD Benchmark  ·  4 / 10</a:t>
             </a:r>
+            <a:endParaRPr sz="800" b="0" i="0">
+              <a:solidFill>
+                <a:srgbClr val="6B7280"/>
+              </a:solidFill>
+              <a:latin typeface="Arial" panose="020B0604020202090204"/>
+            </a:endParaRPr>
           </a:p>
         </p:txBody>
       </p:sp>
@@ -5066,7 +5333,7 @@
 </file>
 
 <file path=ppt/slides/slide5.xml><?xml version="1.0" encoding="utf-8"?>
-<p:sld xmlns:a="http://schemas.openxmlformats.org/drawingml/2006/main" xmlns:p="http://schemas.openxmlformats.org/presentationml/2006/main" xmlns:r="http://schemas.openxmlformats.org/officeDocument/2006/relationships">
+<p:sld xmlns:a="http://schemas.openxmlformats.org/drawingml/2006/main" xmlns:r="http://schemas.openxmlformats.org/officeDocument/2006/relationships" xmlns:p="http://schemas.openxmlformats.org/presentationml/2006/main">
   <p:cSld>
     <p:bg>
       <p:bgPr>
@@ -5186,21 +5453,27 @@
           <a:noFill/>
         </p:spPr>
         <p:txBody>
-          <a:bodyPr wrap="square" lIns="0" rIns="0" tIns="0" bIns="0">
+          <a:bodyPr wrap="square" lIns="0" tIns="0" rIns="0" bIns="0">
             <a:spAutoFit/>
           </a:bodyPr>
           <a:lstStyle/>
           <a:p>
             <a:pPr algn="l"/>
             <a:r>
-              <a:rPr sz="2400" b="1" i="0">
+              <a:rPr sz="2000" b="1" i="0">
                 <a:solidFill>
                   <a:srgbClr val="1A2744"/>
                 </a:solidFill>
-                <a:latin typeface="Arial"/>
-              </a:rPr>
-              <a:t>We switched from PATHMSD to FUNCPATHMSD due to an atom serial issue — but kept the old LAMBDA</a:t>
-            </a:r>
+                <a:latin typeface="Arial" panose="020B0604020202090204"/>
+              </a:rPr>
+              <a:t>Flashback to last week: we switched PATHMSD → FUNCPATHMSD on a guess, and kept the old LAMBDA</a:t>
+            </a:r>
+            <a:endParaRPr sz="2000" b="1" i="0">
+              <a:solidFill>
+                <a:srgbClr val="1A2744"/>
+              </a:solidFill>
+              <a:latin typeface="Arial" panose="020B0604020202090204"/>
+            </a:endParaRPr>
           </a:p>
         </p:txBody>
       </p:sp>
@@ -5221,7 +5494,7 @@
           <a:noFill/>
         </p:spPr>
         <p:txBody>
-          <a:bodyPr wrap="square" lIns="0" rIns="0" tIns="0" bIns="0">
+          <a:bodyPr wrap="square" lIns="0" tIns="0" rIns="0" bIns="0">
             <a:spAutoFit/>
           </a:bodyPr>
           <a:lstStyle/>
@@ -5239,10 +5512,16 @@
                 <a:solidFill>
                   <a:srgbClr val="000000"/>
                 </a:solidFill>
-                <a:latin typeface="Arial"/>
-              </a:rPr>
-              <a:t>•  SI used “path collective variables” + GROMACS 5.1.2 + PLUMED2 (no input file provided)</a:t>
-            </a:r>
+                <a:latin typeface="Arial" panose="020B0604020202090204"/>
+              </a:rPr>
+              <a:t>•  SI just says "path collective variables" — action + LAMBDA value not specified</a:t>
+            </a:r>
+            <a:endParaRPr sz="1400" b="0" i="0">
+              <a:solidFill>
+                <a:srgbClr val="000000"/>
+              </a:solidFill>
+              <a:latin typeface="Arial" panose="020B0604020202090204"/>
+            </a:endParaRPr>
           </a:p>
           <a:p>
             <a:pPr algn="l">
@@ -5258,10 +5537,16 @@
                 <a:solidFill>
                   <a:srgbClr val="000000"/>
                 </a:solidFill>
-                <a:latin typeface="Arial"/>
-              </a:rPr>
-              <a:t>•  We first tried PATHMSD, but conda PLUMED had missing modules + atom serial errors</a:t>
-            </a:r>
+                <a:latin typeface="Arial" panose="020B0604020202090204"/>
+              </a:rPr>
+              <a:t>•  Last week we first tried PATHMSD; got a PLUMED crash (later: conda .so bug + trailing END, see Slide 9)</a:t>
+            </a:r>
+            <a:endParaRPr sz="1400" b="0" i="0">
+              <a:solidFill>
+                <a:srgbClr val="000000"/>
+              </a:solidFill>
+              <a:latin typeface="Arial" panose="020B0604020202090204"/>
+            </a:endParaRPr>
           </a:p>
           <a:p>
             <a:pPr algn="l">
@@ -5277,10 +5562,16 @@
                 <a:solidFill>
                   <a:srgbClr val="000000"/>
                 </a:solidFill>
-                <a:latin typeface="Arial"/>
-              </a:rPr>
-              <a:t>•  Switched to FUNCPATHMSD (equivalent math, but takes explicit RMSD inputs)</a:t>
-            </a:r>
+                <a:latin typeface="Arial" panose="020B0604020202090204"/>
+              </a:rPr>
+              <a:t>•  At the time we blamed PATHMSD on non-sequential atom serials and switched to FUNCPATHMSD — without verifying in the docs</a:t>
+            </a:r>
+            <a:endParaRPr sz="1400" b="0" i="0">
+              <a:solidFill>
+                <a:srgbClr val="000000"/>
+              </a:solidFill>
+              <a:latin typeface="Arial" panose="020B0604020202090204"/>
+            </a:endParaRPr>
           </a:p>
           <a:p>
             <a:pPr algn="l">
@@ -5296,10 +5587,16 @@
                 <a:solidFill>
                   <a:srgbClr val="000000"/>
                 </a:solidFill>
-                <a:latin typeface="Arial"/>
-              </a:rPr>
-              <a:t>•  KEPT the same LAMBDA=3.391 nm⁻² — did not realize the convention differs</a:t>
-            </a:r>
+                <a:latin typeface="Arial" panose="020B0604020202090204"/>
+              </a:rPr>
+              <a:t>•  KEPT the old LAMBDA=3.391 nm⁻² from generate_path_cv.py → silent convention mismatch, discovered this week</a:t>
+            </a:r>
+            <a:endParaRPr sz="1400" b="0" i="0">
+              <a:solidFill>
+                <a:srgbClr val="000000"/>
+              </a:solidFill>
+              <a:latin typeface="Arial" panose="020B0604020202090204"/>
+            </a:endParaRPr>
           </a:p>
         </p:txBody>
       </p:sp>
@@ -5363,7 +5660,7 @@
           <a:noFill/>
         </p:spPr>
         <p:txBody>
-          <a:bodyPr wrap="square" lIns="0" rIns="0" tIns="0" bIns="0">
+          <a:bodyPr wrap="square" lIns="0" tIns="0" rIns="0" bIns="0">
             <a:spAutoFit/>
           </a:bodyPr>
           <a:lstStyle/>
@@ -5377,14 +5674,20 @@
               </a:spcAft>
             </a:pPr>
             <a:r>
-              <a:rPr sz="1000" b="0" i="0">
+              <a:rPr sz="1100" b="0" i="0">
                 <a:solidFill>
                   <a:srgbClr val="1F1F1F"/>
                 </a:solidFill>
-                <a:latin typeface="Courier New"/>
+                <a:latin typeface="Courier New" panose="02070409020205090404"/>
               </a:rPr>
               <a:t>r1: RMSD REFERENCE=frames/frame_01.pdb TYPE=OPTIMAL  # &lt;- missing SQUARED</a:t>
             </a:r>
+            <a:endParaRPr sz="1100" b="0" i="0">
+              <a:solidFill>
+                <a:srgbClr val="1F1F1F"/>
+              </a:solidFill>
+              <a:latin typeface="Courier New" panose="02070409020205090404"/>
+            </a:endParaRPr>
           </a:p>
           <a:p>
             <a:pPr algn="l">
@@ -5396,14 +5699,20 @@
               </a:spcAft>
             </a:pPr>
             <a:r>
-              <a:rPr sz="1000" b="0" i="0">
+              <a:rPr sz="1100" b="0" i="0">
                 <a:solidFill>
                   <a:srgbClr val="1F1F1F"/>
                 </a:solidFill>
-                <a:latin typeface="Courier New"/>
+                <a:latin typeface="Courier New" panose="02070409020205090404"/>
               </a:rPr>
               <a:t>...</a:t>
             </a:r>
+            <a:endParaRPr sz="1100" b="0" i="0">
+              <a:solidFill>
+                <a:srgbClr val="1F1F1F"/>
+              </a:solidFill>
+              <a:latin typeface="Courier New" panose="02070409020205090404"/>
+            </a:endParaRPr>
           </a:p>
           <a:p>
             <a:pPr algn="l">
@@ -5415,14 +5724,20 @@
               </a:spcAft>
             </a:pPr>
             <a:r>
-              <a:rPr sz="1000" b="0" i="0">
+              <a:rPr sz="1100" b="0" i="0">
                 <a:solidFill>
                   <a:srgbClr val="1F1F1F"/>
                 </a:solidFill>
-                <a:latin typeface="Courier New"/>
+                <a:latin typeface="Courier New" panose="02070409020205090404"/>
               </a:rPr>
               <a:t>path: FUNCPATHMSD ARG=r1,...,r15 LAMBDA=3.3910        # &lt;- wrong by 112x</a:t>
             </a:r>
+            <a:endParaRPr sz="1100" b="0" i="0">
+              <a:solidFill>
+                <a:srgbClr val="1F1F1F"/>
+              </a:solidFill>
+              <a:latin typeface="Courier New" panose="02070409020205090404"/>
+            </a:endParaRPr>
           </a:p>
         </p:txBody>
       </p:sp>
@@ -5443,7 +5758,7 @@
           <a:noFill/>
         </p:spPr>
         <p:txBody>
-          <a:bodyPr wrap="square" lIns="0" rIns="0" tIns="0" bIns="0">
+          <a:bodyPr wrap="square" lIns="0" tIns="0" rIns="0" bIns="0">
             <a:spAutoFit/>
           </a:bodyPr>
           <a:lstStyle/>
@@ -5454,10 +5769,16 @@
                 <a:solidFill>
                   <a:srgbClr val="666666"/>
                 </a:solidFill>
-                <a:latin typeface="Arial"/>
+                <a:latin typeface="Arial" panose="020B0604020202090204"/>
               </a:rPr>
               <a:t>Old (broken) plumed.dat excerpt:</a:t>
             </a:r>
+            <a:endParaRPr sz="1200" b="0" i="1">
+              <a:solidFill>
+                <a:srgbClr val="666666"/>
+              </a:solidFill>
+              <a:latin typeface="Arial" panose="020B0604020202090204"/>
+            </a:endParaRPr>
           </a:p>
         </p:txBody>
       </p:sp>
@@ -5478,21 +5799,27 @@
           <a:noFill/>
         </p:spPr>
         <p:txBody>
-          <a:bodyPr wrap="square" lIns="0" rIns="0" tIns="0" bIns="0">
+          <a:bodyPr wrap="square" lIns="0" tIns="0" rIns="0" bIns="0">
             <a:spAutoFit/>
           </a:bodyPr>
           <a:lstStyle/>
           <a:p>
             <a:pPr algn="l"/>
             <a:r>
-              <a:rPr sz="800" b="0" i="1">
+              <a:rPr sz="1000" b="0" i="1">
                 <a:solidFill>
                   <a:srgbClr val="666666"/>
                 </a:solidFill>
-                <a:latin typeface="Arial"/>
-              </a:rPr>
-              <a:t>SI S3: “The PLUMED2 software package together with the GROMACS 5.1.2 code were used”  |  FP-020 in failure-patterns.md</a:t>
-            </a:r>
+                <a:latin typeface="Arial" panose="020B0604020202090204"/>
+              </a:rPr>
+              <a:t>SI S3: "path collective variables" (no input file, no LAMBDA value)  |  decision recorded as FP-020 last week  |  re-diagnosed this week (see Slide 9)</a:t>
+            </a:r>
+            <a:endParaRPr sz="1000" b="0" i="1">
+              <a:solidFill>
+                <a:srgbClr val="666666"/>
+              </a:solidFill>
+              <a:latin typeface="Arial" panose="020B0604020202090204"/>
+            </a:endParaRPr>
           </a:p>
         </p:txBody>
       </p:sp>
@@ -5524,10 +5851,16 @@
                 <a:solidFill>
                   <a:srgbClr val="6B7280"/>
                 </a:solidFill>
-                <a:latin typeface="Arial"/>
+                <a:latin typeface="Arial" panose="020B0604020202090204"/>
               </a:rPr>
               <a:t>TrpB MetaD Benchmark  ·  5 / 10</a:t>
             </a:r>
+            <a:endParaRPr sz="800" b="0" i="0">
+              <a:solidFill>
+                <a:srgbClr val="6B7280"/>
+              </a:solidFill>
+              <a:latin typeface="Arial" panose="020B0604020202090204"/>
+            </a:endParaRPr>
           </a:p>
         </p:txBody>
       </p:sp>
@@ -5540,7 +5873,7 @@
 </file>
 
 <file path=ppt/slides/slide6.xml><?xml version="1.0" encoding="utf-8"?>
-<p:sld xmlns:a="http://schemas.openxmlformats.org/drawingml/2006/main" xmlns:p="http://schemas.openxmlformats.org/presentationml/2006/main" xmlns:r="http://schemas.openxmlformats.org/officeDocument/2006/relationships">
+<p:sld xmlns:a="http://schemas.openxmlformats.org/drawingml/2006/main" xmlns:r="http://schemas.openxmlformats.org/officeDocument/2006/relationships" xmlns:p="http://schemas.openxmlformats.org/presentationml/2006/main">
   <p:cSld>
     <p:bg>
       <p:bgPr>
@@ -5660,7 +5993,7 @@
           <a:noFill/>
         </p:spPr>
         <p:txBody>
-          <a:bodyPr wrap="square" lIns="0" rIns="0" tIns="0" bIns="0">
+          <a:bodyPr wrap="square" lIns="0" tIns="0" rIns="0" bIns="0">
             <a:spAutoFit/>
           </a:bodyPr>
           <a:lstStyle/>
@@ -5671,10 +6004,16 @@
                 <a:solidFill>
                   <a:srgbClr val="1A2744"/>
                 </a:solidFill>
-                <a:latin typeface="Arial"/>
+                <a:latin typeface="Arial" panose="020B0604020202090204"/>
               </a:rPr>
               <a:t>Reference frames don’t map to their own index: frame_01 → s=4.02 instead of s=1</a:t>
             </a:r>
+            <a:endParaRPr sz="2400" b="1" i="0">
+              <a:solidFill>
+                <a:srgbClr val="1A2744"/>
+              </a:solidFill>
+              <a:latin typeface="Arial" panose="020B0604020202090204"/>
+            </a:endParaRPr>
           </a:p>
         </p:txBody>
       </p:sp>
@@ -5714,10 +6053,16 @@
                           <a:solidFill>
                             <a:srgbClr val="FFFFFF"/>
                           </a:solidFill>
-                          <a:latin typeface="Arial"/>
+                          <a:latin typeface="Arial" panose="020B0604020202090204"/>
                         </a:rPr>
                         <a:t>Frame</a:t>
                       </a:r>
+                      <a:endParaRPr sz="1300" b="1" i="0">
+                        <a:solidFill>
+                          <a:srgbClr val="FFFFFF"/>
+                        </a:solidFill>
+                        <a:latin typeface="Arial" panose="020B0604020202090204"/>
+                      </a:endParaRPr>
                     </a:p>
                   </a:txBody>
                   <a:tcPr marL="73152" marR="73152" marT="36576" marB="36576">
@@ -5737,10 +6082,16 @@
                           <a:solidFill>
                             <a:srgbClr val="FFFFFF"/>
                           </a:solidFill>
-                          <a:latin typeface="Arial"/>
+                          <a:latin typeface="Arial" panose="020B0604020202090204"/>
                         </a:rPr>
                         <a:t>Expected s</a:t>
                       </a:r>
+                      <a:endParaRPr sz="1300" b="1" i="0">
+                        <a:solidFill>
+                          <a:srgbClr val="FFFFFF"/>
+                        </a:solidFill>
+                        <a:latin typeface="Arial" panose="020B0604020202090204"/>
+                      </a:endParaRPr>
                     </a:p>
                   </a:txBody>
                   <a:tcPr marL="73152" marR="73152" marT="36576" marB="36576">
@@ -5760,10 +6111,16 @@
                           <a:solidFill>
                             <a:srgbClr val="FFFFFF"/>
                           </a:solidFill>
-                          <a:latin typeface="Arial"/>
+                          <a:latin typeface="Arial" panose="020B0604020202090204"/>
                         </a:rPr>
                         <a:t>Actual s (broken)</a:t>
                       </a:r>
+                      <a:endParaRPr sz="1300" b="1" i="0">
+                        <a:solidFill>
+                          <a:srgbClr val="FFFFFF"/>
+                        </a:solidFill>
+                        <a:latin typeface="Arial" panose="020B0604020202090204"/>
+                      </a:endParaRPr>
                     </a:p>
                   </a:txBody>
                   <a:tcPr marL="73152" marR="73152" marT="36576" marB="36576">
@@ -5783,10 +6140,16 @@
                           <a:solidFill>
                             <a:srgbClr val="FFFFFF"/>
                           </a:solidFill>
-                          <a:latin typeface="Arial"/>
+                          <a:latin typeface="Arial" panose="020B0604020202090204"/>
                         </a:rPr>
                         <a:t>Actual s (fixed)</a:t>
                       </a:r>
+                      <a:endParaRPr sz="1300" b="1" i="0">
+                        <a:solidFill>
+                          <a:srgbClr val="FFFFFF"/>
+                        </a:solidFill>
+                        <a:latin typeface="Arial" panose="020B0604020202090204"/>
+                      </a:endParaRPr>
                     </a:p>
                   </a:txBody>
                   <a:tcPr marL="73152" marR="73152" marT="36576" marB="36576">
@@ -5808,10 +6171,16 @@
                           <a:solidFill>
                             <a:srgbClr val="000000"/>
                           </a:solidFill>
-                          <a:latin typeface="Arial"/>
+                          <a:latin typeface="Arial" panose="020B0604020202090204"/>
                         </a:rPr>
                         <a:t>frame_01</a:t>
                       </a:r>
+                      <a:endParaRPr sz="1200" b="0" i="0">
+                        <a:solidFill>
+                          <a:srgbClr val="000000"/>
+                        </a:solidFill>
+                        <a:latin typeface="Arial" panose="020B0604020202090204"/>
+                      </a:endParaRPr>
                     </a:p>
                   </a:txBody>
                   <a:tcPr marL="73152" marR="73152" marT="36576" marB="36576">
@@ -5831,10 +6200,16 @@
                           <a:solidFill>
                             <a:srgbClr val="000000"/>
                           </a:solidFill>
-                          <a:latin typeface="Arial"/>
+                          <a:latin typeface="Arial" panose="020B0604020202090204"/>
                         </a:rPr>
                         <a:t>1.00</a:t>
                       </a:r>
+                      <a:endParaRPr sz="1200" b="0" i="0">
+                        <a:solidFill>
+                          <a:srgbClr val="000000"/>
+                        </a:solidFill>
+                        <a:latin typeface="Arial" panose="020B0604020202090204"/>
+                      </a:endParaRPr>
                     </a:p>
                   </a:txBody>
                   <a:tcPr marL="73152" marR="73152" marT="36576" marB="36576">
@@ -5854,10 +6229,16 @@
                           <a:solidFill>
                             <a:srgbClr val="DC2626"/>
                           </a:solidFill>
-                          <a:latin typeface="Arial"/>
+                          <a:latin typeface="Arial" panose="020B0604020202090204"/>
                         </a:rPr>
                         <a:t>4.02</a:t>
                       </a:r>
+                      <a:endParaRPr sz="1200" b="1" i="0">
+                        <a:solidFill>
+                          <a:srgbClr val="DC2626"/>
+                        </a:solidFill>
+                        <a:latin typeface="Arial" panose="020B0604020202090204"/>
+                      </a:endParaRPr>
                     </a:p>
                   </a:txBody>
                   <a:tcPr marL="73152" marR="73152" marT="36576" marB="36576">
@@ -5877,10 +6258,16 @@
                           <a:solidFill>
                             <a:srgbClr val="000000"/>
                           </a:solidFill>
-                          <a:latin typeface="Arial"/>
+                          <a:latin typeface="Arial" panose="020B0604020202090204"/>
                         </a:rPr>
                         <a:t>1.09</a:t>
                       </a:r>
+                      <a:endParaRPr sz="1200" b="0" i="0">
+                        <a:solidFill>
+                          <a:srgbClr val="000000"/>
+                        </a:solidFill>
+                        <a:latin typeface="Arial" panose="020B0604020202090204"/>
+                      </a:endParaRPr>
                     </a:p>
                   </a:txBody>
                   <a:tcPr marL="73152" marR="73152" marT="36576" marB="36576">
@@ -5902,10 +6289,16 @@
                           <a:solidFill>
                             <a:srgbClr val="000000"/>
                           </a:solidFill>
-                          <a:latin typeface="Arial"/>
+                          <a:latin typeface="Arial" panose="020B0604020202090204"/>
                         </a:rPr>
                         <a:t>frame_08</a:t>
                       </a:r>
+                      <a:endParaRPr sz="1200" b="0" i="0">
+                        <a:solidFill>
+                          <a:srgbClr val="000000"/>
+                        </a:solidFill>
+                        <a:latin typeface="Arial" panose="020B0604020202090204"/>
+                      </a:endParaRPr>
                     </a:p>
                   </a:txBody>
                   <a:tcPr marL="73152" marR="73152" marT="36576" marB="36576">
@@ -5925,10 +6318,16 @@
                           <a:solidFill>
                             <a:srgbClr val="000000"/>
                           </a:solidFill>
-                          <a:latin typeface="Arial"/>
+                          <a:latin typeface="Arial" panose="020B0604020202090204"/>
                         </a:rPr>
                         <a:t>8.00</a:t>
                       </a:r>
+                      <a:endParaRPr sz="1200" b="0" i="0">
+                        <a:solidFill>
+                          <a:srgbClr val="000000"/>
+                        </a:solidFill>
+                        <a:latin typeface="Arial" panose="020B0604020202090204"/>
+                      </a:endParaRPr>
                     </a:p>
                   </a:txBody>
                   <a:tcPr marL="73152" marR="73152" marT="36576" marB="36576">
@@ -5948,10 +6347,16 @@
                           <a:solidFill>
                             <a:srgbClr val="000000"/>
                           </a:solidFill>
-                          <a:latin typeface="Arial"/>
+                          <a:latin typeface="Arial" panose="020B0604020202090204"/>
                         </a:rPr>
                         <a:t>8.00</a:t>
                       </a:r>
+                      <a:endParaRPr sz="1200" b="0" i="0">
+                        <a:solidFill>
+                          <a:srgbClr val="000000"/>
+                        </a:solidFill>
+                        <a:latin typeface="Arial" panose="020B0604020202090204"/>
+                      </a:endParaRPr>
                     </a:p>
                   </a:txBody>
                   <a:tcPr marL="73152" marR="73152" marT="36576" marB="36576">
@@ -5971,10 +6376,16 @@
                           <a:solidFill>
                             <a:srgbClr val="000000"/>
                           </a:solidFill>
-                          <a:latin typeface="Arial"/>
+                          <a:latin typeface="Arial" panose="020B0604020202090204"/>
                         </a:rPr>
                         <a:t>8.00</a:t>
                       </a:r>
+                      <a:endParaRPr sz="1200" b="0" i="0">
+                        <a:solidFill>
+                          <a:srgbClr val="000000"/>
+                        </a:solidFill>
+                        <a:latin typeface="Arial" panose="020B0604020202090204"/>
+                      </a:endParaRPr>
                     </a:p>
                   </a:txBody>
                   <a:tcPr marL="73152" marR="73152" marT="36576" marB="36576">
@@ -5996,10 +6407,16 @@
                           <a:solidFill>
                             <a:srgbClr val="000000"/>
                           </a:solidFill>
-                          <a:latin typeface="Arial"/>
+                          <a:latin typeface="Arial" panose="020B0604020202090204"/>
                         </a:rPr>
                         <a:t>frame_15</a:t>
                       </a:r>
+                      <a:endParaRPr sz="1200" b="0" i="0">
+                        <a:solidFill>
+                          <a:srgbClr val="000000"/>
+                        </a:solidFill>
+                        <a:latin typeface="Arial" panose="020B0604020202090204"/>
+                      </a:endParaRPr>
                     </a:p>
                   </a:txBody>
                   <a:tcPr marL="73152" marR="73152" marT="36576" marB="36576">
@@ -6019,10 +6436,16 @@
                           <a:solidFill>
                             <a:srgbClr val="000000"/>
                           </a:solidFill>
-                          <a:latin typeface="Arial"/>
+                          <a:latin typeface="Arial" panose="020B0604020202090204"/>
                         </a:rPr>
                         <a:t>15.00</a:t>
                       </a:r>
+                      <a:endParaRPr sz="1200" b="0" i="0">
+                        <a:solidFill>
+                          <a:srgbClr val="000000"/>
+                        </a:solidFill>
+                        <a:latin typeface="Arial" panose="020B0604020202090204"/>
+                      </a:endParaRPr>
                     </a:p>
                   </a:txBody>
                   <a:tcPr marL="73152" marR="73152" marT="36576" marB="36576">
@@ -6042,10 +6465,16 @@
                           <a:solidFill>
                             <a:srgbClr val="DC2626"/>
                           </a:solidFill>
-                          <a:latin typeface="Arial"/>
+                          <a:latin typeface="Arial" panose="020B0604020202090204"/>
                         </a:rPr>
                         <a:t>11.98</a:t>
                       </a:r>
+                      <a:endParaRPr sz="1200" b="1" i="0">
+                        <a:solidFill>
+                          <a:srgbClr val="DC2626"/>
+                        </a:solidFill>
+                        <a:latin typeface="Arial" panose="020B0604020202090204"/>
+                      </a:endParaRPr>
                     </a:p>
                   </a:txBody>
                   <a:tcPr marL="73152" marR="73152" marT="36576" marB="36576">
@@ -6065,10 +6494,16 @@
                           <a:solidFill>
                             <a:srgbClr val="000000"/>
                           </a:solidFill>
-                          <a:latin typeface="Arial"/>
+                          <a:latin typeface="Arial" panose="020B0604020202090204"/>
                         </a:rPr>
                         <a:t>14.91</a:t>
                       </a:r>
+                      <a:endParaRPr sz="1200" b="0" i="0">
+                        <a:solidFill>
+                          <a:srgbClr val="000000"/>
+                        </a:solidFill>
+                        <a:latin typeface="Arial" panose="020B0604020202090204"/>
+                      </a:endParaRPr>
                     </a:p>
                   </a:txBody>
                   <a:tcPr marL="73152" marR="73152" marT="36576" marB="36576">
@@ -6099,7 +6534,7 @@
           <a:noFill/>
         </p:spPr>
         <p:txBody>
-          <a:bodyPr wrap="square" lIns="0" rIns="0" tIns="0" bIns="0">
+          <a:bodyPr wrap="square" lIns="0" tIns="0" rIns="0" bIns="0">
             <a:spAutoFit/>
           </a:bodyPr>
           <a:lstStyle/>
@@ -6110,10 +6545,16 @@
                 <a:solidFill>
                   <a:srgbClr val="DC2626"/>
                 </a:solidFill>
-                <a:latin typeface="Arial"/>
+                <a:latin typeface="Arial" panose="020B0604020202090204"/>
               </a:rPr>
               <a:t>If the CV can’t recognize its own reference frames, the entire FES is meaningless.</a:t>
             </a:r>
+            <a:endParaRPr sz="1400" b="1" i="1">
+              <a:solidFill>
+                <a:srgbClr val="DC2626"/>
+              </a:solidFill>
+              <a:latin typeface="Arial" panose="020B0604020202090204"/>
+            </a:endParaRPr>
           </a:p>
         </p:txBody>
       </p:sp>
@@ -6177,7 +6618,7 @@
           <a:noFill/>
         </p:spPr>
         <p:txBody>
-          <a:bodyPr wrap="square" lIns="0" rIns="0" tIns="0" bIns="0">
+          <a:bodyPr wrap="square" lIns="0" tIns="0" rIns="0" bIns="0">
             <a:spAutoFit/>
           </a:bodyPr>
           <a:lstStyle/>
@@ -6191,14 +6632,20 @@
               </a:spcAft>
             </a:pPr>
             <a:r>
-              <a:rPr sz="1000" b="0" i="0">
+              <a:rPr sz="1100" b="0" i="0">
                 <a:solidFill>
                   <a:srgbClr val="1F1F1F"/>
                 </a:solidFill>
-                <a:latin typeface="Courier New"/>
+                <a:latin typeface="Courier New" panose="02070409020205090404"/>
               </a:rPr>
               <a:t># Self-consistency test (30 sec, catches 3-day HPC bugs)</a:t>
             </a:r>
+            <a:endParaRPr sz="1100" b="0" i="0">
+              <a:solidFill>
+                <a:srgbClr val="1F1F1F"/>
+              </a:solidFill>
+              <a:latin typeface="Courier New" panose="02070409020205090404"/>
+            </a:endParaRPr>
           </a:p>
           <a:p>
             <a:pPr algn="l">
@@ -6210,14 +6657,20 @@
               </a:spcAft>
             </a:pPr>
             <a:r>
-              <a:rPr sz="1000" b="0" i="0">
+              <a:rPr sz="1100" b="0" i="0">
                 <a:solidFill>
                   <a:srgbClr val="1F1F1F"/>
                 </a:solidFill>
-                <a:latin typeface="Courier New"/>
+                <a:latin typeface="Courier New" panose="02070409020205090404"/>
               </a:rPr>
               <a:t>python3 01_self_consistency_test.py</a:t>
             </a:r>
+            <a:endParaRPr sz="1100" b="0" i="0">
+              <a:solidFill>
+                <a:srgbClr val="1F1F1F"/>
+              </a:solidFill>
+              <a:latin typeface="Courier New" panose="02070409020205090404"/>
+            </a:endParaRPr>
           </a:p>
           <a:p>
             <a:pPr algn="l">
@@ -6229,14 +6682,20 @@
               </a:spcAft>
             </a:pPr>
             <a:r>
-              <a:rPr sz="1000" b="0" i="0">
+              <a:rPr sz="1100" b="0" i="0">
                 <a:solidFill>
                   <a:srgbClr val="1F1F1F"/>
                 </a:solidFill>
-                <a:latin typeface="Courier New"/>
+                <a:latin typeface="Courier New" panose="02070409020205090404"/>
               </a:rPr>
               <a:t># Loads 15 frames, computes s(frame_i) for each</a:t>
             </a:r>
+            <a:endParaRPr sz="1100" b="0" i="0">
+              <a:solidFill>
+                <a:srgbClr val="1F1F1F"/>
+              </a:solidFill>
+              <a:latin typeface="Courier New" panose="02070409020205090404"/>
+            </a:endParaRPr>
           </a:p>
           <a:p>
             <a:pPr algn="l">
@@ -6248,14 +6707,20 @@
               </a:spcAft>
             </a:pPr>
             <a:r>
-              <a:rPr sz="1000" b="0" i="0">
+              <a:rPr sz="1100" b="0" i="0">
                 <a:solidFill>
                   <a:srgbClr val="1F1F1F"/>
                 </a:solidFill>
-                <a:latin typeface="Courier New"/>
+                <a:latin typeface="Courier New" panose="02070409020205090404"/>
               </a:rPr>
               <a:t># Asserts s(frame_01) ~= 1, s(frame_15) ~= 15</a:t>
             </a:r>
+            <a:endParaRPr sz="1100" b="0" i="0">
+              <a:solidFill>
+                <a:srgbClr val="1F1F1F"/>
+              </a:solidFill>
+              <a:latin typeface="Courier New" panose="02070409020205090404"/>
+            </a:endParaRPr>
           </a:p>
         </p:txBody>
       </p:sp>
@@ -6276,21 +6741,27 @@
           <a:noFill/>
         </p:spPr>
         <p:txBody>
-          <a:bodyPr wrap="square" lIns="0" rIns="0" tIns="0" bIns="0">
+          <a:bodyPr wrap="square" lIns="0" tIns="0" rIns="0" bIns="0">
             <a:spAutoFit/>
           </a:bodyPr>
           <a:lstStyle/>
           <a:p>
             <a:pPr algn="l"/>
             <a:r>
-              <a:rPr sz="800" b="0" i="1">
+              <a:rPr sz="1000" b="0" i="1">
                 <a:solidFill>
                   <a:srgbClr val="666666"/>
                 </a:solidFill>
-                <a:latin typeface="Arial"/>
+                <a:latin typeface="Arial" panose="020B0604020202090204"/>
               </a:rPr>
               <a:t>replication/validations/path_cv_debug_2026-04-08/01_self_consistency_test.py</a:t>
             </a:r>
+            <a:endParaRPr sz="1000" b="0" i="1">
+              <a:solidFill>
+                <a:srgbClr val="666666"/>
+              </a:solidFill>
+              <a:latin typeface="Arial" panose="020B0604020202090204"/>
+            </a:endParaRPr>
           </a:p>
         </p:txBody>
       </p:sp>
@@ -6322,10 +6793,16 @@
                 <a:solidFill>
                   <a:srgbClr val="6B7280"/>
                 </a:solidFill>
-                <a:latin typeface="Arial"/>
+                <a:latin typeface="Arial" panose="020B0604020202090204"/>
               </a:rPr>
               <a:t>TrpB MetaD Benchmark  ·  6 / 10</a:t>
             </a:r>
+            <a:endParaRPr sz="800" b="0" i="0">
+              <a:solidFill>
+                <a:srgbClr val="6B7280"/>
+              </a:solidFill>
+              <a:latin typeface="Arial" panose="020B0604020202090204"/>
+            </a:endParaRPr>
           </a:p>
         </p:txBody>
       </p:sp>
@@ -6338,7 +6815,7 @@
 </file>
 
 <file path=ppt/slides/slide7.xml><?xml version="1.0" encoding="utf-8"?>
-<p:sld xmlns:a="http://schemas.openxmlformats.org/drawingml/2006/main" xmlns:p="http://schemas.openxmlformats.org/presentationml/2006/main" xmlns:r="http://schemas.openxmlformats.org/officeDocument/2006/relationships">
+<p:sld xmlns:a="http://schemas.openxmlformats.org/drawingml/2006/main" xmlns:r="http://schemas.openxmlformats.org/officeDocument/2006/relationships" xmlns:p="http://schemas.openxmlformats.org/presentationml/2006/main">
   <p:cSld>
     <p:bg>
       <p:bgPr>
@@ -6458,21 +6935,27 @@
           <a:noFill/>
         </p:spPr>
         <p:txBody>
-          <a:bodyPr wrap="square" lIns="0" rIns="0" tIns="0" bIns="0">
+          <a:bodyPr wrap="square" lIns="0" tIns="0" rIns="0" bIns="0">
             <a:spAutoFit/>
           </a:bodyPr>
           <a:lstStyle/>
           <a:p>
             <a:pPr algn="l"/>
             <a:r>
-              <a:rPr sz="2400" b="1" i="0">
+              <a:rPr sz="2000" b="1" i="0">
                 <a:solidFill>
                   <a:srgbClr val="1A2744"/>
                 </a:solidFill>
-                <a:latin typeface="Arial"/>
-              </a:rPr>
-              <a:t>generate_path_cv.py used np.sum (total SD) but PLUMED RMSD outputs np.mean (per-atom)</a:t>
-            </a:r>
+                <a:latin typeface="Arial" panose="020B0604020202090204"/>
+              </a:rPr>
+              <a:t>Root cause: last week's generate_path_cv.py computed LAMBDA from total SD, not per-atom MSD (112× off)</a:t>
+            </a:r>
+            <a:endParaRPr sz="2000" b="1" i="0">
+              <a:solidFill>
+                <a:srgbClr val="1A2744"/>
+              </a:solidFill>
+              <a:latin typeface="Arial" panose="020B0604020202090204"/>
+            </a:endParaRPr>
           </a:p>
         </p:txBody>
       </p:sp>
@@ -6493,7 +6976,7 @@
           <a:noFill/>
         </p:spPr>
         <p:txBody>
-          <a:bodyPr wrap="square" lIns="0" rIns="0" tIns="0" bIns="0">
+          <a:bodyPr wrap="square" lIns="0" tIns="0" rIns="0" bIns="0">
             <a:spAutoFit/>
           </a:bodyPr>
           <a:lstStyle/>
@@ -6504,10 +6987,16 @@
                 <a:solidFill>
                   <a:srgbClr val="1A2744"/>
                 </a:solidFill>
-                <a:latin typeface="Arial"/>
+                <a:latin typeface="Arial" panose="020B0604020202090204"/>
               </a:rPr>
               <a:t>Formula</a:t>
             </a:r>
+            <a:endParaRPr sz="1400" b="1" i="0">
+              <a:solidFill>
+                <a:srgbClr val="1A2744"/>
+              </a:solidFill>
+              <a:latin typeface="Arial" panose="020B0604020202090204"/>
+            </a:endParaRPr>
           </a:p>
         </p:txBody>
       </p:sp>
@@ -6528,7 +7017,7 @@
           <a:noFill/>
         </p:spPr>
         <p:txBody>
-          <a:bodyPr wrap="square" lIns="0" rIns="0" tIns="0" bIns="0">
+          <a:bodyPr wrap="square" lIns="0" tIns="0" rIns="0" bIns="0">
             <a:spAutoFit/>
           </a:bodyPr>
           <a:lstStyle/>
@@ -6546,10 +7035,16 @@
                 <a:solidFill>
                   <a:srgbClr val="000000"/>
                 </a:solidFill>
-                <a:latin typeface="Arial"/>
+                <a:latin typeface="Arial" panose="020B0604020202090204"/>
               </a:rPr>
               <a:t>λ = 2.3 / MSD_adjacent</a:t>
             </a:r>
+            <a:endParaRPr sz="1300" b="1" i="0">
+              <a:solidFill>
+                <a:srgbClr val="000000"/>
+              </a:solidFill>
+              <a:latin typeface="Arial" panose="020B0604020202090204"/>
+            </a:endParaRPr>
           </a:p>
           <a:p>
             <a:pPr algn="l">
@@ -6560,15 +7055,6 @@
                 <a:spcPts val="400"/>
               </a:spcAft>
             </a:pPr>
-            <a:r>
-              <a:rPr sz="600" b="0" i="0">
-                <a:solidFill>
-                  <a:srgbClr val="000000"/>
-                </a:solidFill>
-                <a:latin typeface="Arial"/>
-              </a:rPr>
-              <a:t/>
-            </a:r>
           </a:p>
           <a:p>
             <a:pPr algn="l">
@@ -6584,10 +7070,16 @@
                 <a:solidFill>
                   <a:srgbClr val="666666"/>
                 </a:solidFill>
-                <a:latin typeface="Arial"/>
+                <a:latin typeface="Arial" panose="020B0604020202090204"/>
               </a:rPr>
               <a:t>Our script:</a:t>
             </a:r>
+            <a:endParaRPr sz="1200" b="0" i="1">
+              <a:solidFill>
+                <a:srgbClr val="666666"/>
+              </a:solidFill>
+              <a:latin typeface="Arial" panose="020B0604020202090204"/>
+            </a:endParaRPr>
           </a:p>
           <a:p>
             <a:pPr algn="l">
@@ -6603,10 +7095,16 @@
                 <a:solidFill>
                   <a:srgbClr val="000000"/>
                 </a:solidFill>
-                <a:latin typeface="Arial"/>
+                <a:latin typeface="Arial" panose="020B0604020202090204"/>
               </a:rPr>
               <a:t>  MSD = Σ|Δr|² = 0.678 nm² (total sum)</a:t>
             </a:r>
+            <a:endParaRPr sz="1200" b="0" i="0">
+              <a:solidFill>
+                <a:srgbClr val="000000"/>
+              </a:solidFill>
+              <a:latin typeface="Arial" panose="020B0604020202090204"/>
+            </a:endParaRPr>
           </a:p>
           <a:p>
             <a:pPr algn="l">
@@ -6622,10 +7120,16 @@
                 <a:solidFill>
                   <a:srgbClr val="DC2626"/>
                 </a:solidFill>
-                <a:latin typeface="Arial"/>
+                <a:latin typeface="Arial" panose="020B0604020202090204"/>
               </a:rPr>
               <a:t>  → λ = 3.391 nm⁻²</a:t>
             </a:r>
+            <a:endParaRPr sz="1200" b="1" i="0">
+              <a:solidFill>
+                <a:srgbClr val="DC2626"/>
+              </a:solidFill>
+              <a:latin typeface="Arial" panose="020B0604020202090204"/>
+            </a:endParaRPr>
           </a:p>
           <a:p>
             <a:pPr algn="l">
@@ -6636,15 +7140,6 @@
                 <a:spcPts val="400"/>
               </a:spcAft>
             </a:pPr>
-            <a:r>
-              <a:rPr sz="600" b="0" i="0">
-                <a:solidFill>
-                  <a:srgbClr val="000000"/>
-                </a:solidFill>
-                <a:latin typeface="Arial"/>
-              </a:rPr>
-              <a:t/>
-            </a:r>
           </a:p>
           <a:p>
             <a:pPr algn="l">
@@ -6660,10 +7155,16 @@
                 <a:solidFill>
                   <a:srgbClr val="666666"/>
                 </a:solidFill>
-                <a:latin typeface="Arial"/>
+                <a:latin typeface="Arial" panose="020B0604020202090204"/>
               </a:rPr>
               <a:t>PLUMED expects:</a:t>
             </a:r>
+            <a:endParaRPr sz="1200" b="0" i="1">
+              <a:solidFill>
+                <a:srgbClr val="666666"/>
+              </a:solidFill>
+              <a:latin typeface="Arial" panose="020B0604020202090204"/>
+            </a:endParaRPr>
           </a:p>
           <a:p>
             <a:pPr algn="l">
@@ -6679,10 +7180,16 @@
                 <a:solidFill>
                   <a:srgbClr val="000000"/>
                 </a:solidFill>
-                <a:latin typeface="Arial"/>
+                <a:latin typeface="Arial" panose="020B0604020202090204"/>
               </a:rPr>
               <a:t>  MSD = (1/N)Σ|Δr|² = 0.00606 nm² (per-atom mean)</a:t>
             </a:r>
+            <a:endParaRPr sz="1200" b="0" i="0">
+              <a:solidFill>
+                <a:srgbClr val="000000"/>
+              </a:solidFill>
+              <a:latin typeface="Arial" panose="020B0604020202090204"/>
+            </a:endParaRPr>
           </a:p>
           <a:p>
             <a:pPr algn="l">
@@ -6698,10 +7205,16 @@
                 <a:solidFill>
                   <a:srgbClr val="1A2744"/>
                 </a:solidFill>
-                <a:latin typeface="Arial"/>
+                <a:latin typeface="Arial" panose="020B0604020202090204"/>
               </a:rPr>
               <a:t>  → λ = 379.77 nm⁻²</a:t>
             </a:r>
+            <a:endParaRPr sz="1200" b="1" i="0">
+              <a:solidFill>
+                <a:srgbClr val="1A2744"/>
+              </a:solidFill>
+              <a:latin typeface="Arial" panose="020B0604020202090204"/>
+            </a:endParaRPr>
           </a:p>
           <a:p>
             <a:pPr algn="l">
@@ -6712,15 +7225,6 @@
                 <a:spcPts val="400"/>
               </a:spcAft>
             </a:pPr>
-            <a:r>
-              <a:rPr sz="600" b="0" i="0">
-                <a:solidFill>
-                  <a:srgbClr val="000000"/>
-                </a:solidFill>
-                <a:latin typeface="Arial"/>
-              </a:rPr>
-              <a:t/>
-            </a:r>
           </a:p>
           <a:p>
             <a:pPr algn="l">
@@ -6736,10 +7240,16 @@
                 <a:solidFill>
                   <a:srgbClr val="000000"/>
                 </a:solidFill>
-                <a:latin typeface="Arial"/>
+                <a:latin typeface="Arial" panose="020B0604020202090204"/>
               </a:rPr>
               <a:t>Ratio: 379.77 / 3.391 = 112 = N_atoms</a:t>
             </a:r>
+            <a:endParaRPr sz="1200" b="1" i="0">
+              <a:solidFill>
+                <a:srgbClr val="000000"/>
+              </a:solidFill>
+              <a:latin typeface="Arial" panose="020B0604020202090204"/>
+            </a:endParaRPr>
           </a:p>
         </p:txBody>
       </p:sp>
@@ -6760,7 +7270,7 @@
           <a:noFill/>
         </p:spPr>
         <p:txBody>
-          <a:bodyPr wrap="square" lIns="0" rIns="0" tIns="0" bIns="0">
+          <a:bodyPr wrap="square" lIns="0" tIns="0" rIns="0" bIns="0">
             <a:spAutoFit/>
           </a:bodyPr>
           <a:lstStyle/>
@@ -6771,10 +7281,16 @@
                 <a:solidFill>
                   <a:srgbClr val="1A2744"/>
                 </a:solidFill>
-                <a:latin typeface="Arial"/>
+                <a:latin typeface="Arial" panose="020B0604020202090204"/>
               </a:rPr>
               <a:t>Effect on adjacent-frame kernel weight</a:t>
             </a:r>
+            <a:endParaRPr sz="1400" b="1" i="0">
+              <a:solidFill>
+                <a:srgbClr val="1A2744"/>
+              </a:solidFill>
+              <a:latin typeface="Arial" panose="020B0604020202090204"/>
+            </a:endParaRPr>
           </a:p>
         </p:txBody>
       </p:sp>
@@ -6795,7 +7311,7 @@
           <a:noFill/>
         </p:spPr>
         <p:txBody>
-          <a:bodyPr wrap="square" lIns="0" rIns="0" tIns="0" bIns="0">
+          <a:bodyPr wrap="square" lIns="0" tIns="0" rIns="0" bIns="0">
             <a:spAutoFit/>
           </a:bodyPr>
           <a:lstStyle/>
@@ -6813,10 +7329,16 @@
                 <a:solidFill>
                   <a:srgbClr val="666666"/>
                 </a:solidFill>
-                <a:latin typeface="Arial"/>
+                <a:latin typeface="Arial" panose="020B0604020202090204"/>
               </a:rPr>
               <a:t>Broken λ:</a:t>
             </a:r>
+            <a:endParaRPr sz="1200" b="0" i="1">
+              <a:solidFill>
+                <a:srgbClr val="666666"/>
+              </a:solidFill>
+              <a:latin typeface="Arial" panose="020B0604020202090204"/>
+            </a:endParaRPr>
           </a:p>
           <a:p>
             <a:pPr algn="l">
@@ -6832,10 +7354,16 @@
                 <a:solidFill>
                   <a:srgbClr val="DC2626"/>
                 </a:solidFill>
-                <a:latin typeface="Arial"/>
+                <a:latin typeface="Arial" panose="020B0604020202090204"/>
               </a:rPr>
               <a:t>  exp(−0.264) = 0.77</a:t>
             </a:r>
+            <a:endParaRPr sz="1200" b="1" i="0">
+              <a:solidFill>
+                <a:srgbClr val="DC2626"/>
+              </a:solidFill>
+              <a:latin typeface="Arial" panose="020B0604020202090204"/>
+            </a:endParaRPr>
           </a:p>
           <a:p>
             <a:pPr algn="l">
@@ -6851,10 +7379,16 @@
                 <a:solidFill>
                   <a:srgbClr val="DC2626"/>
                 </a:solidFill>
-                <a:latin typeface="Arial"/>
+                <a:latin typeface="Arial" panose="020B0604020202090204"/>
               </a:rPr>
               <a:t>  → frames indistinguishable</a:t>
             </a:r>
+            <a:endParaRPr sz="1200" b="0" i="0">
+              <a:solidFill>
+                <a:srgbClr val="DC2626"/>
+              </a:solidFill>
+              <a:latin typeface="Arial" panose="020B0604020202090204"/>
+            </a:endParaRPr>
           </a:p>
           <a:p>
             <a:pPr algn="l">
@@ -6865,15 +7399,6 @@
                 <a:spcPts val="400"/>
               </a:spcAft>
             </a:pPr>
-            <a:r>
-              <a:rPr sz="600" b="0" i="0">
-                <a:solidFill>
-                  <a:srgbClr val="000000"/>
-                </a:solidFill>
-                <a:latin typeface="Arial"/>
-              </a:rPr>
-              <a:t/>
-            </a:r>
           </a:p>
           <a:p>
             <a:pPr algn="l">
@@ -6889,10 +7414,16 @@
                 <a:solidFill>
                   <a:srgbClr val="666666"/>
                 </a:solidFill>
-                <a:latin typeface="Arial"/>
+                <a:latin typeface="Arial" panose="020B0604020202090204"/>
               </a:rPr>
               <a:t>Correct λ:</a:t>
             </a:r>
+            <a:endParaRPr sz="1200" b="0" i="1">
+              <a:solidFill>
+                <a:srgbClr val="666666"/>
+              </a:solidFill>
+              <a:latin typeface="Arial" panose="020B0604020202090204"/>
+            </a:endParaRPr>
           </a:p>
           <a:p>
             <a:pPr algn="l">
@@ -6908,10 +7439,16 @@
                 <a:solidFill>
                   <a:srgbClr val="1A2744"/>
                 </a:solidFill>
-                <a:latin typeface="Arial"/>
+                <a:latin typeface="Arial" panose="020B0604020202090204"/>
               </a:rPr>
               <a:t>  exp(−2.3) = 0.10</a:t>
             </a:r>
+            <a:endParaRPr sz="1200" b="1" i="0">
+              <a:solidFill>
+                <a:srgbClr val="1A2744"/>
+              </a:solidFill>
+              <a:latin typeface="Arial" panose="020B0604020202090204"/>
+            </a:endParaRPr>
           </a:p>
           <a:p>
             <a:pPr algn="l">
@@ -6927,10 +7464,16 @@
                 <a:solidFill>
                   <a:srgbClr val="1A2744"/>
                 </a:solidFill>
-                <a:latin typeface="Arial"/>
+                <a:latin typeface="Arial" panose="020B0604020202090204"/>
               </a:rPr>
               <a:t>  → proper discrimination</a:t>
             </a:r>
+            <a:endParaRPr sz="1200" b="0" i="0">
+              <a:solidFill>
+                <a:srgbClr val="1A2744"/>
+              </a:solidFill>
+              <a:latin typeface="Arial" panose="020B0604020202090204"/>
+            </a:endParaRPr>
           </a:p>
         </p:txBody>
       </p:sp>
@@ -6994,7 +7537,7 @@
           <a:noFill/>
         </p:spPr>
         <p:txBody>
-          <a:bodyPr wrap="square" lIns="0" rIns="0" tIns="0" bIns="0">
+          <a:bodyPr wrap="square" lIns="0" tIns="0" rIns="0" bIns="0">
             <a:spAutoFit/>
           </a:bodyPr>
           <a:lstStyle/>
@@ -7008,14 +7551,20 @@
               </a:spcAft>
             </a:pPr>
             <a:r>
-              <a:rPr sz="1000" b="0" i="0">
+              <a:rPr sz="1100" b="0" i="0">
                 <a:solidFill>
                   <a:srgbClr val="1F1F1F"/>
                 </a:solidFill>
-                <a:latin typeface="Courier New"/>
-              </a:rPr>
-              <a:t># Bug (line 296 of generate_path_cv.py):</a:t>
-            </a:r>
+                <a:latin typeface="Courier New" panose="02070409020205090404"/>
+              </a:rPr>
+              <a:t># Historical bug — last week's calculate_msd (name said 'mean' but body used 'sum'):</a:t>
+            </a:r>
+            <a:endParaRPr sz="1100" b="0" i="0">
+              <a:solidFill>
+                <a:srgbClr val="1F1F1F"/>
+              </a:solidFill>
+              <a:latin typeface="Courier New" panose="02070409020205090404"/>
+            </a:endParaRPr>
           </a:p>
           <a:p>
             <a:pPr algn="l">
@@ -7027,14 +7576,20 @@
               </a:spcAft>
             </a:pPr>
             <a:r>
-              <a:rPr sz="1000" b="0" i="0">
+              <a:rPr sz="1100" b="0" i="0">
                 <a:solidFill>
                   <a:srgbClr val="1F1F1F"/>
                 </a:solidFill>
-                <a:latin typeface="Courier New"/>
+                <a:latin typeface="Courier New" panose="02070409020205090404"/>
               </a:rPr>
               <a:t>def calculate_msd(coords1, coords2):</a:t>
             </a:r>
+            <a:endParaRPr sz="1100" b="0" i="0">
+              <a:solidFill>
+                <a:srgbClr val="1F1F1F"/>
+              </a:solidFill>
+              <a:latin typeface="Courier New" panose="02070409020205090404"/>
+            </a:endParaRPr>
           </a:p>
           <a:p>
             <a:pPr algn="l">
@@ -7046,14 +7601,20 @@
               </a:spcAft>
             </a:pPr>
             <a:r>
-              <a:rPr sz="1000" b="0" i="0">
+              <a:rPr sz="1100" b="0" i="0">
                 <a:solidFill>
                   <a:srgbClr val="1F1F1F"/>
                 </a:solidFill>
-                <a:latin typeface="Courier New"/>
-              </a:rPr>
-              <a:t>    return np.sum(np.sum(diff**2, axis=1))  # sum, not mean!</a:t>
-            </a:r>
+                <a:latin typeface="Courier New" panose="02070409020205090404"/>
+              </a:rPr>
+              <a:t>    return np.sum(diff**2)            # total SD across all 112 atoms — NOT per-atom MSD</a:t>
+            </a:r>
+            <a:endParaRPr sz="1100" b="0" i="0">
+              <a:solidFill>
+                <a:srgbClr val="1F1F1F"/>
+              </a:solidFill>
+              <a:latin typeface="Courier New" panose="02070409020205090404"/>
+            </a:endParaRPr>
           </a:p>
           <a:p>
             <a:pPr algn="l">
@@ -7065,14 +7626,20 @@
               </a:spcAft>
             </a:pPr>
             <a:r>
-              <a:rPr sz="1000" b="0" i="0">
+              <a:rPr sz="1100" b="0" i="0">
                 <a:solidFill>
                   <a:srgbClr val="1F1F1F"/>
                 </a:solidFill>
-                <a:latin typeface="Courier New"/>
-              </a:rPr>
-              <a:t># Fix:</a:t>
-            </a:r>
+                <a:latin typeface="Courier New" panose="02070409020205090404"/>
+              </a:rPr>
+              <a:t># Today's fix (generate_path_cv.py:296):</a:t>
+            </a:r>
+            <a:endParaRPr sz="1100" b="0" i="0">
+              <a:solidFill>
+                <a:srgbClr val="1F1F1F"/>
+              </a:solidFill>
+              <a:latin typeface="Courier New" panose="02070409020205090404"/>
+            </a:endParaRPr>
           </a:p>
           <a:p>
             <a:pPr algn="l">
@@ -7084,14 +7651,20 @@
               </a:spcAft>
             </a:pPr>
             <a:r>
-              <a:rPr sz="1000" b="0" i="0">
+              <a:rPr sz="1100" b="0" i="0">
                 <a:solidFill>
                   <a:srgbClr val="1F1F1F"/>
                 </a:solidFill>
-                <a:latin typeface="Courier New"/>
-              </a:rPr>
-              <a:t>    return np.mean(np.sum(diff**2, axis=1))  # per-atom mean</a:t>
-            </a:r>
+                <a:latin typeface="Courier New" panose="02070409020205090404"/>
+              </a:rPr>
+              <a:t>    return np.mean(np.sum(diff**2, axis=1))   # per-atom mean, matches PLUMED RMSD convention</a:t>
+            </a:r>
+            <a:endParaRPr sz="1100" b="0" i="0">
+              <a:solidFill>
+                <a:srgbClr val="1F1F1F"/>
+              </a:solidFill>
+              <a:latin typeface="Courier New" panose="02070409020205090404"/>
+            </a:endParaRPr>
           </a:p>
         </p:txBody>
       </p:sp>
@@ -7112,21 +7685,27 @@
           <a:noFill/>
         </p:spPr>
         <p:txBody>
-          <a:bodyPr wrap="square" lIns="0" rIns="0" tIns="0" bIns="0">
+          <a:bodyPr wrap="square" lIns="0" tIns="0" rIns="0" bIns="0">
             <a:spAutoFit/>
           </a:bodyPr>
           <a:lstStyle/>
           <a:p>
             <a:pPr algn="l"/>
             <a:r>
-              <a:rPr sz="800" b="0" i="1">
+              <a:rPr sz="1000" b="0" i="1">
                 <a:solidFill>
                   <a:srgbClr val="666666"/>
                 </a:solidFill>
-                <a:latin typeface="Arial"/>
-              </a:rPr>
-              <a:t>PLUMED docs: “LAMBDA is generally calculated as 2.3/&lt;rmsd&gt;**2” — plumed.org/doc-v2.9  |  SI S3: “λ = 2.3 × inverse of MSD”</a:t>
-            </a:r>
+                <a:latin typeface="Arial" panose="020B0604020202090204"/>
+              </a:rPr>
+              <a:t>Formula 2.3/⟨rmsd⟩²: PLUMED 2.9 PATHMSD docs  |  ×100 GROMACS correction: plumed-users mailing list (community knowledge)  |  Kernel weight 0.10 = exp(−2.3): Branduardi et al. 2007</a:t>
+            </a:r>
+            <a:endParaRPr sz="1000" b="0" i="1">
+              <a:solidFill>
+                <a:srgbClr val="666666"/>
+              </a:solidFill>
+              <a:latin typeface="Arial" panose="020B0604020202090204"/>
+            </a:endParaRPr>
           </a:p>
         </p:txBody>
       </p:sp>
@@ -7158,10 +7737,16 @@
                 <a:solidFill>
                   <a:srgbClr val="6B7280"/>
                 </a:solidFill>
-                <a:latin typeface="Arial"/>
+                <a:latin typeface="Arial" panose="020B0604020202090204"/>
               </a:rPr>
               <a:t>TrpB MetaD Benchmark  ·  7 / 10</a:t>
             </a:r>
+            <a:endParaRPr sz="800" b="0" i="0">
+              <a:solidFill>
+                <a:srgbClr val="6B7280"/>
+              </a:solidFill>
+              <a:latin typeface="Arial" panose="020B0604020202090204"/>
+            </a:endParaRPr>
           </a:p>
         </p:txBody>
       </p:sp>
@@ -7174,7 +7759,7 @@
 </file>
 
 <file path=ppt/slides/slide8.xml><?xml version="1.0" encoding="utf-8"?>
-<p:sld xmlns:a="http://schemas.openxmlformats.org/drawingml/2006/main" xmlns:p="http://schemas.openxmlformats.org/presentationml/2006/main" xmlns:r="http://schemas.openxmlformats.org/officeDocument/2006/relationships">
+<p:sld xmlns:a="http://schemas.openxmlformats.org/drawingml/2006/main" xmlns:r="http://schemas.openxmlformats.org/officeDocument/2006/relationships" xmlns:p="http://schemas.openxmlformats.org/presentationml/2006/main">
   <p:cSld>
     <p:bg>
       <p:bgPr>
@@ -7294,7 +7879,7 @@
           <a:noFill/>
         </p:spPr>
         <p:txBody>
-          <a:bodyPr wrap="square" lIns="0" rIns="0" tIns="0" bIns="0">
+          <a:bodyPr wrap="square" lIns="0" tIns="0" rIns="0" bIns="0">
             <a:spAutoFit/>
           </a:bodyPr>
           <a:lstStyle/>
@@ -7305,10 +7890,16 @@
                 <a:solidFill>
                   <a:srgbClr val="1A2744"/>
                 </a:solidFill>
-                <a:latin typeface="Arial"/>
+                <a:latin typeface="Arial" panose="020B0604020202090204"/>
               </a:rPr>
               <a:t>Re-analysis with fixed LAMBDA shows s≈1.05 throughout — the system never left O</a:t>
             </a:r>
+            <a:endParaRPr sz="2400" b="1" i="0">
+              <a:solidFill>
+                <a:srgbClr val="1A2744"/>
+              </a:solidFill>
+              <a:latin typeface="Arial" panose="020B0604020202090204"/>
+            </a:endParaRPr>
           </a:p>
         </p:txBody>
       </p:sp>
@@ -7329,7 +7920,7 @@
           <a:noFill/>
         </p:spPr>
         <p:txBody>
-          <a:bodyPr wrap="square" lIns="0" rIns="0" tIns="0" bIns="0">
+          <a:bodyPr wrap="square" lIns="0" tIns="0" rIns="0" bIns="0">
             <a:spAutoFit/>
           </a:bodyPr>
           <a:lstStyle/>
@@ -7347,10 +7938,16 @@
                 <a:solidFill>
                   <a:srgbClr val="000000"/>
                 </a:solidFill>
-                <a:latin typeface="Arial"/>
+                <a:latin typeface="Arial" panose="020B0604020202090204"/>
               </a:rPr>
               <a:t>•  Ran plumed driver (offline, no new MD, 1.3 seconds) with SQUARED + LAMBDA=379.77</a:t>
             </a:r>
+            <a:endParaRPr sz="1500" b="0" i="0">
+              <a:solidFill>
+                <a:srgbClr val="000000"/>
+              </a:solidFill>
+              <a:latin typeface="Arial" panose="020B0604020202090204"/>
+            </a:endParaRPr>
           </a:p>
           <a:p>
             <a:pPr algn="l">
@@ -7366,10 +7963,16 @@
                 <a:solidFill>
                   <a:srgbClr val="000000"/>
                 </a:solidFill>
-                <a:latin typeface="Arial"/>
+                <a:latin typeface="Arial" panose="020B0604020202090204"/>
               </a:rPr>
               <a:t>•  PLUMED printed “Consistency check completed! Your path cvs look good!”</a:t>
             </a:r>
+            <a:endParaRPr sz="1500" b="0" i="0">
+              <a:solidFill>
+                <a:srgbClr val="000000"/>
+              </a:solidFill>
+              <a:latin typeface="Arial" panose="020B0604020202090204"/>
+            </a:endParaRPr>
           </a:p>
           <a:p>
             <a:pPr algn="l">
@@ -7385,10 +7988,16 @@
                 <a:solidFill>
                   <a:srgbClr val="000000"/>
                 </a:solidFill>
-                <a:latin typeface="Arial"/>
+                <a:latin typeface="Arial" panose="020B0604020202090204"/>
               </a:rPr>
               <a:t>•  New COLVAR: s = 1.04–1.06 for all 4631 frames (97.5% in O basin)</a:t>
             </a:r>
+            <a:endParaRPr sz="1500" b="0" i="0">
+              <a:solidFill>
+                <a:srgbClr val="000000"/>
+              </a:solidFill>
+              <a:latin typeface="Arial" panose="020B0604020202090204"/>
+            </a:endParaRPr>
           </a:p>
           <a:p>
             <a:pPr algn="l">
@@ -7404,10 +8013,16 @@
                 <a:solidFill>
                   <a:srgbClr val="000000"/>
                 </a:solidFill>
-                <a:latin typeface="Arial"/>
+                <a:latin typeface="Arial" panose="020B0604020202090204"/>
               </a:rPr>
               <a:t>•  The 46 ns of MetaD was effectively unbiased MD (CV gradient ≈ 0 → no physical force from bias)</a:t>
             </a:r>
+            <a:endParaRPr sz="1500" b="0" i="0">
+              <a:solidFill>
+                <a:srgbClr val="000000"/>
+              </a:solidFill>
+              <a:latin typeface="Arial" panose="020B0604020202090204"/>
+            </a:endParaRPr>
           </a:p>
         </p:txBody>
       </p:sp>
@@ -7471,7 +8086,7 @@
           <a:noFill/>
         </p:spPr>
         <p:txBody>
-          <a:bodyPr wrap="square" lIns="0" rIns="0" tIns="0" bIns="0">
+          <a:bodyPr wrap="square" lIns="0" tIns="0" rIns="0" bIns="0">
             <a:spAutoFit/>
           </a:bodyPr>
           <a:lstStyle/>
@@ -7485,14 +8100,20 @@
               </a:spcAft>
             </a:pPr>
             <a:r>
-              <a:rPr sz="1000" b="0" i="0">
+              <a:rPr sz="1100" b="0" i="0">
                 <a:solidFill>
                   <a:srgbClr val="1F1F1F"/>
                 </a:solidFill>
-                <a:latin typeface="Courier New"/>
+                <a:latin typeface="Courier New" panose="02070409020205090404"/>
               </a:rPr>
               <a:t>plumed driver --plumed plumed_fixed.dat --mf_xtc metad.xtc \</a:t>
             </a:r>
+            <a:endParaRPr sz="1100" b="0" i="0">
+              <a:solidFill>
+                <a:srgbClr val="1F1F1F"/>
+              </a:solidFill>
+              <a:latin typeface="Courier New" panose="02070409020205090404"/>
+            </a:endParaRPr>
           </a:p>
           <a:p>
             <a:pPr algn="l">
@@ -7504,14 +8125,20 @@
               </a:spcAft>
             </a:pPr>
             <a:r>
-              <a:rPr sz="1000" b="0" i="0">
+              <a:rPr sz="1100" b="0" i="0">
                 <a:solidFill>
                   <a:srgbClr val="1F1F1F"/>
                 </a:solidFill>
-                <a:latin typeface="Courier New"/>
+                <a:latin typeface="Courier New" panose="02070409020205090404"/>
               </a:rPr>
               <a:t>  --timestep 0.002 --trajectory-stride 5000</a:t>
             </a:r>
+            <a:endParaRPr sz="1100" b="0" i="0">
+              <a:solidFill>
+                <a:srgbClr val="1F1F1F"/>
+              </a:solidFill>
+              <a:latin typeface="Courier New" panose="02070409020205090404"/>
+            </a:endParaRPr>
           </a:p>
           <a:p>
             <a:pPr algn="l">
@@ -7523,14 +8150,20 @@
               </a:spcAft>
             </a:pPr>
             <a:r>
-              <a:rPr sz="1000" b="0" i="0">
+              <a:rPr sz="1100" b="0" i="0">
                 <a:solidFill>
                   <a:srgbClr val="1F1F1F"/>
                 </a:solidFill>
-                <a:latin typeface="Courier New"/>
+                <a:latin typeface="Courier New" panose="02070409020205090404"/>
               </a:rPr>
               <a:t># Output: "lambda is 379.770000"</a:t>
             </a:r>
+            <a:endParaRPr sz="1100" b="0" i="0">
+              <a:solidFill>
+                <a:srgbClr val="1F1F1F"/>
+              </a:solidFill>
+              <a:latin typeface="Courier New" panose="02070409020205090404"/>
+            </a:endParaRPr>
           </a:p>
           <a:p>
             <a:pPr algn="l">
@@ -7542,14 +8175,20 @@
               </a:spcAft>
             </a:pPr>
             <a:r>
-              <a:rPr sz="1000" b="0" i="0">
+              <a:rPr sz="1100" b="0" i="0">
                 <a:solidFill>
                   <a:srgbClr val="1F1F1F"/>
                 </a:solidFill>
-                <a:latin typeface="Courier New"/>
+                <a:latin typeface="Courier New" panose="02070409020205090404"/>
               </a:rPr>
               <a:t># Output: "Consistency check completed! Your path cvs look good!" </a:t>
             </a:r>
+            <a:endParaRPr sz="1100" b="0" i="0">
+              <a:solidFill>
+                <a:srgbClr val="1F1F1F"/>
+              </a:solidFill>
+              <a:latin typeface="Courier New" panose="02070409020205090404"/>
+            </a:endParaRPr>
           </a:p>
         </p:txBody>
       </p:sp>
@@ -7570,21 +8209,27 @@
           <a:noFill/>
         </p:spPr>
         <p:txBody>
-          <a:bodyPr wrap="square" lIns="0" rIns="0" tIns="0" bIns="0">
+          <a:bodyPr wrap="square" lIns="0" tIns="0" rIns="0" bIns="0">
             <a:spAutoFit/>
           </a:bodyPr>
           <a:lstStyle/>
           <a:p>
             <a:pPr algn="l"/>
             <a:r>
-              <a:rPr sz="800" b="0" i="1">
+              <a:rPr sz="1000" b="0" i="1">
                 <a:solidFill>
                   <a:srgbClr val="666666"/>
                 </a:solidFill>
-                <a:latin typeface="Arial"/>
+                <a:latin typeface="Arial" panose="020B0604020202090204"/>
               </a:rPr>
               <a:t>rerun/COLVAR_rerun_fixed  |  plumed driver on Longleaf single_walker/</a:t>
             </a:r>
+            <a:endParaRPr sz="1000" b="0" i="1">
+              <a:solidFill>
+                <a:srgbClr val="666666"/>
+              </a:solidFill>
+              <a:latin typeface="Arial" panose="020B0604020202090204"/>
+            </a:endParaRPr>
           </a:p>
         </p:txBody>
       </p:sp>
@@ -7616,10 +8261,16 @@
                 <a:solidFill>
                   <a:srgbClr val="6B7280"/>
                 </a:solidFill>
-                <a:latin typeface="Arial"/>
+                <a:latin typeface="Arial" panose="020B0604020202090204"/>
               </a:rPr>
               <a:t>TrpB MetaD Benchmark  ·  8 / 10</a:t>
             </a:r>
+            <a:endParaRPr sz="800" b="0" i="0">
+              <a:solidFill>
+                <a:srgbClr val="6B7280"/>
+              </a:solidFill>
+              <a:latin typeface="Arial" panose="020B0604020202090204"/>
+            </a:endParaRPr>
           </a:p>
         </p:txBody>
       </p:sp>
@@ -7632,7 +8283,7 @@
 </file>
 
 <file path=ppt/slides/slide9.xml><?xml version="1.0" encoding="utf-8"?>
-<p:sld xmlns:a="http://schemas.openxmlformats.org/drawingml/2006/main" xmlns:p="http://schemas.openxmlformats.org/presentationml/2006/main" xmlns:r="http://schemas.openxmlformats.org/officeDocument/2006/relationships">
+<p:sld xmlns:a="http://schemas.openxmlformats.org/drawingml/2006/main" xmlns:r="http://schemas.openxmlformats.org/officeDocument/2006/relationships" xmlns:p="http://schemas.openxmlformats.org/presentationml/2006/main">
   <p:cSld>
     <p:bg>
       <p:bgPr>
@@ -7758,14 +8409,20 @@
           <a:lstStyle/>
           <a:p>
             <a:r>
-              <a:rPr sz="2200" b="1">
+              <a:rPr sz="2000" b="1">
                 <a:solidFill>
                   <a:srgbClr val="1A2744"/>
                 </a:solidFill>
-                <a:latin typeface="Arial"/>
-              </a:rPr>
-              <a:t>PATHMSD actually works — the original error was a conda PLUMED bug</a:t>
-            </a:r>
+                <a:latin typeface="Arial" panose="020B0604020202090204"/>
+              </a:rPr>
+              <a:t>PATHMSD was never the problem — last week's "non-sequential serial" attribution was a misdiagnosis</a:t>
+            </a:r>
+            <a:endParaRPr sz="2000" b="1">
+              <a:solidFill>
+                <a:srgbClr val="1A2744"/>
+              </a:solidFill>
+              <a:latin typeface="Arial" panose="020B0604020202090204"/>
+            </a:endParaRPr>
           </a:p>
         </p:txBody>
       </p:sp>
@@ -7801,10 +8458,16 @@
                 <a:solidFill>
                   <a:srgbClr val="000000"/>
                 </a:solidFill>
-                <a:latin typeface="Arial"/>
-              </a:rPr>
-              <a:t>•  When we first tried PATHMSD: got 'non-sequential atom serial' errors and PLUMED crashes</a:t>
-            </a:r>
+                <a:latin typeface="Arial" panose="020B0604020202090204"/>
+              </a:rPr>
+              <a:t>•  Last week: tried PATHMSD on conda-forge PLUMED → crash → we blamed non-sequential atom serials</a:t>
+            </a:r>
+            <a:endParaRPr sz="1300" b="0">
+              <a:solidFill>
+                <a:srgbClr val="000000"/>
+              </a:solidFill>
+              <a:latin typeface="Arial" panose="020B0604020202090204"/>
+            </a:endParaRPr>
           </a:p>
           <a:p>
             <a:pPr>
@@ -7817,10 +8480,16 @@
                 <a:solidFill>
                   <a:srgbClr val="000000"/>
                 </a:solidFill>
-                <a:latin typeface="Arial"/>
-              </a:rPr>
-              <a:t>•  At that time we were using conda-forge PLUMED, which had a broken libplumedKernel.so (FP-020)</a:t>
-            </a:r>
+                <a:latin typeface="Arial" panose="020B0604020202090204"/>
+              </a:rPr>
+              <a:t>•  Today: conda-forge PLUMED had a broken libplumedKernel.so — that's FP-020, the actual failure mode</a:t>
+            </a:r>
+            <a:endParaRPr sz="1300" b="0">
+              <a:solidFill>
+                <a:srgbClr val="000000"/>
+              </a:solidFill>
+              <a:latin typeface="Arial" panose="020B0604020202090204"/>
+            </a:endParaRPr>
           </a:p>
           <a:p>
             <a:pPr>
@@ -7833,10 +8502,16 @@
                 <a:solidFill>
                   <a:srgbClr val="000000"/>
                 </a:solidFill>
-                <a:latin typeface="Arial"/>
-              </a:rPr>
-              <a:t>•  We attributed the PATHMSD failure to the atom serial issue and switched to FUNCPATHMSD</a:t>
-            </a:r>
+                <a:latin typeface="Arial" panose="020B0604020202090204"/>
+              </a:rPr>
+              <a:t>•  PLUMED 2.9 PATHMSD docs explicitly show non-sequential serial examples (1, 5, 6, 7) — our serials are fine</a:t>
+            </a:r>
+            <a:endParaRPr sz="1300" b="0">
+              <a:solidFill>
+                <a:srgbClr val="000000"/>
+              </a:solidFill>
+              <a:latin typeface="Arial" panose="020B0604020202090204"/>
+            </a:endParaRPr>
           </a:p>
           <a:p>
             <a:pPr>
@@ -7849,10 +8524,16 @@
                 <a:solidFill>
                   <a:srgbClr val="DC2626"/>
                 </a:solidFill>
-                <a:latin typeface="Arial"/>
-              </a:rPr>
-              <a:t>•  That switch kept the SI LAMBDA but used a different convention → silent 112× bug (FP-022)</a:t>
-            </a:r>
+                <a:latin typeface="Arial" panose="020B0604020202090204"/>
+              </a:rPr>
+              <a:t>•  Source-compiled PLUMED 2.9.2 on Longleaf: PATHMSD reads our file (serials 1614–4723) cleanly</a:t>
+            </a:r>
+            <a:endParaRPr sz="1300" b="0">
+              <a:solidFill>
+                <a:srgbClr val="DC2626"/>
+              </a:solidFill>
+              <a:latin typeface="Arial" panose="020B0604020202090204"/>
+            </a:endParaRPr>
           </a:p>
           <a:p>
             <a:pPr>
@@ -7865,10 +8546,16 @@
                 <a:solidFill>
                   <a:srgbClr val="16A34A"/>
                 </a:solidFill>
-                <a:latin typeface="Arial"/>
-              </a:rPr>
-              <a:t>•  Tested today on Longleaf with source-compiled PLUMED 2.9.2: PATHMSD works cleanly</a:t>
-            </a:r>
+                <a:latin typeface="Arial" panose="020B0604020202090204"/>
+              </a:rPr>
+              <a:t>•  Second trap (empirical, our file + our build): trailing bare END after final ENDMDL → PATHMSD parser reads a 16th empty frame → crash</a:t>
+            </a:r>
+            <a:endParaRPr sz="1300" b="1">
+              <a:solidFill>
+                <a:srgbClr val="16A34A"/>
+              </a:solidFill>
+              <a:latin typeface="Arial" panose="020B0604020202090204"/>
+            </a:endParaRPr>
           </a:p>
           <a:p>
             <a:pPr>
@@ -7881,10 +8568,16 @@
                 <a:solidFill>
                   <a:srgbClr val="000000"/>
                 </a:solidFill>
-                <a:latin typeface="Arial"/>
-              </a:rPr>
-              <a:t>•  Second trap found: path.pdb trailing 'END' after ENDMDL → PATHMSD thinks there is an empty 16th frame</a:t>
-            </a:r>
+                <a:latin typeface="Arial" panose="020B0604020202090204"/>
+              </a:rPr>
+              <a:t>•  PLUMED docs say END and ENDMDL are both valid separators, so this is FP-023: observed parser behavior, not an official PLUMED rule. Safe fix: strip trailing END.</a:t>
+            </a:r>
+            <a:endParaRPr sz="1300" b="0">
+              <a:solidFill>
+                <a:srgbClr val="000000"/>
+              </a:solidFill>
+              <a:latin typeface="Arial" panose="020B0604020202090204"/>
+            </a:endParaRPr>
           </a:p>
         </p:txBody>
       </p:sp>
@@ -7922,10 +8615,16 @@
                           <a:solidFill>
                             <a:srgbClr val="FFFFFF"/>
                           </a:solidFill>
-                          <a:latin typeface="Arial"/>
+                          <a:latin typeface="Arial" panose="020B0604020202090204"/>
                         </a:rPr>
                         <a:t>Metric</a:t>
                       </a:r>
+                      <a:endParaRPr sz="1000" b="1">
+                        <a:solidFill>
+                          <a:srgbClr val="FFFFFF"/>
+                        </a:solidFill>
+                        <a:latin typeface="Arial" panose="020B0604020202090204"/>
+                      </a:endParaRPr>
                     </a:p>
                   </a:txBody>
                   <a:tcPr>
@@ -7944,10 +8643,16 @@
                           <a:solidFill>
                             <a:srgbClr val="FFFFFF"/>
                           </a:solidFill>
-                          <a:latin typeface="Arial"/>
+                          <a:latin typeface="Arial" panose="020B0604020202090204"/>
                         </a:rPr>
                         <a:t>FUNCPATHMSD + SQUARED (Friday fix)</a:t>
                       </a:r>
+                      <a:endParaRPr sz="1000" b="1">
+                        <a:solidFill>
+                          <a:srgbClr val="FFFFFF"/>
+                        </a:solidFill>
+                        <a:latin typeface="Arial" panose="020B0604020202090204"/>
+                      </a:endParaRPr>
                     </a:p>
                   </a:txBody>
                   <a:tcPr>
@@ -7966,10 +8671,16 @@
                           <a:solidFill>
                             <a:srgbClr val="FFFFFF"/>
                           </a:solidFill>
-                          <a:latin typeface="Arial"/>
+                          <a:latin typeface="Arial" panose="020B0604020202090204"/>
                         </a:rPr>
                         <a:t>PATHMSD (verified today, matches SI)</a:t>
                       </a:r>
+                      <a:endParaRPr sz="1000" b="1">
+                        <a:solidFill>
+                          <a:srgbClr val="FFFFFF"/>
+                        </a:solidFill>
+                        <a:latin typeface="Arial" panose="020B0604020202090204"/>
+                      </a:endParaRPr>
                     </a:p>
                   </a:txBody>
                   <a:tcPr>
@@ -7990,10 +8701,16 @@
                           <a:solidFill>
                             <a:srgbClr val="000000"/>
                           </a:solidFill>
-                          <a:latin typeface="Arial"/>
+                          <a:latin typeface="Arial" panose="020B0604020202090204"/>
                         </a:rPr>
                         <a:t>Lines of path CV code</a:t>
                       </a:r>
+                      <a:endParaRPr sz="900" b="0">
+                        <a:solidFill>
+                          <a:srgbClr val="000000"/>
+                        </a:solidFill>
+                        <a:latin typeface="Arial" panose="020B0604020202090204"/>
+                      </a:endParaRPr>
                     </a:p>
                   </a:txBody>
                   <a:tcPr>
@@ -8012,10 +8729,16 @@
                           <a:solidFill>
                             <a:srgbClr val="000000"/>
                           </a:solidFill>
-                          <a:latin typeface="Arial"/>
+                          <a:latin typeface="Arial" panose="020B0604020202090204"/>
                         </a:rPr>
                         <a:t>17 (15 RMSD + FUNCPATHMSD + METAD)</a:t>
                       </a:r>
+                      <a:endParaRPr sz="900" b="0">
+                        <a:solidFill>
+                          <a:srgbClr val="000000"/>
+                        </a:solidFill>
+                        <a:latin typeface="Arial" panose="020B0604020202090204"/>
+                      </a:endParaRPr>
                     </a:p>
                   </a:txBody>
                   <a:tcPr>
@@ -8034,10 +8757,16 @@
                           <a:solidFill>
                             <a:srgbClr val="000000"/>
                           </a:solidFill>
-                          <a:latin typeface="Arial"/>
+                          <a:latin typeface="Arial" panose="020B0604020202090204"/>
                         </a:rPr>
                         <a:t>2 (PATHMSD + METAD)</a:t>
                       </a:r>
+                      <a:endParaRPr sz="900" b="0">
+                        <a:solidFill>
+                          <a:srgbClr val="000000"/>
+                        </a:solidFill>
+                        <a:latin typeface="Arial" panose="020B0604020202090204"/>
+                      </a:endParaRPr>
                     </a:p>
                   </a:txBody>
                   <a:tcPr>
@@ -8058,10 +8787,16 @@
                           <a:solidFill>
                             <a:srgbClr val="000000"/>
                           </a:solidFill>
-                          <a:latin typeface="Arial"/>
+                          <a:latin typeface="Arial" panose="020B0604020202090204"/>
                         </a:rPr>
                         <a:t>s(R) range on 46 ns</a:t>
                       </a:r>
+                      <a:endParaRPr sz="900" b="0">
+                        <a:solidFill>
+                          <a:srgbClr val="000000"/>
+                        </a:solidFill>
+                        <a:latin typeface="Arial" panose="020B0604020202090204"/>
+                      </a:endParaRPr>
                     </a:p>
                   </a:txBody>
                   <a:tcPr>
@@ -8080,10 +8815,16 @@
                           <a:solidFill>
                             <a:srgbClr val="000000"/>
                           </a:solidFill>
-                          <a:latin typeface="Arial"/>
+                          <a:latin typeface="Arial" panose="020B0604020202090204"/>
                         </a:rPr>
                         <a:t>[1.04, 1.06]</a:t>
                       </a:r>
+                      <a:endParaRPr sz="900" b="0">
+                        <a:solidFill>
+                          <a:srgbClr val="000000"/>
+                        </a:solidFill>
+                        <a:latin typeface="Arial" panose="020B0604020202090204"/>
+                      </a:endParaRPr>
                     </a:p>
                   </a:txBody>
                   <a:tcPr>
@@ -8102,10 +8843,16 @@
                           <a:solidFill>
                             <a:srgbClr val="000000"/>
                           </a:solidFill>
-                          <a:latin typeface="Arial"/>
+                          <a:latin typeface="Arial" panose="020B0604020202090204"/>
                         </a:rPr>
                         <a:t>[1.00, 1.70]</a:t>
                       </a:r>
+                      <a:endParaRPr sz="900" b="0">
+                        <a:solidFill>
+                          <a:srgbClr val="000000"/>
+                        </a:solidFill>
+                        <a:latin typeface="Arial" panose="020B0604020202090204"/>
+                      </a:endParaRPr>
                     </a:p>
                   </a:txBody>
                   <a:tcPr>
@@ -8126,10 +8873,16 @@
                           <a:solidFill>
                             <a:srgbClr val="000000"/>
                           </a:solidFill>
-                          <a:latin typeface="Arial"/>
+                          <a:latin typeface="Arial" panose="020B0604020202090204"/>
                         </a:rPr>
                         <a:t>NaN frames in COLVAR</a:t>
                       </a:r>
+                      <a:endParaRPr sz="900" b="0">
+                        <a:solidFill>
+                          <a:srgbClr val="000000"/>
+                        </a:solidFill>
+                        <a:latin typeface="Arial" panose="020B0604020202090204"/>
+                      </a:endParaRPr>
                     </a:p>
                   </a:txBody>
                   <a:tcPr>
@@ -8148,10 +8901,16 @@
                           <a:solidFill>
                             <a:srgbClr val="DC2626"/>
                           </a:solidFill>
-                          <a:latin typeface="Arial"/>
+                          <a:latin typeface="Arial" panose="020B0604020202090204"/>
                         </a:rPr>
                         <a:t>116 / 4631  (2.5%)</a:t>
                       </a:r>
+                      <a:endParaRPr sz="900" b="1">
+                        <a:solidFill>
+                          <a:srgbClr val="DC2626"/>
+                        </a:solidFill>
+                        <a:latin typeface="Arial" panose="020B0604020202090204"/>
+                      </a:endParaRPr>
                     </a:p>
                   </a:txBody>
                   <a:tcPr>
@@ -8170,10 +8929,16 @@
                           <a:solidFill>
                             <a:srgbClr val="16A34A"/>
                           </a:solidFill>
-                          <a:latin typeface="Arial"/>
+                          <a:latin typeface="Arial" panose="020B0604020202090204"/>
                         </a:rPr>
                         <a:t>0</a:t>
                       </a:r>
+                      <a:endParaRPr sz="900" b="1">
+                        <a:solidFill>
+                          <a:srgbClr val="16A34A"/>
+                        </a:solidFill>
+                        <a:latin typeface="Arial" panose="020B0604020202090204"/>
+                      </a:endParaRPr>
                     </a:p>
                   </a:txBody>
                   <a:tcPr>
@@ -8194,10 +8959,16 @@
                           <a:solidFill>
                             <a:srgbClr val="000000"/>
                           </a:solidFill>
-                          <a:latin typeface="Arial"/>
+                          <a:latin typeface="Arial" panose="020B0604020202090204"/>
                         </a:rPr>
                         <a:t>z(R) range</a:t>
                       </a:r>
+                      <a:endParaRPr sz="900" b="0">
+                        <a:solidFill>
+                          <a:srgbClr val="000000"/>
+                        </a:solidFill>
+                        <a:latin typeface="Arial" panose="020B0604020202090204"/>
+                      </a:endParaRPr>
                     </a:p>
                   </a:txBody>
                   <a:tcPr>
@@ -8216,10 +8987,16 @@
                           <a:solidFill>
                             <a:srgbClr val="DC2626"/>
                           </a:solidFill>
-                          <a:latin typeface="Arial"/>
+                          <a:latin typeface="Arial" panose="020B0604020202090204"/>
                         </a:rPr>
                         <a:t>1.45 – 1.92 nm² (anomalous magnitude)</a:t>
                       </a:r>
+                      <a:endParaRPr sz="900" b="1">
+                        <a:solidFill>
+                          <a:srgbClr val="DC2626"/>
+                        </a:solidFill>
+                        <a:latin typeface="Arial" panose="020B0604020202090204"/>
+                      </a:endParaRPr>
                     </a:p>
                   </a:txBody>
                   <a:tcPr>
@@ -8238,10 +9015,16 @@
                           <a:solidFill>
                             <a:srgbClr val="16A34A"/>
                           </a:solidFill>
-                          <a:latin typeface="Arial"/>
+                          <a:latin typeface="Arial" panose="020B0604020202090204"/>
                         </a:rPr>
                         <a:t>0.004 – 0.084 nm² (physical)</a:t>
                       </a:r>
+                      <a:endParaRPr sz="900" b="1">
+                        <a:solidFill>
+                          <a:srgbClr val="16A34A"/>
+                        </a:solidFill>
+                        <a:latin typeface="Arial" panose="020B0604020202090204"/>
+                      </a:endParaRPr>
                     </a:p>
                   </a:txBody>
                   <a:tcPr>
@@ -8262,10 +9045,16 @@
                           <a:solidFill>
                             <a:srgbClr val="000000"/>
                           </a:solidFill>
-                          <a:latin typeface="Arial"/>
+                          <a:latin typeface="Arial" panose="020B0604020202090204"/>
                         </a:rPr>
                         <a:t>Matches SI protocol</a:t>
                       </a:r>
+                      <a:endParaRPr sz="900" b="0">
+                        <a:solidFill>
+                          <a:srgbClr val="000000"/>
+                        </a:solidFill>
+                        <a:latin typeface="Arial" panose="020B0604020202090204"/>
+                      </a:endParaRPr>
                     </a:p>
                   </a:txBody>
                   <a:tcPr>
@@ -8284,10 +9073,16 @@
                           <a:solidFill>
                             <a:srgbClr val="000000"/>
                           </a:solidFill>
-                          <a:latin typeface="Arial"/>
+                          <a:latin typeface="Arial" panose="020B0604020202090204"/>
                         </a:rPr>
                         <a:t>No (SI used 'path CVs', not FUNCPATHMSD)</a:t>
                       </a:r>
+                      <a:endParaRPr sz="900" b="0">
+                        <a:solidFill>
+                          <a:srgbClr val="000000"/>
+                        </a:solidFill>
+                        <a:latin typeface="Arial" panose="020B0604020202090204"/>
+                      </a:endParaRPr>
                     </a:p>
                   </a:txBody>
                   <a:tcPr>
@@ -8306,10 +9101,16 @@
                           <a:solidFill>
                             <a:srgbClr val="16A34A"/>
                           </a:solidFill>
-                          <a:latin typeface="Arial"/>
+                          <a:latin typeface="Arial" panose="020B0604020202090204"/>
                         </a:rPr>
                         <a:t>Yes</a:t>
                       </a:r>
+                      <a:endParaRPr sz="900" b="1">
+                        <a:solidFill>
+                          <a:srgbClr val="16A34A"/>
+                        </a:solidFill>
+                        <a:latin typeface="Arial" panose="020B0604020202090204"/>
+                      </a:endParaRPr>
                     </a:p>
                   </a:txBody>
                   <a:tcPr>
@@ -8346,14 +9147,20 @@
           <a:lstStyle/>
           <a:p>
             <a:r>
-              <a:rPr sz="800" i="1">
+              <a:rPr sz="1000" i="1">
                 <a:solidFill>
                   <a:srgbClr val="666666"/>
                 </a:solidFill>
-                <a:latin typeface="Arial"/>
-              </a:rPr>
-              <a:t>Longleaf test: single_walker/rerun/COLVAR_pathmsd, source-compiled PLUMED 2.9.2  |  FP-020 (conda libplumedKernel.so) in failure-patterns.md  |  PLUMED docs: plumed.org/doc-v2.9/user-doc/html/_p_a_t_h_m_s_d.html</a:t>
-            </a:r>
+                <a:latin typeface="Arial" panose="020B0604020202090204"/>
+              </a:rPr>
+              <a:t>Longleaf: single_walker/rerun/COLVAR_pathmsd (source-compiled PLUMED 2.9.2)  |  FP-020 re-diagnosed 2026-04-09  |  FP-023 logged as empirical observation, not a PLUMED rule</a:t>
+            </a:r>
+            <a:endParaRPr sz="1000" i="1">
+              <a:solidFill>
+                <a:srgbClr val="666666"/>
+              </a:solidFill>
+              <a:latin typeface="Arial" panose="020B0604020202090204"/>
+            </a:endParaRPr>
           </a:p>
         </p:txBody>
       </p:sp>
@@ -8385,10 +9192,16 @@
                 <a:solidFill>
                   <a:srgbClr val="6B7280"/>
                 </a:solidFill>
-                <a:latin typeface="Arial"/>
+                <a:latin typeface="Arial" panose="020B0604020202090204"/>
               </a:rPr>
               <a:t>TrpB MetaD Benchmark  ·  9 / 10</a:t>
             </a:r>
+            <a:endParaRPr sz="800" b="0" i="0">
+              <a:solidFill>
+                <a:srgbClr val="6B7280"/>
+              </a:solidFill>
+              <a:latin typeface="Arial" panose="020B0604020202090204"/>
+            </a:endParaRPr>
           </a:p>
         </p:txBody>
       </p:sp>
@@ -8716,6 +9529,10 @@
       </a:style>
     </a:lnDef>
   </a:objectDefaults>
-  <a:extraClrSchemeLst/>
+  <a:extLst>
+    <a:ext uri="{05A4C25C-085E-4340-85A3-A5531E510DB2}">
+      <thm15:themeFamily xmlns:thm15="http://schemas.microsoft.com/office/thememl/2012/main" name="Office Theme" id="{62F939B6-93AF-4DB8-9C6B-D6C7DFDC589F}" vid="{4A3C46E8-61CC-4603-A589-7422A47A8E4A}"/>
+    </a:ext>
+  </a:extLst>
 </a:theme>
 </file>